--- a/2026/2026-10-09-AI-News.pptx
+++ b/2026/2026-10-09-AI-News.pptx
@@ -5,7 +5,7 @@
     <p:sldMasterId id="2147483659" r:id="rId1"/>
   </p:sldMasterIdLst>
   <p:notesMasterIdLst>
-    <p:notesMasterId r:id="rId32"/>
+    <p:notesMasterId r:id="rId34"/>
   </p:notesMasterIdLst>
   <p:sldIdLst>
     <p:sldId id="256" r:id="rId2"/>
@@ -38,16 +38,18 @@
     <p:sldId id="283" r:id="rId29"/>
     <p:sldId id="284" r:id="rId30"/>
     <p:sldId id="285" r:id="rId31"/>
+    <p:sldId id="286" r:id="rId32"/>
+    <p:sldId id="287" r:id="rId33"/>
   </p:sldIdLst>
   <p:sldSz cx="9144000" cy="5143500" type="screen16x9"/>
   <p:notesSz cx="6858000" cy="9144000"/>
   <p:embeddedFontLst>
     <p:embeddedFont>
       <p:font typeface="Roboto Mono" pitchFamily="49" charset="0"/>
-      <p:regular r:id="rId33"/>
-      <p:bold r:id="rId34"/>
-      <p:italic r:id="rId35"/>
-      <p:boldItalic r:id="rId36"/>
+      <p:regular r:id="rId35"/>
+      <p:bold r:id="rId36"/>
+      <p:italic r:id="rId37"/>
+      <p:boldItalic r:id="rId38"/>
     </p:embeddedFont>
   </p:embeddedFontLst>
   <p:defaultTextStyle>
@@ -1509,6 +1511,118 @@
             </a:r>
             <a:endParaRPr/>
           </a:p>
+          <a:p>
+            <a:pPr marL="0" lvl="0" indent="0" algn="l" rtl="0">
+              <a:spcBef>
+                <a:spcPts val="0"/>
+              </a:spcBef>
+              <a:spcAft>
+                <a:spcPts val="0"/>
+              </a:spcAft>
+              <a:buNone/>
+            </a:pPr>
+            <a:r>
+              <a:rPr lang="en"/>
+              <a:t>Google Gemini 4 Argon: 1M output tokens, cyber defenders first =&gt; Google Gemini 4 Argon</a:t>
+            </a:r>
+            <a:endParaRPr/>
+          </a:p>
+          <a:p>
+            <a:pPr marL="0" lvl="0" indent="0" algn="l" rtl="0">
+              <a:spcBef>
+                <a:spcPts val="0"/>
+              </a:spcBef>
+              <a:spcAft>
+                <a:spcPts val="0"/>
+              </a:spcAft>
+              <a:buNone/>
+            </a:pPr>
+            <a:r>
+              <a:rPr lang="en"/>
+              <a:t>OpenAI publishes 722 math papers from an unreleased model =&gt; OpenAI Publishes 722 Math Papers</a:t>
+            </a:r>
+            <a:endParaRPr/>
+          </a:p>
+          <a:p>
+            <a:pPr marL="0" lvl="0" indent="0" algn="l" rtl="0">
+              <a:spcBef>
+                <a:spcPts val="0"/>
+              </a:spcBef>
+              <a:spcAft>
+                <a:spcPts val="0"/>
+              </a:spcAft>
+              <a:buNone/>
+            </a:pPr>
+            <a:r>
+              <a:rPr lang="en"/>
+              <a:t>OpenAI dots: always-on agents with their own cloud computer =&gt; OpenAI Dots: Always-On Agents</a:t>
+            </a:r>
+            <a:endParaRPr/>
+          </a:p>
+          <a:p>
+            <a:pPr marL="0" lvl="0" indent="0" algn="l" rtl="0">
+              <a:spcBef>
+                <a:spcPts val="0"/>
+              </a:spcBef>
+              <a:spcAft>
+                <a:spcPts val="0"/>
+              </a:spcAft>
+              <a:buNone/>
+            </a:pPr>
+            <a:r>
+              <a:rPr lang="en"/>
+              <a:t>GPT-6.1 Sol, Ultrafast tier and Decisions API =&gt; GPT-6.1 Sol, Ultrafast, Decisions API</a:t>
+            </a:r>
+            <a:endParaRPr/>
+          </a:p>
+          <a:p>
+            <a:pPr marL="0" lvl="0" indent="0" algn="l" rtl="0">
+              <a:spcBef>
+                <a:spcPts val="0"/>
+              </a:spcBef>
+              <a:spcAft>
+                <a:spcPts val="0"/>
+              </a:spcAft>
+              <a:buNone/>
+            </a:pPr>
+            <a:r>
+              <a:rPr lang="en"/>
+              <a:t>Mistral Large 4 "Le Chonk": 1T-parameter open-weight model =&gt; Mistral Large 4 "Le Chonk" 1T Open</a:t>
+            </a:r>
+            <a:endParaRPr/>
+          </a:p>
+          <a:p>
+            <a:pPr marL="0" lvl="0" indent="0" algn="l" rtl="0">
+              <a:spcBef>
+                <a:spcPts val="0"/>
+              </a:spcBef>
+              <a:spcAft>
+                <a:spcPts val="0"/>
+              </a:spcAft>
+              <a:buNone/>
+            </a:pPr>
+            <a:r>
+              <a:rPr lang="en"/>
+              <a:t>Open decision models: Cloudflare Clef, AWS Strands Decider, Liquid d1 =&gt; Open Decision Models: Clef, Decider, d1</a:t>
+            </a:r>
+            <a:endParaRPr/>
+          </a:p>
+          <a:p>
+            <a:pPr marL="0" lvl="0" indent="0" algn="l" rtl="0">
+              <a:spcBef>
+                <a:spcPts val="0"/>
+              </a:spcBef>
+              <a:spcAft>
+                <a:spcPts val="0"/>
+              </a:spcAft>
+              <a:buNone/>
+            </a:pPr>
+            <a:r>
+              <a:rPr lang="en"/>
+              <a:t>NVIDIA OpenShell: a policy-controlled runtime for agents =&gt; NVIDIA OpenShell Agent Runtime</a:t>
+            </a:r>
+            <a:endParaRPr/>
+          </a:p>
         </p:txBody>
       </p:sp>
     </p:spTree>
@@ -1524,7 +1638,7 @@
   <p:cSld>
     <p:spTree>
       <p:nvGrpSpPr>
-        <p:cNvPr id="1" name="Shape 125"/>
+        <p:cNvPr id="1" name="Shape 127"/>
         <p:cNvGrpSpPr/>
         <p:nvPr/>
       </p:nvGrpSpPr>
@@ -1538,7 +1652,7 @@
       </p:grpSpPr>
       <p:sp>
         <p:nvSpPr>
-          <p:cNvPr id="126" name="Google Shape;126;h46ddcecdfadec1ac_0_0:notes"/>
+          <p:cNvPr id="128" name="Google Shape;128;h46ddcecdfadec1ac_0_0:notes"/>
           <p:cNvSpPr>
             <a:spLocks noGrp="1" noRot="1" noChangeAspect="1"/>
           </p:cNvSpPr>
@@ -1579,7 +1693,7 @@
       </p:sp>
       <p:sp>
         <p:nvSpPr>
-          <p:cNvPr id="127" name="Google Shape;127;h46ddcecdfadec1ac_0_0:notes"/>
+          <p:cNvPr id="129" name="Google Shape;129;h46ddcecdfadec1ac_0_0:notes"/>
           <p:cNvSpPr txBox="1">
             <a:spLocks noGrp="1"/>
           </p:cNvSpPr>
@@ -1628,7 +1742,7 @@
   <p:cSld>
     <p:spTree>
       <p:nvGrpSpPr>
-        <p:cNvPr id="1" name="Shape 133"/>
+        <p:cNvPr id="1" name="Shape 135"/>
         <p:cNvGrpSpPr/>
         <p:nvPr/>
       </p:nvGrpSpPr>
@@ -1642,7 +1756,7 @@
       </p:grpSpPr>
       <p:sp>
         <p:nvSpPr>
-          <p:cNvPr id="134" name="Google Shape;134;s-news-2:notes"/>
+          <p:cNvPr id="136" name="Google Shape;136;s-news-2:notes"/>
           <p:cNvSpPr>
             <a:spLocks noGrp="1" noRot="1" noChangeAspect="1"/>
           </p:cNvSpPr>
@@ -1683,7 +1797,7 @@
       </p:sp>
       <p:sp>
         <p:nvSpPr>
-          <p:cNvPr id="135" name="Google Shape;135;s-news-2:notes"/>
+          <p:cNvPr id="137" name="Google Shape;137;s-news-2:notes"/>
           <p:cNvSpPr txBox="1">
             <a:spLocks noGrp="1"/>
           </p:cNvSpPr>
@@ -1732,7 +1846,7 @@
   <p:cSld>
     <p:spTree>
       <p:nvGrpSpPr>
-        <p:cNvPr id="1" name="Shape 142"/>
+        <p:cNvPr id="1" name="Shape 144"/>
         <p:cNvGrpSpPr/>
         <p:nvPr/>
       </p:nvGrpSpPr>
@@ -1746,7 +1860,7 @@
       </p:grpSpPr>
       <p:sp>
         <p:nvSpPr>
-          <p:cNvPr id="143" name="Google Shape;143;hd6f071a16346bd0_1_1:notes"/>
+          <p:cNvPr id="145" name="Google Shape;145;hd6f071a16346bd0_1_1:notes"/>
           <p:cNvSpPr>
             <a:spLocks noGrp="1" noRot="1" noChangeAspect="1"/>
           </p:cNvSpPr>
@@ -1787,7 +1901,7 @@
       </p:sp>
       <p:sp>
         <p:nvSpPr>
-          <p:cNvPr id="144" name="Google Shape;144;hd6f071a16346bd0_1_1:notes"/>
+          <p:cNvPr id="146" name="Google Shape;146;hd6f071a16346bd0_1_1:notes"/>
           <p:cNvSpPr txBox="1">
             <a:spLocks noGrp="1"/>
           </p:cNvSpPr>
@@ -1836,7 +1950,7 @@
   <p:cSld>
     <p:spTree>
       <p:nvGrpSpPr>
-        <p:cNvPr id="1" name="Shape 152"/>
+        <p:cNvPr id="1" name="Shape 154"/>
         <p:cNvGrpSpPr/>
         <p:nvPr/>
       </p:nvGrpSpPr>
@@ -1850,7 +1964,7 @@
       </p:grpSpPr>
       <p:sp>
         <p:nvSpPr>
-          <p:cNvPr id="153" name="Google Shape;153;hd6f071a16346bd0_1_8:notes"/>
+          <p:cNvPr id="155" name="Google Shape;155;hd6f071a16346bd0_1_8:notes"/>
           <p:cNvSpPr>
             <a:spLocks noGrp="1" noRot="1" noChangeAspect="1"/>
           </p:cNvSpPr>
@@ -1891,7 +2005,7 @@
       </p:sp>
       <p:sp>
         <p:nvSpPr>
-          <p:cNvPr id="154" name="Google Shape;154;hd6f071a16346bd0_1_8:notes"/>
+          <p:cNvPr id="156" name="Google Shape;156;hd6f071a16346bd0_1_8:notes"/>
           <p:cNvSpPr txBox="1">
             <a:spLocks noGrp="1"/>
           </p:cNvSpPr>
@@ -1940,7 +2054,7 @@
   <p:cSld>
     <p:spTree>
       <p:nvGrpSpPr>
-        <p:cNvPr id="1" name="Shape 159"/>
+        <p:cNvPr id="1" name="Shape 161"/>
         <p:cNvGrpSpPr/>
         <p:nvPr/>
       </p:nvGrpSpPr>
@@ -1954,7 +2068,7 @@
       </p:grpSpPr>
       <p:sp>
         <p:nvSpPr>
-          <p:cNvPr id="160" name="Google Shape;160;hd6f071a16346bd0_1_14:notes"/>
+          <p:cNvPr id="162" name="Google Shape;162;hd6f071a16346bd0_1_14:notes"/>
           <p:cNvSpPr>
             <a:spLocks noGrp="1" noRot="1" noChangeAspect="1"/>
           </p:cNvSpPr>
@@ -1995,7 +2109,7 @@
       </p:sp>
       <p:sp>
         <p:nvSpPr>
-          <p:cNvPr id="161" name="Google Shape;161;hd6f071a16346bd0_1_14:notes"/>
+          <p:cNvPr id="163" name="Google Shape;163;hd6f071a16346bd0_1_14:notes"/>
           <p:cNvSpPr txBox="1">
             <a:spLocks noGrp="1"/>
           </p:cNvSpPr>
@@ -2044,7 +2158,7 @@
   <p:cSld>
     <p:spTree>
       <p:nvGrpSpPr>
-        <p:cNvPr id="1" name="Shape 166"/>
+        <p:cNvPr id="1" name="Shape 168"/>
         <p:cNvGrpSpPr/>
         <p:nvPr/>
       </p:nvGrpSpPr>
@@ -2058,7 +2172,7 @@
       </p:grpSpPr>
       <p:sp>
         <p:nvSpPr>
-          <p:cNvPr id="167" name="Google Shape;167;h8c6532aae48ba11_0_7:notes"/>
+          <p:cNvPr id="169" name="Google Shape;169;h8c6532aae48ba11_0_7:notes"/>
           <p:cNvSpPr>
             <a:spLocks noGrp="1" noRot="1" noChangeAspect="1"/>
           </p:cNvSpPr>
@@ -2099,7 +2213,7 @@
       </p:sp>
       <p:sp>
         <p:nvSpPr>
-          <p:cNvPr id="168" name="Google Shape;168;h8c6532aae48ba11_0_7:notes"/>
+          <p:cNvPr id="170" name="Google Shape;170;h8c6532aae48ba11_0_7:notes"/>
           <p:cNvSpPr txBox="1">
             <a:spLocks noGrp="1"/>
           </p:cNvSpPr>
@@ -2148,7 +2262,7 @@
   <p:cSld>
     <p:spTree>
       <p:nvGrpSpPr>
-        <p:cNvPr id="1" name="Shape 175"/>
+        <p:cNvPr id="1" name="Shape 177"/>
         <p:cNvGrpSpPr/>
         <p:nvPr/>
       </p:nvGrpSpPr>
@@ -2162,7 +2276,7 @@
       </p:grpSpPr>
       <p:sp>
         <p:nvSpPr>
-          <p:cNvPr id="176" name="Google Shape;176;h1beaa2ea5184a664_0_0:notes"/>
+          <p:cNvPr id="178" name="Google Shape;178;h1beaa2ea5184a664_0_0:notes"/>
           <p:cNvSpPr>
             <a:spLocks noGrp="1" noRot="1" noChangeAspect="1"/>
           </p:cNvSpPr>
@@ -2203,7 +2317,7 @@
       </p:sp>
       <p:sp>
         <p:nvSpPr>
-          <p:cNvPr id="177" name="Google Shape;177;h1beaa2ea5184a664_0_0:notes"/>
+          <p:cNvPr id="179" name="Google Shape;179;h1beaa2ea5184a664_0_0:notes"/>
           <p:cNvSpPr txBox="1">
             <a:spLocks noGrp="1"/>
           </p:cNvSpPr>
@@ -2252,7 +2366,7 @@
   <p:cSld>
     <p:spTree>
       <p:nvGrpSpPr>
-        <p:cNvPr id="1" name="Shape 183"/>
+        <p:cNvPr id="1" name="Shape 185"/>
         <p:cNvGrpSpPr/>
         <p:nvPr/>
       </p:nvGrpSpPr>
@@ -2266,7 +2380,7 @@
       </p:grpSpPr>
       <p:sp>
         <p:nvSpPr>
-          <p:cNvPr id="184" name="Google Shape;184;h780e71aaf4dfc92a_2_0:notes"/>
+          <p:cNvPr id="186" name="Google Shape;186;h780e71aaf4dfc92a_2_0:notes"/>
           <p:cNvSpPr>
             <a:spLocks noGrp="1" noRot="1" noChangeAspect="1"/>
           </p:cNvSpPr>
@@ -2307,7 +2421,7 @@
       </p:sp>
       <p:sp>
         <p:nvSpPr>
-          <p:cNvPr id="185" name="Google Shape;185;h780e71aaf4dfc92a_2_0:notes"/>
+          <p:cNvPr id="187" name="Google Shape;187;h780e71aaf4dfc92a_2_0:notes"/>
           <p:cNvSpPr txBox="1">
             <a:spLocks noGrp="1"/>
           </p:cNvSpPr>
@@ -2356,7 +2470,7 @@
   <p:cSld>
     <p:spTree>
       <p:nvGrpSpPr>
-        <p:cNvPr id="1" name="Shape 191"/>
+        <p:cNvPr id="1" name="Shape 193"/>
         <p:cNvGrpSpPr/>
         <p:nvPr/>
       </p:nvGrpSpPr>
@@ -2370,7 +2484,7 @@
       </p:grpSpPr>
       <p:sp>
         <p:nvSpPr>
-          <p:cNvPr id="192" name="Google Shape;192;s-sign-in-with-chatgpt-lets-7fc6:notes"/>
+          <p:cNvPr id="194" name="Google Shape;194;s-sign-in-with-chatgpt-lets-7fc6:notes"/>
           <p:cNvSpPr>
             <a:spLocks noGrp="1" noRot="1" noChangeAspect="1"/>
           </p:cNvSpPr>
@@ -2411,7 +2525,7 @@
       </p:sp>
       <p:sp>
         <p:nvSpPr>
-          <p:cNvPr id="193" name="Google Shape;193;s-sign-in-with-chatgpt-lets-7fc6:notes"/>
+          <p:cNvPr id="195" name="Google Shape;195;s-sign-in-with-chatgpt-lets-7fc6:notes"/>
           <p:cNvSpPr txBox="1">
             <a:spLocks noGrp="1"/>
           </p:cNvSpPr>
@@ -2460,7 +2574,7 @@
   <p:cSld>
     <p:spTree>
       <p:nvGrpSpPr>
-        <p:cNvPr id="1" name="Shape 202"/>
+        <p:cNvPr id="1" name="Shape 204"/>
         <p:cNvGrpSpPr/>
         <p:nvPr/>
       </p:nvGrpSpPr>
@@ -2474,7 +2588,7 @@
       </p:grpSpPr>
       <p:sp>
         <p:nvSpPr>
-          <p:cNvPr id="203" name="Google Shape;203;h223700df326a0702_1_0:notes"/>
+          <p:cNvPr id="205" name="Google Shape;205;h223700df326a0702_1_0:notes"/>
           <p:cNvSpPr>
             <a:spLocks noGrp="1" noRot="1" noChangeAspect="1"/>
           </p:cNvSpPr>
@@ -2515,7 +2629,7 @@
       </p:sp>
       <p:sp>
         <p:nvSpPr>
-          <p:cNvPr id="204" name="Google Shape;204;h223700df326a0702_1_0:notes"/>
+          <p:cNvPr id="206" name="Google Shape;206;h223700df326a0702_1_0:notes"/>
           <p:cNvSpPr txBox="1">
             <a:spLocks noGrp="1"/>
           </p:cNvSpPr>
@@ -2686,7 +2800,7 @@
   <p:cSld>
     <p:spTree>
       <p:nvGrpSpPr>
-        <p:cNvPr id="1" name="Shape 209"/>
+        <p:cNvPr id="1" name="Shape 211"/>
         <p:cNvGrpSpPr/>
         <p:nvPr/>
       </p:nvGrpSpPr>
@@ -2700,7 +2814,7 @@
       </p:grpSpPr>
       <p:sp>
         <p:nvSpPr>
-          <p:cNvPr id="210" name="Google Shape;210;s-trump-launches-a-super-bbe3:notes"/>
+          <p:cNvPr id="212" name="Google Shape;212;s-trump-launches-a-super-bbe3:notes"/>
           <p:cNvSpPr>
             <a:spLocks noGrp="1" noRot="1" noChangeAspect="1"/>
           </p:cNvSpPr>
@@ -2741,7 +2855,7 @@
       </p:sp>
       <p:sp>
         <p:nvSpPr>
-          <p:cNvPr id="211" name="Google Shape;211;s-trump-launches-a-super-bbe3:notes"/>
+          <p:cNvPr id="213" name="Google Shape;213;s-trump-launches-a-super-bbe3:notes"/>
           <p:cNvSpPr txBox="1">
             <a:spLocks noGrp="1"/>
           </p:cNvSpPr>
@@ -2790,7 +2904,7 @@
   <p:cSld>
     <p:spTree>
       <p:nvGrpSpPr>
-        <p:cNvPr id="1" name="Shape 221"/>
+        <p:cNvPr id="1" name="Shape 223"/>
         <p:cNvGrpSpPr/>
         <p:nvPr/>
       </p:nvGrpSpPr>
@@ -2804,7 +2918,7 @@
       </p:grpSpPr>
       <p:sp>
         <p:nvSpPr>
-          <p:cNvPr id="222" name="Google Shape;222;s-reflection-ai-beam-a-501b-f64a:notes"/>
+          <p:cNvPr id="224" name="Google Shape;224;s-reflection-ai-beam-a-501b-f64a:notes"/>
           <p:cNvSpPr>
             <a:spLocks noGrp="1" noRot="1" noChangeAspect="1"/>
           </p:cNvSpPr>
@@ -2845,7 +2959,7 @@
       </p:sp>
       <p:sp>
         <p:nvSpPr>
-          <p:cNvPr id="223" name="Google Shape;223;s-reflection-ai-beam-a-501b-f64a:notes"/>
+          <p:cNvPr id="225" name="Google Shape;225;s-reflection-ai-beam-a-501b-f64a:notes"/>
           <p:cNvSpPr txBox="1">
             <a:spLocks noGrp="1"/>
           </p:cNvSpPr>
@@ -2894,7 +3008,7 @@
   <p:cSld>
     <p:spTree>
       <p:nvGrpSpPr>
-        <p:cNvPr id="1" name="Shape 233"/>
+        <p:cNvPr id="1" name="Shape 235"/>
         <p:cNvGrpSpPr/>
         <p:nvPr/>
       </p:nvGrpSpPr>
@@ -2908,7 +3022,7 @@
       </p:grpSpPr>
       <p:sp>
         <p:nvSpPr>
-          <p:cNvPr id="234" name="Google Shape;234;s-devin-adds-memory-and-dreaming-9391:notes"/>
+          <p:cNvPr id="236" name="Google Shape;236;s-devin-adds-memory-and-dreaming-9391:notes"/>
           <p:cNvSpPr>
             <a:spLocks noGrp="1" noRot="1" noChangeAspect="1"/>
           </p:cNvSpPr>
@@ -2949,7 +3063,7 @@
       </p:sp>
       <p:sp>
         <p:nvSpPr>
-          <p:cNvPr id="235" name="Google Shape;235;s-devin-adds-memory-and-dreaming-9391:notes"/>
+          <p:cNvPr id="237" name="Google Shape;237;s-devin-adds-memory-and-dreaming-9391:notes"/>
           <p:cNvSpPr txBox="1">
             <a:spLocks noGrp="1"/>
           </p:cNvSpPr>
@@ -2998,7 +3112,7 @@
   <p:cSld>
     <p:spTree>
       <p:nvGrpSpPr>
-        <p:cNvPr id="1" name="Shape 240"/>
+        <p:cNvPr id="1" name="Shape 242"/>
         <p:cNvGrpSpPr/>
         <p:nvPr/>
       </p:nvGrpSpPr>
@@ -3012,7 +3126,7 @@
       </p:grpSpPr>
       <p:sp>
         <p:nvSpPr>
-          <p:cNvPr id="241" name="Google Shape;241;s-layoffs:notes"/>
+          <p:cNvPr id="243" name="Google Shape;243;s-google-gemini-4-argon-1m-ef01:notes"/>
           <p:cNvSpPr>
             <a:spLocks noGrp="1" noRot="1" noChangeAspect="1"/>
           </p:cNvSpPr>
@@ -3053,7 +3167,7 @@
       </p:sp>
       <p:sp>
         <p:nvSpPr>
-          <p:cNvPr id="242" name="Google Shape;242;s-layoffs:notes"/>
+          <p:cNvPr id="244" name="Google Shape;244;s-google-gemini-4-argon-1m-ef01:notes"/>
           <p:cNvSpPr txBox="1">
             <a:spLocks noGrp="1"/>
           </p:cNvSpPr>
@@ -3102,7 +3216,7 @@
   <p:cSld>
     <p:spTree>
       <p:nvGrpSpPr>
-        <p:cNvPr id="1" name="Shape 250"/>
+        <p:cNvPr id="1" name="Shape 249"/>
         <p:cNvGrpSpPr/>
         <p:nvPr/>
       </p:nvGrpSpPr>
@@ -3116,7 +3230,7 @@
       </p:grpSpPr>
       <p:sp>
         <p:nvSpPr>
-          <p:cNvPr id="251" name="Google Shape;251;s-hiring:notes"/>
+          <p:cNvPr id="250" name="Google Shape;250;s-layoffs:notes"/>
           <p:cNvSpPr>
             <a:spLocks noGrp="1" noRot="1" noChangeAspect="1"/>
           </p:cNvSpPr>
@@ -3157,7 +3271,7 @@
       </p:sp>
       <p:sp>
         <p:nvSpPr>
-          <p:cNvPr id="252" name="Google Shape;252;s-hiring:notes"/>
+          <p:cNvPr id="251" name="Google Shape;251;s-layoffs:notes"/>
           <p:cNvSpPr txBox="1">
             <a:spLocks noGrp="1"/>
           </p:cNvSpPr>
@@ -3206,7 +3320,7 @@
   <p:cSld>
     <p:spTree>
       <p:nvGrpSpPr>
-        <p:cNvPr id="1" name="Shape 258"/>
+        <p:cNvPr id="1" name="Shape 259"/>
         <p:cNvGrpSpPr/>
         <p:nvPr/>
       </p:nvGrpSpPr>
@@ -3220,7 +3334,7 @@
       </p:grpSpPr>
       <p:sp>
         <p:nvSpPr>
-          <p:cNvPr id="259" name="Google Shape;259;s-about:notes"/>
+          <p:cNvPr id="260" name="Google Shape;260;s-hiring:notes"/>
           <p:cNvSpPr>
             <a:spLocks noGrp="1" noRot="1" noChangeAspect="1"/>
           </p:cNvSpPr>
@@ -3261,7 +3375,7 @@
       </p:sp>
       <p:sp>
         <p:nvSpPr>
-          <p:cNvPr id="260" name="Google Shape;260;s-about:notes"/>
+          <p:cNvPr id="261" name="Google Shape;261;s-hiring:notes"/>
           <p:cNvSpPr txBox="1">
             <a:spLocks noGrp="1"/>
           </p:cNvSpPr>
@@ -3310,7 +3424,7 @@
   <p:cSld>
     <p:spTree>
       <p:nvGrpSpPr>
-        <p:cNvPr id="1" name="Shape 265"/>
+        <p:cNvPr id="1" name="Shape 267"/>
         <p:cNvGrpSpPr/>
         <p:nvPr/>
       </p:nvGrpSpPr>
@@ -3324,7 +3438,7 @@
       </p:grpSpPr>
       <p:sp>
         <p:nvSpPr>
-          <p:cNvPr id="266" name="Google Shape;266;s-thanks:notes"/>
+          <p:cNvPr id="268" name="Google Shape;268;s-about:notes"/>
           <p:cNvSpPr>
             <a:spLocks noGrp="1" noRot="1" noChangeAspect="1"/>
           </p:cNvSpPr>
@@ -3365,7 +3479,7 @@
       </p:sp>
       <p:sp>
         <p:nvSpPr>
-          <p:cNvPr id="267" name="Google Shape;267;s-thanks:notes"/>
+          <p:cNvPr id="269" name="Google Shape;269;s-about:notes"/>
           <p:cNvSpPr txBox="1">
             <a:spLocks noGrp="1"/>
           </p:cNvSpPr>
@@ -3414,7 +3528,7 @@
   <p:cSld>
     <p:spTree>
       <p:nvGrpSpPr>
-        <p:cNvPr id="1" name="Shape 271"/>
+        <p:cNvPr id="1" name="Shape 274"/>
         <p:cNvGrpSpPr/>
         <p:nvPr/>
       </p:nvGrpSpPr>
@@ -3428,7 +3542,7 @@
       </p:grpSpPr>
       <p:sp>
         <p:nvSpPr>
-          <p:cNvPr id="272" name="Google Shape;272;s-separator:notes"/>
+          <p:cNvPr id="275" name="Google Shape;275;s-thanks:notes"/>
           <p:cNvSpPr>
             <a:spLocks noGrp="1" noRot="1" noChangeAspect="1"/>
           </p:cNvSpPr>
@@ -3469,7 +3583,7 @@
       </p:sp>
       <p:sp>
         <p:nvSpPr>
-          <p:cNvPr id="273" name="Google Shape;273;s-separator:notes"/>
+          <p:cNvPr id="276" name="Google Shape;276;s-thanks:notes"/>
           <p:cNvSpPr txBox="1">
             <a:spLocks noGrp="1"/>
           </p:cNvSpPr>
@@ -3501,314 +3615,6 @@
               </a:spcAft>
               <a:buNone/>
             </a:pPr>
-            <a:r>
-              <a:rPr lang="en"/>
-              <a:t>Topic ledger. Kept by g2_add_news.py.</a:t>
-            </a:r>
-            <a:endParaRPr/>
-          </a:p>
-          <a:p>
-            <a:pPr marL="0" lvl="0" indent="0" algn="l" rtl="0">
-              <a:spcBef>
-                <a:spcPts val="0"/>
-              </a:spcBef>
-              <a:spcAft>
-                <a:spcPts val="0"/>
-              </a:spcAft>
-              <a:buNone/>
-            </a:pPr>
-            <a:r>
-              <a:rPr lang="en"/>
-              <a:t>t-sign-in-with-chatgpt-lets-apps-7fc6 | Sign in with ChatGPT lets apps spend your ChatGPT plan</a:t>
-            </a:r>
-            <a:endParaRPr/>
-          </a:p>
-          <a:p>
-            <a:pPr marL="0" lvl="0" indent="0" algn="l" rtl="0">
-              <a:spcBef>
-                <a:spcPts val="0"/>
-              </a:spcBef>
-              <a:spcAft>
-                <a:spcPts val="0"/>
-              </a:spcAft>
-              <a:buNone/>
-            </a:pPr>
-            <a:r>
-              <a:rPr lang="en"/>
-              <a:t>t-six-ai-labs-sign-the-white-20a7 | Six AI labs sign the White House Accord on Super Intelligence</a:t>
-            </a:r>
-            <a:endParaRPr/>
-          </a:p>
-          <a:p>
-            <a:pPr marL="0" lvl="0" indent="0" algn="l" rtl="0">
-              <a:spcBef>
-                <a:spcPts val="0"/>
-              </a:spcBef>
-              <a:spcAft>
-                <a:spcPts val="0"/>
-              </a:spcAft>
-              <a:buNone/>
-            </a:pPr>
-            <a:r>
-              <a:rPr lang="en"/>
-              <a:t>t-ftc-prepares-subpoenas-for-8e5d | FTC prepares subpoenas for OpenAI, Anthropic and METR</a:t>
-            </a:r>
-            <a:endParaRPr/>
-          </a:p>
-          <a:p>
-            <a:pPr marL="0" lvl="0" indent="0" algn="l" rtl="0">
-              <a:spcBef>
-                <a:spcPts val="0"/>
-              </a:spcBef>
-              <a:spcAft>
-                <a:spcPts val="0"/>
-              </a:spcAft>
-              <a:buNone/>
-            </a:pPr>
-            <a:r>
-              <a:rPr lang="en"/>
-              <a:t>t-broadcom-will-lend-anthropic-up-4f6e | Broadcom will lend Anthropic up to $42B to lease TPUs</a:t>
-            </a:r>
-            <a:endParaRPr/>
-          </a:p>
-          <a:p>
-            <a:pPr marL="0" lvl="0" indent="0" algn="l" rtl="0">
-              <a:spcBef>
-                <a:spcPts val="0"/>
-              </a:spcBef>
-              <a:spcAft>
-                <a:spcPts val="0"/>
-              </a:spcAft>
-              <a:buNone/>
-            </a:pPr>
-            <a:r>
-              <a:rPr lang="en"/>
-              <a:t>t-nvidia-dgx-spark-64gb-a-cheaper-824b | NVIDIA DGX Spark 64GB: a cheaper local AI box at $4,999</a:t>
-            </a:r>
-            <a:endParaRPr/>
-          </a:p>
-          <a:p>
-            <a:pPr marL="0" lvl="0" indent="0" algn="l" rtl="0">
-              <a:spcBef>
-                <a:spcPts val="0"/>
-              </a:spcBef>
-              <a:spcAft>
-                <a:spcPts val="0"/>
-              </a:spcAft>
-              <a:buNone/>
-            </a:pPr>
-            <a:r>
-              <a:rPr lang="en"/>
-              <a:t>t-prime-intellect-launches-prime-126d | Prime Intellect launches Prime Inference for open models</a:t>
-            </a:r>
-            <a:endParaRPr/>
-          </a:p>
-          <a:p>
-            <a:pPr marL="0" lvl="0" indent="0" algn="l" rtl="0">
-              <a:spcBef>
-                <a:spcPts val="0"/>
-              </a:spcBef>
-              <a:spcAft>
-                <a:spcPts val="0"/>
-              </a:spcAft>
-              <a:buNone/>
-            </a:pPr>
-            <a:r>
-              <a:rPr lang="en"/>
-              <a:t>t-microsoft-mai-transcribe-2-9d45 | Microsoft MAI-Transcribe-2-Streaming tops Artificial Analysis</a:t>
-            </a:r>
-            <a:endParaRPr/>
-          </a:p>
-          <a:p>
-            <a:pPr marL="0" lvl="0" indent="0" algn="l" rtl="0">
-              <a:spcBef>
-                <a:spcPts val="0"/>
-              </a:spcBef>
-              <a:spcAft>
-                <a:spcPts val="0"/>
-              </a:spcAft>
-              <a:buNone/>
-            </a:pPr>
-            <a:r>
-              <a:rPr lang="en"/>
-              <a:t>t-trump-launches-a-super-bbe3 | Trump launches a Super Intelligence Force under Jay Clayton</a:t>
-            </a:r>
-            <a:endParaRPr/>
-          </a:p>
-          <a:p>
-            <a:pPr marL="0" lvl="0" indent="0" algn="l" rtl="0">
-              <a:spcBef>
-                <a:spcPts val="0"/>
-              </a:spcBef>
-              <a:spcAft>
-                <a:spcPts val="0"/>
-              </a:spcAft>
-              <a:buNone/>
-            </a:pPr>
-            <a:r>
-              <a:rPr lang="en"/>
-              <a:t>t-openai-safety-report-lead-quits-532e | OpenAI safety report lead quits, calls the culture broken</a:t>
-            </a:r>
-            <a:endParaRPr/>
-          </a:p>
-          <a:p>
-            <a:pPr marL="0" lvl="0" indent="0" algn="l" rtl="0">
-              <a:spcBef>
-                <a:spcPts val="0"/>
-              </a:spcBef>
-              <a:spcAft>
-                <a:spcPts val="0"/>
-              </a:spcAft>
-              <a:buNone/>
-            </a:pPr>
-            <a:r>
-              <a:rPr lang="en"/>
-              <a:t>t-aleph-alpha-kolibri-open-78b-8f3a | Aleph Alpha Kolibri: open 78B MoE with 3.5B active and 1M context</a:t>
-            </a:r>
-            <a:endParaRPr/>
-          </a:p>
-          <a:p>
-            <a:pPr marL="0" lvl="0" indent="0" algn="l" rtl="0">
-              <a:spcBef>
-                <a:spcPts val="0"/>
-              </a:spcBef>
-              <a:spcAft>
-                <a:spcPts val="0"/>
-              </a:spcAft>
-              <a:buNone/>
-            </a:pPr>
-            <a:r>
-              <a:rPr lang="en"/>
-              <a:t>t-deepseek-harness-v0-2-ships-d681 | DeepSeek Harness v0.2 ships desktop apps</a:t>
-            </a:r>
-            <a:endParaRPr/>
-          </a:p>
-          <a:p>
-            <a:pPr marL="0" lvl="0" indent="0" algn="l" rtl="0">
-              <a:spcBef>
-                <a:spcPts val="0"/>
-              </a:spcBef>
-              <a:spcAft>
-                <a:spcPts val="0"/>
-              </a:spcAft>
-              <a:buNone/>
-            </a:pPr>
-            <a:r>
-              <a:rPr lang="en"/>
-              <a:t>t-apple-will-tighten-full-disk-5a2d | Apple will tighten Full Disk Access on Macs because of AI agents</a:t>
-            </a:r>
-            <a:endParaRPr/>
-          </a:p>
-          <a:p>
-            <a:pPr marL="0" lvl="0" indent="0" algn="l" rtl="0">
-              <a:spcBef>
-                <a:spcPts val="0"/>
-              </a:spcBef>
-              <a:spcAft>
-                <a:spcPts val="0"/>
-              </a:spcAft>
-              <a:buNone/>
-            </a:pPr>
-            <a:r>
-              <a:rPr lang="en"/>
-              <a:t>t-anthropic-puts-100m-into-a-36b8 | Anthropic puts $100M into a Claude Frontier Academy</a:t>
-            </a:r>
-            <a:endParaRPr/>
-          </a:p>
-          <a:p>
-            <a:pPr marL="0" lvl="0" indent="0" algn="l" rtl="0">
-              <a:spcBef>
-                <a:spcPts val="0"/>
-              </a:spcBef>
-              <a:spcAft>
-                <a:spcPts val="0"/>
-              </a:spcAft>
-              <a:buNone/>
-            </a:pPr>
-            <a:r>
-              <a:rPr lang="en"/>
-              <a:t>t-image-blaster-one-photo-to-a-3d-702b | image-blaster: one photo to a 3D world in 5 minutes</a:t>
-            </a:r>
-            <a:endParaRPr/>
-          </a:p>
-          <a:p>
-            <a:pPr marL="0" lvl="0" indent="0" algn="l" rtl="0">
-              <a:spcBef>
-                <a:spcPts val="0"/>
-              </a:spcBef>
-              <a:spcAft>
-                <a:spcPts val="0"/>
-              </a:spcAft>
-              <a:buNone/>
-            </a:pPr>
-            <a:r>
-              <a:rPr lang="en"/>
-              <a:t>t-reflection-ai-beam-a-501b-open-f64a | Reflection AI Beam: a 501B open-weight model trained in the US</a:t>
-            </a:r>
-            <a:endParaRPr/>
-          </a:p>
-          <a:p>
-            <a:pPr marL="0" lvl="0" indent="0" algn="l" rtl="0">
-              <a:spcBef>
-                <a:spcPts val="0"/>
-              </a:spcBef>
-              <a:spcAft>
-                <a:spcPts val="0"/>
-              </a:spcAft>
-              <a:buNone/>
-            </a:pPr>
-            <a:r>
-              <a:rPr lang="en"/>
-              <a:t>t-openai-watermarks-chatgpt-and-824f | OpenAI watermarks ChatGPT and Codex text in the EU</a:t>
-            </a:r>
-            <a:endParaRPr/>
-          </a:p>
-          <a:p>
-            <a:pPr marL="0" lvl="0" indent="0" algn="l" rtl="0">
-              <a:spcBef>
-                <a:spcPts val="0"/>
-              </a:spcBef>
-              <a:spcAft>
-                <a:spcPts val="0"/>
-              </a:spcAft>
-              <a:buNone/>
-            </a:pPr>
-            <a:r>
-              <a:rPr lang="en"/>
-              <a:t>t-reka-rho-1-one-19b-model-for-c63e | Reka Rho-1: one 19B model for text, video and robot actions</a:t>
-            </a:r>
-            <a:endParaRPr/>
-          </a:p>
-          <a:p>
-            <a:pPr marL="0" lvl="0" indent="0" algn="l" rtl="0">
-              <a:spcBef>
-                <a:spcPts val="0"/>
-              </a:spcBef>
-              <a:spcAft>
-                <a:spcPts val="0"/>
-              </a:spcAft>
-              <a:buNone/>
-            </a:pPr>
-            <a:r>
-              <a:rPr lang="en"/>
-              <a:t>t-a16z-top-100-gen-ai-consumer-c7c2 | a16z Top 100 Gen AI Consumer Apps, 7th edition, follows the money</a:t>
-            </a:r>
-            <a:endParaRPr/>
-          </a:p>
-          <a:p>
-            <a:pPr marL="0" lvl="0" indent="0" algn="l" rtl="0">
-              <a:spcBef>
-                <a:spcPts val="0"/>
-              </a:spcBef>
-              <a:spcAft>
-                <a:spcPts val="0"/>
-              </a:spcAft>
-              <a:buNone/>
-            </a:pPr>
-            <a:r>
-              <a:rPr lang="en"/>
-              <a:t>t-devin-adds-memory-and-dreaming-9391 | Devin adds Memory and Dreaming</a:t>
-            </a:r>
             <a:endParaRPr/>
           </a:p>
         </p:txBody>
@@ -3826,7 +3632,7 @@
   <p:cSld>
     <p:spTree>
       <p:nvGrpSpPr>
-        <p:cNvPr id="1" name="Shape 277"/>
+        <p:cNvPr id="1" name="Shape 280"/>
         <p:cNvGrpSpPr/>
         <p:nvPr/>
       </p:nvGrpSpPr>
@@ -3840,7 +3646,7 @@
       </p:grpSpPr>
       <p:sp>
         <p:nvSpPr>
-          <p:cNvPr id="278" name="Google Shape;278;h780e71aaf4dfc92a_2_8:notes"/>
+          <p:cNvPr id="281" name="Google Shape;281;s-separator:notes"/>
           <p:cNvSpPr>
             <a:spLocks noGrp="1" noRot="1" noChangeAspect="1"/>
           </p:cNvSpPr>
@@ -3881,7 +3687,7 @@
       </p:sp>
       <p:sp>
         <p:nvSpPr>
-          <p:cNvPr id="279" name="Google Shape;279;h780e71aaf4dfc92a_2_8:notes"/>
+          <p:cNvPr id="282" name="Google Shape;282;s-separator:notes"/>
           <p:cNvSpPr txBox="1">
             <a:spLocks noGrp="1"/>
           </p:cNvSpPr>
@@ -3913,6 +3719,426 @@
               </a:spcAft>
               <a:buNone/>
             </a:pPr>
+            <a:r>
+              <a:rPr lang="en"/>
+              <a:t>Topic ledger. Kept by g2_add_news.py.</a:t>
+            </a:r>
+            <a:endParaRPr/>
+          </a:p>
+          <a:p>
+            <a:pPr marL="0" lvl="0" indent="0" algn="l" rtl="0">
+              <a:spcBef>
+                <a:spcPts val="0"/>
+              </a:spcBef>
+              <a:spcAft>
+                <a:spcPts val="0"/>
+              </a:spcAft>
+              <a:buNone/>
+            </a:pPr>
+            <a:r>
+              <a:rPr lang="en"/>
+              <a:t>t-sign-in-with-chatgpt-lets-apps-7fc6 | Sign in with ChatGPT lets apps spend your ChatGPT plan</a:t>
+            </a:r>
+            <a:endParaRPr/>
+          </a:p>
+          <a:p>
+            <a:pPr marL="0" lvl="0" indent="0" algn="l" rtl="0">
+              <a:spcBef>
+                <a:spcPts val="0"/>
+              </a:spcBef>
+              <a:spcAft>
+                <a:spcPts val="0"/>
+              </a:spcAft>
+              <a:buNone/>
+            </a:pPr>
+            <a:r>
+              <a:rPr lang="en"/>
+              <a:t>t-six-ai-labs-sign-the-white-20a7 | Six AI labs sign the White House Accord on Super Intelligence</a:t>
+            </a:r>
+            <a:endParaRPr/>
+          </a:p>
+          <a:p>
+            <a:pPr marL="0" lvl="0" indent="0" algn="l" rtl="0">
+              <a:spcBef>
+                <a:spcPts val="0"/>
+              </a:spcBef>
+              <a:spcAft>
+                <a:spcPts val="0"/>
+              </a:spcAft>
+              <a:buNone/>
+            </a:pPr>
+            <a:r>
+              <a:rPr lang="en"/>
+              <a:t>t-ftc-prepares-subpoenas-for-8e5d | FTC prepares subpoenas for OpenAI, Anthropic and METR</a:t>
+            </a:r>
+            <a:endParaRPr/>
+          </a:p>
+          <a:p>
+            <a:pPr marL="0" lvl="0" indent="0" algn="l" rtl="0">
+              <a:spcBef>
+                <a:spcPts val="0"/>
+              </a:spcBef>
+              <a:spcAft>
+                <a:spcPts val="0"/>
+              </a:spcAft>
+              <a:buNone/>
+            </a:pPr>
+            <a:r>
+              <a:rPr lang="en"/>
+              <a:t>t-broadcom-will-lend-anthropic-up-4f6e | Broadcom will lend Anthropic up to $42B to lease TPUs</a:t>
+            </a:r>
+            <a:endParaRPr/>
+          </a:p>
+          <a:p>
+            <a:pPr marL="0" lvl="0" indent="0" algn="l" rtl="0">
+              <a:spcBef>
+                <a:spcPts val="0"/>
+              </a:spcBef>
+              <a:spcAft>
+                <a:spcPts val="0"/>
+              </a:spcAft>
+              <a:buNone/>
+            </a:pPr>
+            <a:r>
+              <a:rPr lang="en"/>
+              <a:t>t-nvidia-dgx-spark-64gb-a-cheaper-824b | NVIDIA DGX Spark 64GB: a cheaper local AI box at $4,999</a:t>
+            </a:r>
+            <a:endParaRPr/>
+          </a:p>
+          <a:p>
+            <a:pPr marL="0" lvl="0" indent="0" algn="l" rtl="0">
+              <a:spcBef>
+                <a:spcPts val="0"/>
+              </a:spcBef>
+              <a:spcAft>
+                <a:spcPts val="0"/>
+              </a:spcAft>
+              <a:buNone/>
+            </a:pPr>
+            <a:r>
+              <a:rPr lang="en"/>
+              <a:t>t-prime-intellect-launches-prime-126d | Prime Intellect launches Prime Inference for open models</a:t>
+            </a:r>
+            <a:endParaRPr/>
+          </a:p>
+          <a:p>
+            <a:pPr marL="0" lvl="0" indent="0" algn="l" rtl="0">
+              <a:spcBef>
+                <a:spcPts val="0"/>
+              </a:spcBef>
+              <a:spcAft>
+                <a:spcPts val="0"/>
+              </a:spcAft>
+              <a:buNone/>
+            </a:pPr>
+            <a:r>
+              <a:rPr lang="en"/>
+              <a:t>t-microsoft-mai-transcribe-2-9d45 | Microsoft MAI-Transcribe-2-Streaming tops Artificial Analysis</a:t>
+            </a:r>
+            <a:endParaRPr/>
+          </a:p>
+          <a:p>
+            <a:pPr marL="0" lvl="0" indent="0" algn="l" rtl="0">
+              <a:spcBef>
+                <a:spcPts val="0"/>
+              </a:spcBef>
+              <a:spcAft>
+                <a:spcPts val="0"/>
+              </a:spcAft>
+              <a:buNone/>
+            </a:pPr>
+            <a:r>
+              <a:rPr lang="en"/>
+              <a:t>t-trump-launches-a-super-bbe3 | Trump launches a Super Intelligence Force under Jay Clayton</a:t>
+            </a:r>
+            <a:endParaRPr/>
+          </a:p>
+          <a:p>
+            <a:pPr marL="0" lvl="0" indent="0" algn="l" rtl="0">
+              <a:spcBef>
+                <a:spcPts val="0"/>
+              </a:spcBef>
+              <a:spcAft>
+                <a:spcPts val="0"/>
+              </a:spcAft>
+              <a:buNone/>
+            </a:pPr>
+            <a:r>
+              <a:rPr lang="en"/>
+              <a:t>t-openai-safety-report-lead-quits-532e | OpenAI safety report lead quits, calls the culture broken</a:t>
+            </a:r>
+            <a:endParaRPr/>
+          </a:p>
+          <a:p>
+            <a:pPr marL="0" lvl="0" indent="0" algn="l" rtl="0">
+              <a:spcBef>
+                <a:spcPts val="0"/>
+              </a:spcBef>
+              <a:spcAft>
+                <a:spcPts val="0"/>
+              </a:spcAft>
+              <a:buNone/>
+            </a:pPr>
+            <a:r>
+              <a:rPr lang="en"/>
+              <a:t>t-aleph-alpha-kolibri-open-78b-8f3a | Aleph Alpha Kolibri: open 78B MoE with 3.5B active and 1M context</a:t>
+            </a:r>
+            <a:endParaRPr/>
+          </a:p>
+          <a:p>
+            <a:pPr marL="0" lvl="0" indent="0" algn="l" rtl="0">
+              <a:spcBef>
+                <a:spcPts val="0"/>
+              </a:spcBef>
+              <a:spcAft>
+                <a:spcPts val="0"/>
+              </a:spcAft>
+              <a:buNone/>
+            </a:pPr>
+            <a:r>
+              <a:rPr lang="en"/>
+              <a:t>t-deepseek-harness-v0-2-ships-d681 | DeepSeek Harness v0.2 ships desktop apps</a:t>
+            </a:r>
+            <a:endParaRPr/>
+          </a:p>
+          <a:p>
+            <a:pPr marL="0" lvl="0" indent="0" algn="l" rtl="0">
+              <a:spcBef>
+                <a:spcPts val="0"/>
+              </a:spcBef>
+              <a:spcAft>
+                <a:spcPts val="0"/>
+              </a:spcAft>
+              <a:buNone/>
+            </a:pPr>
+            <a:r>
+              <a:rPr lang="en"/>
+              <a:t>t-apple-will-tighten-full-disk-5a2d | Apple will tighten Full Disk Access on Macs because of AI agents</a:t>
+            </a:r>
+            <a:endParaRPr/>
+          </a:p>
+          <a:p>
+            <a:pPr marL="0" lvl="0" indent="0" algn="l" rtl="0">
+              <a:spcBef>
+                <a:spcPts val="0"/>
+              </a:spcBef>
+              <a:spcAft>
+                <a:spcPts val="0"/>
+              </a:spcAft>
+              <a:buNone/>
+            </a:pPr>
+            <a:r>
+              <a:rPr lang="en"/>
+              <a:t>t-anthropic-puts-100m-into-a-36b8 | Anthropic puts $100M into a Claude Frontier Academy</a:t>
+            </a:r>
+            <a:endParaRPr/>
+          </a:p>
+          <a:p>
+            <a:pPr marL="0" lvl="0" indent="0" algn="l" rtl="0">
+              <a:spcBef>
+                <a:spcPts val="0"/>
+              </a:spcBef>
+              <a:spcAft>
+                <a:spcPts val="0"/>
+              </a:spcAft>
+              <a:buNone/>
+            </a:pPr>
+            <a:r>
+              <a:rPr lang="en"/>
+              <a:t>t-image-blaster-one-photo-to-a-3d-702b | image-blaster: one photo to a 3D world in 5 minutes</a:t>
+            </a:r>
+            <a:endParaRPr/>
+          </a:p>
+          <a:p>
+            <a:pPr marL="0" lvl="0" indent="0" algn="l" rtl="0">
+              <a:spcBef>
+                <a:spcPts val="0"/>
+              </a:spcBef>
+              <a:spcAft>
+                <a:spcPts val="0"/>
+              </a:spcAft>
+              <a:buNone/>
+            </a:pPr>
+            <a:r>
+              <a:rPr lang="en"/>
+              <a:t>t-reflection-ai-beam-a-501b-open-f64a | Reflection AI Beam: a 501B open-weight model trained in the US</a:t>
+            </a:r>
+            <a:endParaRPr/>
+          </a:p>
+          <a:p>
+            <a:pPr marL="0" lvl="0" indent="0" algn="l" rtl="0">
+              <a:spcBef>
+                <a:spcPts val="0"/>
+              </a:spcBef>
+              <a:spcAft>
+                <a:spcPts val="0"/>
+              </a:spcAft>
+              <a:buNone/>
+            </a:pPr>
+            <a:r>
+              <a:rPr lang="en"/>
+              <a:t>t-openai-watermarks-chatgpt-and-824f | OpenAI watermarks ChatGPT and Codex text in the EU</a:t>
+            </a:r>
+            <a:endParaRPr/>
+          </a:p>
+          <a:p>
+            <a:pPr marL="0" lvl="0" indent="0" algn="l" rtl="0">
+              <a:spcBef>
+                <a:spcPts val="0"/>
+              </a:spcBef>
+              <a:spcAft>
+                <a:spcPts val="0"/>
+              </a:spcAft>
+              <a:buNone/>
+            </a:pPr>
+            <a:r>
+              <a:rPr lang="en"/>
+              <a:t>t-reka-rho-1-one-19b-model-for-c63e | Reka Rho-1: one 19B model for text, video and robot actions</a:t>
+            </a:r>
+            <a:endParaRPr/>
+          </a:p>
+          <a:p>
+            <a:pPr marL="0" lvl="0" indent="0" algn="l" rtl="0">
+              <a:spcBef>
+                <a:spcPts val="0"/>
+              </a:spcBef>
+              <a:spcAft>
+                <a:spcPts val="0"/>
+              </a:spcAft>
+              <a:buNone/>
+            </a:pPr>
+            <a:r>
+              <a:rPr lang="en"/>
+              <a:t>t-a16z-top-100-gen-ai-consumer-c7c2 | a16z Top 100 Gen AI Consumer Apps, 7th edition, follows the money</a:t>
+            </a:r>
+            <a:endParaRPr/>
+          </a:p>
+          <a:p>
+            <a:pPr marL="0" lvl="0" indent="0" algn="l" rtl="0">
+              <a:spcBef>
+                <a:spcPts val="0"/>
+              </a:spcBef>
+              <a:spcAft>
+                <a:spcPts val="0"/>
+              </a:spcAft>
+              <a:buNone/>
+            </a:pPr>
+            <a:r>
+              <a:rPr lang="en"/>
+              <a:t>t-devin-adds-memory-and-dreaming-9391 | Devin adds Memory and Dreaming</a:t>
+            </a:r>
+            <a:endParaRPr/>
+          </a:p>
+          <a:p>
+            <a:pPr marL="0" lvl="0" indent="0" algn="l" rtl="0">
+              <a:spcBef>
+                <a:spcPts val="0"/>
+              </a:spcBef>
+              <a:spcAft>
+                <a:spcPts val="0"/>
+              </a:spcAft>
+              <a:buNone/>
+            </a:pPr>
+            <a:r>
+              <a:rPr lang="en"/>
+              <a:t>t-google-gemini-4-argon-1m-output-ef01 | Google Gemini 4 Argon: 1M output tokens, cyber defenders first</a:t>
+            </a:r>
+            <a:endParaRPr/>
+          </a:p>
+          <a:p>
+            <a:pPr marL="0" lvl="0" indent="0" algn="l" rtl="0">
+              <a:spcBef>
+                <a:spcPts val="0"/>
+              </a:spcBef>
+              <a:spcAft>
+                <a:spcPts val="0"/>
+              </a:spcAft>
+              <a:buNone/>
+            </a:pPr>
+            <a:r>
+              <a:rPr lang="en"/>
+              <a:t>t-openai-publishes-722-math-a697 | OpenAI publishes 722 math papers from an unreleased model</a:t>
+            </a:r>
+            <a:endParaRPr/>
+          </a:p>
+          <a:p>
+            <a:pPr marL="0" lvl="0" indent="0" algn="l" rtl="0">
+              <a:spcBef>
+                <a:spcPts val="0"/>
+              </a:spcBef>
+              <a:spcAft>
+                <a:spcPts val="0"/>
+              </a:spcAft>
+              <a:buNone/>
+            </a:pPr>
+            <a:r>
+              <a:rPr lang="en"/>
+              <a:t>t-openai-dots-always-on-agents-e916 | OpenAI dots: always-on agents with their own cloud computer</a:t>
+            </a:r>
+            <a:endParaRPr/>
+          </a:p>
+          <a:p>
+            <a:pPr marL="0" lvl="0" indent="0" algn="l" rtl="0">
+              <a:spcBef>
+                <a:spcPts val="0"/>
+              </a:spcBef>
+              <a:spcAft>
+                <a:spcPts val="0"/>
+              </a:spcAft>
+              <a:buNone/>
+            </a:pPr>
+            <a:r>
+              <a:rPr lang="en"/>
+              <a:t>t-gpt-6-1-sol-ultrafast-tier-and-a8ce | GPT-6.1 Sol, Ultrafast tier and Decisions API</a:t>
+            </a:r>
+            <a:endParaRPr/>
+          </a:p>
+          <a:p>
+            <a:pPr marL="0" lvl="0" indent="0" algn="l" rtl="0">
+              <a:spcBef>
+                <a:spcPts val="0"/>
+              </a:spcBef>
+              <a:spcAft>
+                <a:spcPts val="0"/>
+              </a:spcAft>
+              <a:buNone/>
+            </a:pPr>
+            <a:r>
+              <a:rPr lang="en"/>
+              <a:t>t-mistral-large-4-le-chonk-1t-10d0 | Mistral Large 4 "Le Chonk": 1T-parameter open-weight model</a:t>
+            </a:r>
+            <a:endParaRPr/>
+          </a:p>
+          <a:p>
+            <a:pPr marL="0" lvl="0" indent="0" algn="l" rtl="0">
+              <a:spcBef>
+                <a:spcPts val="0"/>
+              </a:spcBef>
+              <a:spcAft>
+                <a:spcPts val="0"/>
+              </a:spcAft>
+              <a:buNone/>
+            </a:pPr>
+            <a:r>
+              <a:rPr lang="en"/>
+              <a:t>t-open-decision-models-cloudflare-5865 | Open decision models: Cloudflare Clef, AWS Strands Decider, Liquid d1</a:t>
+            </a:r>
+            <a:endParaRPr/>
+          </a:p>
+          <a:p>
+            <a:pPr marL="0" lvl="0" indent="0" algn="l" rtl="0">
+              <a:spcBef>
+                <a:spcPts val="0"/>
+              </a:spcBef>
+              <a:spcAft>
+                <a:spcPts val="0"/>
+              </a:spcAft>
+              <a:buNone/>
+            </a:pPr>
+            <a:r>
+              <a:rPr lang="en"/>
+              <a:t>t-nvidia-openshell-a-policy-411c | NVIDIA OpenShell: a policy-controlled runtime for agents</a:t>
+            </a:r>
             <a:endParaRPr/>
           </a:p>
         </p:txBody>
@@ -3944,7 +4170,7 @@
       </p:grpSpPr>
       <p:sp>
         <p:nvSpPr>
-          <p:cNvPr id="287" name="Google Shape;287;s-parked:notes"/>
+          <p:cNvPr id="287" name="Google Shape;287;h780e71aaf4dfc92a_2_8:notes"/>
           <p:cNvSpPr>
             <a:spLocks noGrp="1" noRot="1" noChangeAspect="1"/>
           </p:cNvSpPr>
@@ -3985,7 +4211,7 @@
       </p:sp>
       <p:sp>
         <p:nvSpPr>
-          <p:cNvPr id="288" name="Google Shape;288;s-parked:notes"/>
+          <p:cNvPr id="288" name="Google Shape;288;h780e71aaf4dfc92a_2_8:notes"/>
           <p:cNvSpPr txBox="1">
             <a:spLocks noGrp="1"/>
           </p:cNvSpPr>
@@ -4156,7 +4382,7 @@
   <p:cSld>
     <p:spTree>
       <p:nvGrpSpPr>
-        <p:cNvPr id="1" name="Shape 294"/>
+        <p:cNvPr id="1" name="Shape 295"/>
         <p:cNvGrpSpPr/>
         <p:nvPr/>
       </p:nvGrpSpPr>
@@ -4170,7 +4396,7 @@
       </p:grpSpPr>
       <p:sp>
         <p:nvSpPr>
-          <p:cNvPr id="295" name="Google Shape;295;h223700df326a0702_1_15:notes"/>
+          <p:cNvPr id="296" name="Google Shape;296;s-parked:notes"/>
           <p:cNvSpPr>
             <a:spLocks noGrp="1" noRot="1" noChangeAspect="1"/>
           </p:cNvSpPr>
@@ -4211,7 +4437,215 @@
       </p:sp>
       <p:sp>
         <p:nvSpPr>
-          <p:cNvPr id="296" name="Google Shape;296;h223700df326a0702_1_15:notes"/>
+          <p:cNvPr id="297" name="Google Shape;297;s-parked:notes"/>
+          <p:cNvSpPr txBox="1">
+            <a:spLocks noGrp="1"/>
+          </p:cNvSpPr>
+          <p:nvPr>
+            <p:ph type="body" idx="1"/>
+          </p:nvPr>
+        </p:nvSpPr>
+        <p:spPr>
+          <a:xfrm>
+            <a:off x="685800" y="4343400"/>
+            <a:ext cx="5486400" cy="4114800"/>
+          </a:xfrm>
+          <a:prstGeom prst="rect">
+            <a:avLst/>
+          </a:prstGeom>
+        </p:spPr>
+        <p:txBody>
+          <a:bodyPr spcFirstLastPara="1" wrap="square" lIns="91425" tIns="91425" rIns="91425" bIns="91425" anchor="t" anchorCtr="0">
+            <a:noAutofit/>
+          </a:bodyPr>
+          <a:lstStyle/>
+          <a:p>
+            <a:pPr marL="0" lvl="0" indent="0" algn="l" rtl="0">
+              <a:spcBef>
+                <a:spcPts val="0"/>
+              </a:spcBef>
+              <a:spcAft>
+                <a:spcPts val="0"/>
+              </a:spcAft>
+              <a:buNone/>
+            </a:pPr>
+            <a:endParaRPr/>
+          </a:p>
+        </p:txBody>
+      </p:sp>
+    </p:spTree>
+  </p:cSld>
+  <p:clrMapOvr>
+    <a:masterClrMapping/>
+  </p:clrMapOvr>
+</p:notes>
+</file>
+
+<file path=ppt/notesSlides/notesSlide31.xml><?xml version="1.0" encoding="utf-8"?>
+<p:notes xmlns:a="http://schemas.openxmlformats.org/drawingml/2006/main" xmlns:r="http://schemas.openxmlformats.org/officeDocument/2006/relationships" xmlns:p="http://schemas.openxmlformats.org/presentationml/2006/main" showMasterSp="0" showMasterPhAnim="0">
+  <p:cSld>
+    <p:spTree>
+      <p:nvGrpSpPr>
+        <p:cNvPr id="1" name="Shape 303"/>
+        <p:cNvGrpSpPr/>
+        <p:nvPr/>
+      </p:nvGrpSpPr>
+      <p:grpSpPr>
+        <a:xfrm>
+          <a:off x="0" y="0"/>
+          <a:ext cx="0" cy="0"/>
+          <a:chOff x="0" y="0"/>
+          <a:chExt cx="0" cy="0"/>
+        </a:xfrm>
+      </p:grpSpPr>
+      <p:sp>
+        <p:nvSpPr>
+          <p:cNvPr id="304" name="Google Shape;304;h223700df326a0702_1_15:notes"/>
+          <p:cNvSpPr>
+            <a:spLocks noGrp="1" noRot="1" noChangeAspect="1"/>
+          </p:cNvSpPr>
+          <p:nvPr>
+            <p:ph type="sldImg" idx="2"/>
+          </p:nvPr>
+        </p:nvSpPr>
+        <p:spPr>
+          <a:xfrm>
+            <a:off x="381300" y="685800"/>
+            <a:ext cx="6096000" cy="3429000"/>
+          </a:xfrm>
+          <a:custGeom>
+            <a:avLst/>
+            <a:gdLst/>
+            <a:ahLst/>
+            <a:cxnLst/>
+            <a:rect l="l" t="t" r="r" b="b"/>
+            <a:pathLst>
+              <a:path w="120000" h="120000" extrusionOk="0">
+                <a:moveTo>
+                  <a:pt x="0" y="0"/>
+                </a:moveTo>
+                <a:lnTo>
+                  <a:pt x="120000" y="0"/>
+                </a:lnTo>
+                <a:lnTo>
+                  <a:pt x="120000" y="120000"/>
+                </a:lnTo>
+                <a:lnTo>
+                  <a:pt x="0" y="120000"/>
+                </a:lnTo>
+                <a:close/>
+              </a:path>
+            </a:pathLst>
+          </a:custGeom>
+        </p:spPr>
+      </p:sp>
+      <p:sp>
+        <p:nvSpPr>
+          <p:cNvPr id="305" name="Google Shape;305;h223700df326a0702_1_15:notes"/>
+          <p:cNvSpPr txBox="1">
+            <a:spLocks noGrp="1"/>
+          </p:cNvSpPr>
+          <p:nvPr>
+            <p:ph type="body" idx="1"/>
+          </p:nvPr>
+        </p:nvSpPr>
+        <p:spPr>
+          <a:xfrm>
+            <a:off x="685800" y="4343400"/>
+            <a:ext cx="5486400" cy="4114800"/>
+          </a:xfrm>
+          <a:prstGeom prst="rect">
+            <a:avLst/>
+          </a:prstGeom>
+        </p:spPr>
+        <p:txBody>
+          <a:bodyPr spcFirstLastPara="1" wrap="square" lIns="91425" tIns="91425" rIns="91425" bIns="91425" anchor="t" anchorCtr="0">
+            <a:noAutofit/>
+          </a:bodyPr>
+          <a:lstStyle/>
+          <a:p>
+            <a:pPr marL="0" lvl="0" indent="0" algn="l" rtl="0">
+              <a:spcBef>
+                <a:spcPts val="0"/>
+              </a:spcBef>
+              <a:spcAft>
+                <a:spcPts val="0"/>
+              </a:spcAft>
+              <a:buNone/>
+            </a:pPr>
+            <a:endParaRPr/>
+          </a:p>
+        </p:txBody>
+      </p:sp>
+    </p:spTree>
+  </p:cSld>
+  <p:clrMapOvr>
+    <a:masterClrMapping/>
+  </p:clrMapOvr>
+</p:notes>
+</file>
+
+<file path=ppt/notesSlides/notesSlide32.xml><?xml version="1.0" encoding="utf-8"?>
+<p:notes xmlns:a="http://schemas.openxmlformats.org/drawingml/2006/main" xmlns:r="http://schemas.openxmlformats.org/officeDocument/2006/relationships" xmlns:p="http://schemas.openxmlformats.org/presentationml/2006/main" showMasterSp="0" showMasterPhAnim="0">
+  <p:cSld>
+    <p:spTree>
+      <p:nvGrpSpPr>
+        <p:cNvPr id="1" name="Shape 311"/>
+        <p:cNvGrpSpPr/>
+        <p:nvPr/>
+      </p:nvGrpSpPr>
+      <p:grpSpPr>
+        <a:xfrm>
+          <a:off x="0" y="0"/>
+          <a:ext cx="0" cy="0"/>
+          <a:chOff x="0" y="0"/>
+          <a:chExt cx="0" cy="0"/>
+        </a:xfrm>
+      </p:grpSpPr>
+      <p:sp>
+        <p:nvSpPr>
+          <p:cNvPr id="312" name="Google Shape;312;h644b97772c5019a7_2_1:notes"/>
+          <p:cNvSpPr>
+            <a:spLocks noGrp="1" noRot="1" noChangeAspect="1"/>
+          </p:cNvSpPr>
+          <p:nvPr>
+            <p:ph type="sldImg" idx="2"/>
+          </p:nvPr>
+        </p:nvSpPr>
+        <p:spPr>
+          <a:xfrm>
+            <a:off x="381300" y="685800"/>
+            <a:ext cx="6096000" cy="3429000"/>
+          </a:xfrm>
+          <a:custGeom>
+            <a:avLst/>
+            <a:gdLst/>
+            <a:ahLst/>
+            <a:cxnLst/>
+            <a:rect l="l" t="t" r="r" b="b"/>
+            <a:pathLst>
+              <a:path w="120000" h="120000" extrusionOk="0">
+                <a:moveTo>
+                  <a:pt x="0" y="0"/>
+                </a:moveTo>
+                <a:lnTo>
+                  <a:pt x="120000" y="0"/>
+                </a:lnTo>
+                <a:lnTo>
+                  <a:pt x="120000" y="120000"/>
+                </a:lnTo>
+                <a:lnTo>
+                  <a:pt x="0" y="120000"/>
+                </a:lnTo>
+                <a:close/>
+              </a:path>
+            </a:pathLst>
+          </a:custGeom>
+        </p:spPr>
+      </p:sp>
+      <p:sp>
+        <p:nvSpPr>
+          <p:cNvPr id="313" name="Google Shape;313;h644b97772c5019a7_2_1:notes"/>
           <p:cNvSpPr txBox="1">
             <a:spLocks noGrp="1"/>
           </p:cNvSpPr>
@@ -4364,7 +4798,7 @@
   <p:cSld>
     <p:spTree>
       <p:nvGrpSpPr>
-        <p:cNvPr id="1" name="Shape 89"/>
+        <p:cNvPr id="1" name="Shape 91"/>
         <p:cNvGrpSpPr/>
         <p:nvPr/>
       </p:nvGrpSpPr>
@@ -4378,7 +4812,7 @@
       </p:grpSpPr>
       <p:sp>
         <p:nvSpPr>
-          <p:cNvPr id="90" name="Google Shape;90;h29df4c4c9dcfba2d_0_10:notes"/>
+          <p:cNvPr id="92" name="Google Shape;92;h29df4c4c9dcfba2d_0_10:notes"/>
           <p:cNvSpPr>
             <a:spLocks noGrp="1" noRot="1" noChangeAspect="1"/>
           </p:cNvSpPr>
@@ -4419,7 +4853,7 @@
       </p:sp>
       <p:sp>
         <p:nvSpPr>
-          <p:cNvPr id="91" name="Google Shape;91;h29df4c4c9dcfba2d_0_10:notes"/>
+          <p:cNvPr id="93" name="Google Shape;93;h29df4c4c9dcfba2d_0_10:notes"/>
           <p:cNvSpPr txBox="1">
             <a:spLocks noGrp="1"/>
           </p:cNvSpPr>
@@ -4468,7 +4902,7 @@
   <p:cSld>
     <p:spTree>
       <p:nvGrpSpPr>
-        <p:cNvPr id="1" name="Shape 96"/>
+        <p:cNvPr id="1" name="Shape 98"/>
         <p:cNvGrpSpPr/>
         <p:nvPr/>
       </p:nvGrpSpPr>
@@ -4482,7 +4916,7 @@
       </p:grpSpPr>
       <p:sp>
         <p:nvSpPr>
-          <p:cNvPr id="97" name="Google Shape;97;h66de801894afa1fa_1_0:notes"/>
+          <p:cNvPr id="99" name="Google Shape;99;h66de801894afa1fa_1_0:notes"/>
           <p:cNvSpPr>
             <a:spLocks noGrp="1" noRot="1" noChangeAspect="1"/>
           </p:cNvSpPr>
@@ -4523,7 +4957,7 @@
       </p:sp>
       <p:sp>
         <p:nvSpPr>
-          <p:cNvPr id="98" name="Google Shape;98;h66de801894afa1fa_1_0:notes"/>
+          <p:cNvPr id="100" name="Google Shape;100;h66de801894afa1fa_1_0:notes"/>
           <p:cNvSpPr txBox="1">
             <a:spLocks noGrp="1"/>
           </p:cNvSpPr>
@@ -4572,7 +5006,7 @@
   <p:cSld>
     <p:spTree>
       <p:nvGrpSpPr>
-        <p:cNvPr id="1" name="Shape 103"/>
+        <p:cNvPr id="1" name="Shape 105"/>
         <p:cNvGrpSpPr/>
         <p:nvPr/>
       </p:nvGrpSpPr>
@@ -4586,7 +5020,7 @@
       </p:grpSpPr>
       <p:sp>
         <p:nvSpPr>
-          <p:cNvPr id="104" name="Google Shape;104;h29df4c4c9dcfba2d_0_18:notes"/>
+          <p:cNvPr id="106" name="Google Shape;106;h29df4c4c9dcfba2d_0_18:notes"/>
           <p:cNvSpPr>
             <a:spLocks noGrp="1" noRot="1" noChangeAspect="1"/>
           </p:cNvSpPr>
@@ -4627,7 +5061,7 @@
       </p:sp>
       <p:sp>
         <p:nvSpPr>
-          <p:cNvPr id="105" name="Google Shape;105;h29df4c4c9dcfba2d_0_18:notes"/>
+          <p:cNvPr id="107" name="Google Shape;107;h29df4c4c9dcfba2d_0_18:notes"/>
           <p:cNvSpPr txBox="1">
             <a:spLocks noGrp="1"/>
           </p:cNvSpPr>
@@ -4676,7 +5110,7 @@
   <p:cSld>
     <p:spTree>
       <p:nvGrpSpPr>
-        <p:cNvPr id="1" name="Shape 110"/>
+        <p:cNvPr id="1" name="Shape 112"/>
         <p:cNvGrpSpPr/>
         <p:nvPr/>
       </p:nvGrpSpPr>
@@ -4690,7 +5124,7 @@
       </p:grpSpPr>
       <p:sp>
         <p:nvSpPr>
-          <p:cNvPr id="111" name="Google Shape;111;h29df4c4c9dcfba2d_0_28:notes"/>
+          <p:cNvPr id="113" name="Google Shape;113;h29df4c4c9dcfba2d_0_28:notes"/>
           <p:cNvSpPr>
             <a:spLocks noGrp="1" noRot="1" noChangeAspect="1"/>
           </p:cNvSpPr>
@@ -4731,7 +5165,7 @@
       </p:sp>
       <p:sp>
         <p:nvSpPr>
-          <p:cNvPr id="112" name="Google Shape;112;h29df4c4c9dcfba2d_0_28:notes"/>
+          <p:cNvPr id="114" name="Google Shape;114;h29df4c4c9dcfba2d_0_28:notes"/>
           <p:cNvSpPr txBox="1">
             <a:spLocks noGrp="1"/>
           </p:cNvSpPr>
@@ -4780,7 +5214,7 @@
   <p:cSld>
     <p:spTree>
       <p:nvGrpSpPr>
-        <p:cNvPr id="1" name="Shape 117"/>
+        <p:cNvPr id="1" name="Shape 119"/>
         <p:cNvGrpSpPr/>
         <p:nvPr/>
       </p:nvGrpSpPr>
@@ -4794,7 +5228,7 @@
       </p:grpSpPr>
       <p:sp>
         <p:nvSpPr>
-          <p:cNvPr id="118" name="Google Shape;118;s-youtube:notes"/>
+          <p:cNvPr id="120" name="Google Shape;120;s-youtube:notes"/>
           <p:cNvSpPr>
             <a:spLocks noGrp="1" noRot="1" noChangeAspect="1"/>
           </p:cNvSpPr>
@@ -4835,7 +5269,7 @@
       </p:sp>
       <p:sp>
         <p:nvSpPr>
-          <p:cNvPr id="119" name="Google Shape;119;s-youtube:notes"/>
+          <p:cNvPr id="121" name="Google Shape;121;s-youtube:notes"/>
           <p:cNvSpPr txBox="1">
             <a:spLocks noGrp="1"/>
           </p:cNvSpPr>
@@ -9705,8 +10139,8 @@
         </p:nvSpPr>
         <p:spPr>
           <a:xfrm>
-            <a:off x="5349240" y="27432"/>
-            <a:ext cx="3758100" cy="676800"/>
+            <a:off x="5349248" y="27425"/>
+            <a:ext cx="3095700" cy="676800"/>
           </a:xfrm>
           <a:prstGeom prst="rect">
             <a:avLst/>
@@ -9747,7 +10181,39 @@
                 <a:cs typeface="Calibri"/>
                 <a:sym typeface="Calibri"/>
               </a:rPr>
-              <a:t>Six labs signed a safety pact and picked their own referees.</a:t>
+              <a:t>Copilot used to live in Word. </a:t>
+            </a:r>
+            <a:endParaRPr sz="1800" b="1" i="1">
+              <a:solidFill>
+                <a:srgbClr val="FF0000"/>
+              </a:solidFill>
+              <a:latin typeface="Calibri"/>
+              <a:ea typeface="Calibri"/>
+              <a:cs typeface="Calibri"/>
+              <a:sym typeface="Calibri"/>
+            </a:endParaRPr>
+          </a:p>
+          <a:p>
+            <a:pPr marL="0" lvl="0" indent="0" algn="l" rtl="0">
+              <a:spcBef>
+                <a:spcPts val="0"/>
+              </a:spcBef>
+              <a:spcAft>
+                <a:spcPts val="0"/>
+              </a:spcAft>
+              <a:buNone/>
+            </a:pPr>
+            <a:r>
+              <a:rPr lang="en" sz="1800" b="1" i="1">
+                <a:solidFill>
+                  <a:srgbClr val="FF0000"/>
+                </a:solidFill>
+                <a:latin typeface="Calibri"/>
+                <a:ea typeface="Calibri"/>
+                <a:cs typeface="Calibri"/>
+                <a:sym typeface="Calibri"/>
+              </a:rPr>
+              <a:t>Now Word lives in Copilot.</a:t>
             </a:r>
             <a:endParaRPr sz="1800" b="1" i="1">
               <a:solidFill>
@@ -9929,7 +10395,7 @@
                 <a:cs typeface="Calibri"/>
                 <a:sym typeface="Calibri"/>
               </a:rPr>
-              <a:t>Building Better Through Constraints</a:t>
+              <a:t>Mistral Large 4 "Le Chonk"</a:t>
             </a:r>
             <a:endParaRPr b="1">
               <a:solidFill>
@@ -9966,7 +10432,7 @@
                 <a:cs typeface="Calibri"/>
                 <a:sym typeface="Calibri"/>
               </a:rPr>
-              <a:t>AI Agents Build a Complex App Feature</a:t>
+              <a:t>Building Better Through Constraints</a:t>
             </a:r>
             <a:endParaRPr b="1">
               <a:solidFill>
@@ -10003,7 +10469,7 @@
                 <a:cs typeface="Calibri"/>
                 <a:sym typeface="Calibri"/>
               </a:rPr>
-              <a:t>Claude Code JavaScript Videos</a:t>
+              <a:t>AI Agents Build a Complex App Feature</a:t>
             </a:r>
             <a:endParaRPr b="1">
               <a:solidFill>
@@ -10040,7 +10506,7 @@
                 <a:cs typeface="Calibri"/>
                 <a:sym typeface="Calibri"/>
               </a:rPr>
-              <a:t>DeepSeek Harness: Evolving Agents</a:t>
+              <a:t>Claude Code JavaScript Videos</a:t>
             </a:r>
             <a:endParaRPr b="1">
               <a:solidFill>
@@ -10077,7 +10543,7 @@
                 <a:cs typeface="Calibri"/>
                 <a:sym typeface="Calibri"/>
               </a:rPr>
-              <a:t>Kent Beck on Craft and AI Coding</a:t>
+              <a:t>DeepSeek Harness: Evolving Agents</a:t>
             </a:r>
             <a:endParaRPr b="1">
               <a:solidFill>
@@ -10114,7 +10580,7 @@
                 <a:cs typeface="Calibri"/>
                 <a:sym typeface="Calibri"/>
               </a:rPr>
-              <a:t>Manus 2.0 and Cue</a:t>
+              <a:t>Kent Beck on Craft and AI Coding</a:t>
             </a:r>
             <a:endParaRPr b="1">
               <a:solidFill>
@@ -10151,7 +10617,7 @@
                 <a:cs typeface="Calibri"/>
                 <a:sym typeface="Calibri"/>
               </a:rPr>
-              <a:t>Research - AI Improves Its Own Design</a:t>
+              <a:t>Manus 2.0 and Cue</a:t>
             </a:r>
             <a:endParaRPr b="1">
               <a:solidFill>
@@ -10222,7 +10688,7 @@
                 <a:cs typeface="Calibri"/>
                 <a:sym typeface="Calibri"/>
               </a:rPr>
-              <a:t>Strata: 125B Model on a Normal PC</a:t>
+              <a:t>Research - AI Improves Its Own Design</a:t>
             </a:r>
             <a:endParaRPr b="1">
               <a:solidFill>
@@ -10259,7 +10725,7 @@
                 <a:cs typeface="Calibri"/>
                 <a:sym typeface="Calibri"/>
               </a:rPr>
-              <a:t>SpaceXAI Renamed SpaceXSI</a:t>
+              <a:t>Strata: 125B Model on a Normal PC</a:t>
             </a:r>
             <a:endParaRPr b="1">
               <a:solidFill>
@@ -10296,7 +10762,7 @@
                 <a:cs typeface="Calibri"/>
                 <a:sym typeface="Calibri"/>
               </a:rPr>
-              <a:t>HumanLayer Multiplayer Agent Workspace</a:t>
+              <a:t>SpaceXAI Renamed SpaceXSI</a:t>
             </a:r>
             <a:endParaRPr b="1">
               <a:solidFill>
@@ -10333,7 +10799,7 @@
                 <a:cs typeface="Calibri"/>
                 <a:sym typeface="Calibri"/>
               </a:rPr>
-              <a:t>AI-Powered Video Editing Workflow</a:t>
+              <a:t>HumanLayer Multiplayer Agent Workspace</a:t>
             </a:r>
             <a:endParaRPr b="1">
               <a:solidFill>
@@ -10370,7 +10836,7 @@
                 <a:cs typeface="Calibri"/>
                 <a:sym typeface="Calibri"/>
               </a:rPr>
-              <a:t>Xiaomi HySparse2 Cuts Agent Context Costs</a:t>
+              <a:t>AI-Powered Video Editing Workflow</a:t>
             </a:r>
             <a:endParaRPr b="1">
               <a:solidFill>
@@ -10407,7 +10873,7 @@
                 <a:cs typeface="Calibri"/>
                 <a:sym typeface="Calibri"/>
               </a:rPr>
-              <a:t>Salesforce JitMem: Memory on Demand</a:t>
+              <a:t>Xiaomi HySparse2 Cuts Agent Context Costs</a:t>
             </a:r>
             <a:endParaRPr b="1">
               <a:solidFill>
@@ -10444,7 +10910,7 @@
                 <a:cs typeface="Calibri"/>
                 <a:sym typeface="Calibri"/>
               </a:rPr>
-              <a:t>Zed + Claude</a:t>
+              <a:t>Salesforce JitMem: Memory on Demand</a:t>
             </a:r>
             <a:endParaRPr b="1">
               <a:solidFill>
@@ -10481,7 +10947,7 @@
                 <a:cs typeface="Calibri"/>
                 <a:sym typeface="Calibri"/>
               </a:rPr>
-              <a:t>Agent Toolkit</a:t>
+              <a:t>Zed + Claude</a:t>
             </a:r>
             <a:endParaRPr b="1">
               <a:solidFill>
@@ -10518,7 +10984,7 @@
                 <a:cs typeface="Calibri"/>
                 <a:sym typeface="Calibri"/>
               </a:rPr>
-              <a:t>Chinese Chips</a:t>
+              <a:t>Agent Toolkit</a:t>
             </a:r>
             <a:endParaRPr b="1">
               <a:solidFill>
@@ -10555,7 +11021,7 @@
                 <a:cs typeface="Calibri"/>
                 <a:sym typeface="Calibri"/>
               </a:rPr>
-              <a:t>Alibaba’s V900 Chip</a:t>
+              <a:t>Chinese Chips</a:t>
             </a:r>
             <a:endParaRPr b="1">
               <a:solidFill>
@@ -10577,7 +11043,7 @@
         </p:nvSpPr>
         <p:spPr>
           <a:xfrm>
-            <a:off x="4590288" y="768240"/>
+            <a:off x="4590288" y="768233"/>
             <a:ext cx="4517100" cy="2094000"/>
           </a:xfrm>
           <a:prstGeom prst="rect">
@@ -10626,7 +11092,7 @@
                 <a:cs typeface="Calibri"/>
                 <a:sym typeface="Calibri"/>
               </a:rPr>
-              <a:t>Sign in with ChatGPT Spends Your Plan</a:t>
+              <a:t>Alibaba’s V900 Chip</a:t>
             </a:r>
             <a:endParaRPr b="1">
               <a:solidFill>
@@ -10663,7 +11129,7 @@
                 <a:cs typeface="Calibri"/>
                 <a:sym typeface="Calibri"/>
               </a:rPr>
-              <a:t>White House Super Intelligence Accord</a:t>
+              <a:t>Sign in with ChatGPT Spends Your Plan</a:t>
             </a:r>
             <a:endParaRPr b="1">
               <a:solidFill>
@@ -10700,7 +11166,7 @@
                 <a:cs typeface="Calibri"/>
                 <a:sym typeface="Calibri"/>
               </a:rPr>
-              <a:t>Microsoft MAI-Transcribe-2-Streaming</a:t>
+              <a:t>White House Super Intelligence Accord</a:t>
             </a:r>
             <a:endParaRPr b="1">
               <a:solidFill>
@@ -10737,7 +11203,7 @@
                 <a:cs typeface="Calibri"/>
                 <a:sym typeface="Calibri"/>
               </a:rPr>
-              <a:t>Agentic AI Token Use Dwarfs Human Use</a:t>
+              <a:t>Microsoft MAI-Transcribe-2-Streaming</a:t>
             </a:r>
             <a:endParaRPr b="1">
               <a:solidFill>
@@ -10774,7 +11240,7 @@
                 <a:cs typeface="Calibri"/>
                 <a:sym typeface="Calibri"/>
               </a:rPr>
-              <a:t>Trump's Super Intelligence Force</a:t>
+              <a:t>Agentic AI Token Use Dwarfs Human Use</a:t>
             </a:r>
             <a:endParaRPr b="1">
               <a:solidFill>
@@ -10811,7 +11277,7 @@
                 <a:cs typeface="Calibri"/>
                 <a:sym typeface="Calibri"/>
               </a:rPr>
-              <a:t>Aleph Alpha Kolibri 78B MoE</a:t>
+              <a:t>Trump's Super Intelligence Force</a:t>
             </a:r>
             <a:endParaRPr b="1">
               <a:solidFill>
@@ -10848,7 +11314,7 @@
                 <a:cs typeface="Calibri"/>
                 <a:sym typeface="Calibri"/>
               </a:rPr>
-              <a:t>image-blaster: Photo to 3D World</a:t>
+              <a:t>Aleph Alpha Kolibri 78B MoE</a:t>
             </a:r>
             <a:endParaRPr b="1">
               <a:solidFill>
@@ -10885,7 +11351,7 @@
                 <a:cs typeface="Calibri"/>
                 <a:sym typeface="Calibri"/>
               </a:rPr>
-              <a:t>Reflection AI Beam 501B Open Model</a:t>
+              <a:t>image-blaster: Photo to 3D World</a:t>
             </a:r>
             <a:endParaRPr b="1">
               <a:solidFill>
@@ -10922,7 +11388,7 @@
                 <a:cs typeface="Calibri"/>
                 <a:sym typeface="Calibri"/>
               </a:rPr>
-              <a:t>Reka Rho-1 19B Multimodal Model</a:t>
+              <a:t>Reflection AI Beam 501B Open Model</a:t>
             </a:r>
             <a:endParaRPr b="1">
               <a:solidFill>
@@ -10944,8 +11410,8 @@
         </p:nvSpPr>
         <p:spPr>
           <a:xfrm>
-            <a:off x="4590288" y="2898792"/>
-            <a:ext cx="4517100" cy="991500"/>
+            <a:off x="4590288" y="2898785"/>
+            <a:ext cx="4517100" cy="1432500"/>
           </a:xfrm>
           <a:prstGeom prst="rect">
             <a:avLst/>
@@ -10993,7 +11459,7 @@
                 <a:cs typeface="Calibri"/>
                 <a:sym typeface="Calibri"/>
               </a:rPr>
-              <a:t>a16z - Top 100 Gen AI Consumer Apps</a:t>
+              <a:t>Reka Rho-1 19B Multimodal Model</a:t>
             </a:r>
             <a:endParaRPr b="1">
               <a:solidFill>
@@ -11030,7 +11496,81 @@
                 <a:cs typeface="Calibri"/>
                 <a:sym typeface="Calibri"/>
               </a:rPr>
+              <a:t>a16z - Top 100 Gen AI Consumer Apps</a:t>
+            </a:r>
+            <a:endParaRPr b="1">
+              <a:solidFill>
+                <a:srgbClr val="4472C4"/>
+              </a:solidFill>
+              <a:latin typeface="Calibri"/>
+              <a:ea typeface="Calibri"/>
+              <a:cs typeface="Calibri"/>
+              <a:sym typeface="Calibri"/>
+            </a:endParaRPr>
+          </a:p>
+          <a:p>
+            <a:pPr marL="171450" lvl="0" indent="-205486" algn="l" rtl="0">
+              <a:spcBef>
+                <a:spcPts val="0"/>
+              </a:spcBef>
+              <a:spcAft>
+                <a:spcPts val="0"/>
+              </a:spcAft>
+              <a:buClr>
+                <a:srgbClr val="4472C4"/>
+              </a:buClr>
+              <a:buSzPts val="1400"/>
+              <a:buFont typeface="Calibri"/>
+              <a:buChar char="●"/>
+            </a:pPr>
+            <a:r>
+              <a:rPr lang="en" b="1">
+                <a:solidFill>
+                  <a:srgbClr val="4472C4"/>
+                </a:solidFill>
+                <a:latin typeface="Calibri"/>
+                <a:ea typeface="Calibri"/>
+                <a:cs typeface="Calibri"/>
+                <a:sym typeface="Calibri"/>
+              </a:rPr>
               <a:t>Devin Memory and Dreaming</a:t>
+            </a:r>
+            <a:endParaRPr b="1">
+              <a:solidFill>
+                <a:srgbClr val="4472C4"/>
+              </a:solidFill>
+              <a:latin typeface="Calibri"/>
+              <a:ea typeface="Calibri"/>
+              <a:cs typeface="Calibri"/>
+              <a:sym typeface="Calibri"/>
+            </a:endParaRPr>
+          </a:p>
+          <a:p>
+            <a:pPr marL="171450" lvl="0" indent="-205486" algn="l" rtl="0">
+              <a:spcBef>
+                <a:spcPts val="0"/>
+              </a:spcBef>
+              <a:spcAft>
+                <a:spcPts val="0"/>
+              </a:spcAft>
+              <a:buClr>
+                <a:srgbClr val="4472C4"/>
+              </a:buClr>
+              <a:buSzPts val="1400"/>
+              <a:buFont typeface="Calibri"/>
+              <a:buChar char="●"/>
+            </a:pPr>
+            <a:r>
+              <a:rPr lang="en" b="1">
+                <a:solidFill>
+                  <a:srgbClr val="4472C4"/>
+                </a:solidFill>
+                <a:latin typeface="Calibri"/>
+                <a:ea typeface="Calibri"/>
+                <a:cs typeface="Calibri"/>
+                <a:sym typeface="Calibri"/>
+              </a:rPr>
+              <a:t>OpenAI Publishes 722 Math Papers</a:t>
             </a:r>
             <a:endParaRPr b="1">
               <a:solidFill>
@@ -11131,7 +11671,7 @@
   <p:cSld>
     <p:spTree>
       <p:nvGrpSpPr>
-        <p:cNvPr id="1" name="Shape 128"/>
+        <p:cNvPr id="1" name="Shape 130"/>
         <p:cNvGrpSpPr/>
         <p:nvPr/>
       </p:nvGrpSpPr>
@@ -11145,7 +11685,7 @@
       </p:grpSpPr>
       <p:sp>
         <p:nvSpPr>
-          <p:cNvPr id="129" name="Google Shape;129;p22"/>
+          <p:cNvPr id="131" name="Google Shape;131;p22"/>
           <p:cNvSpPr txBox="1"/>
           <p:nvPr/>
         </p:nvSpPr>
@@ -11197,7 +11737,7 @@
       </p:sp>
       <p:sp>
         <p:nvSpPr>
-          <p:cNvPr id="130" name="Google Shape;130;p22"/>
+          <p:cNvPr id="132" name="Google Shape;132;p22"/>
           <p:cNvSpPr txBox="1"/>
           <p:nvPr/>
         </p:nvSpPr>
@@ -11740,7 +12280,7 @@
       </p:sp>
       <p:pic>
         <p:nvPicPr>
-          <p:cNvPr id="131" name="Google Shape;131;p22"/>
+          <p:cNvPr id="133" name="Google Shape;133;p22"/>
           <p:cNvPicPr preferRelativeResize="0"/>
           <p:nvPr/>
         </p:nvPicPr>
@@ -11779,7 +12319,7 @@
       </p:pic>
       <p:pic>
         <p:nvPicPr>
-          <p:cNvPr id="132" name="Google Shape;132;p22"/>
+          <p:cNvPr id="134" name="Google Shape;134;p22"/>
           <p:cNvPicPr preferRelativeResize="0"/>
           <p:nvPr/>
         </p:nvPicPr>
@@ -11829,7 +12369,7 @@
   <p:cSld>
     <p:spTree>
       <p:nvGrpSpPr>
-        <p:cNvPr id="1" name="Shape 136"/>
+        <p:cNvPr id="1" name="Shape 138"/>
         <p:cNvGrpSpPr/>
         <p:nvPr/>
       </p:nvGrpSpPr>
@@ -11843,7 +12383,7 @@
       </p:grpSpPr>
       <p:sp>
         <p:nvSpPr>
-          <p:cNvPr id="137" name="Google Shape;137;p23"/>
+          <p:cNvPr id="139" name="Google Shape;139;p23"/>
           <p:cNvSpPr txBox="1"/>
           <p:nvPr/>
         </p:nvSpPr>
@@ -11895,7 +12435,7 @@
       </p:sp>
       <p:sp>
         <p:nvSpPr>
-          <p:cNvPr id="138" name="Google Shape;138;p23"/>
+          <p:cNvPr id="140" name="Google Shape;140;p23"/>
           <p:cNvSpPr txBox="1"/>
           <p:nvPr/>
         </p:nvSpPr>
@@ -12165,7 +12705,7 @@
       </p:sp>
       <p:sp>
         <p:nvSpPr>
-          <p:cNvPr id="139" name="Google Shape;139;p23"/>
+          <p:cNvPr id="141" name="Google Shape;141;p23"/>
           <p:cNvSpPr txBox="1"/>
           <p:nvPr/>
         </p:nvSpPr>
@@ -12689,7 +13229,7 @@
       </p:sp>
       <p:pic>
         <p:nvPicPr>
-          <p:cNvPr id="140" name="Google Shape;140;p23"/>
+          <p:cNvPr id="142" name="Google Shape;142;p23"/>
           <p:cNvPicPr preferRelativeResize="0"/>
           <p:nvPr/>
         </p:nvPicPr>
@@ -12727,7 +13267,7 @@
       </p:pic>
       <p:pic>
         <p:nvPicPr>
-          <p:cNvPr id="141" name="Google Shape;141;p23"/>
+          <p:cNvPr id="143" name="Google Shape;143;p23"/>
           <p:cNvPicPr preferRelativeResize="0"/>
           <p:nvPr/>
         </p:nvPicPr>
@@ -12777,7 +13317,7 @@
   <p:cSld>
     <p:spTree>
       <p:nvGrpSpPr>
-        <p:cNvPr id="1" name="Shape 145"/>
+        <p:cNvPr id="1" name="Shape 147"/>
         <p:cNvGrpSpPr/>
         <p:nvPr/>
       </p:nvGrpSpPr>
@@ -12791,7 +13331,7 @@
       </p:grpSpPr>
       <p:sp>
         <p:nvSpPr>
-          <p:cNvPr id="146" name="Google Shape;146;p24"/>
+          <p:cNvPr id="148" name="Google Shape;148;p24"/>
           <p:cNvSpPr txBox="1"/>
           <p:nvPr/>
         </p:nvSpPr>
@@ -12843,7 +13383,7 @@
       </p:sp>
       <p:sp>
         <p:nvSpPr>
-          <p:cNvPr id="147" name="Google Shape;147;p24"/>
+          <p:cNvPr id="149" name="Google Shape;149;p24"/>
           <p:cNvSpPr txBox="1"/>
           <p:nvPr/>
         </p:nvSpPr>
@@ -13101,7 +13641,7 @@
       </p:sp>
       <p:pic>
         <p:nvPicPr>
-          <p:cNvPr id="148" name="Google Shape;148;p24"/>
+          <p:cNvPr id="150" name="Google Shape;150;p24"/>
           <p:cNvPicPr preferRelativeResize="0"/>
           <p:nvPr/>
         </p:nvPicPr>
@@ -13140,7 +13680,7 @@
       </p:pic>
       <p:sp>
         <p:nvSpPr>
-          <p:cNvPr id="149" name="Google Shape;149;p24"/>
+          <p:cNvPr id="151" name="Google Shape;151;p24"/>
           <p:cNvSpPr txBox="1"/>
           <p:nvPr/>
         </p:nvSpPr>
@@ -13357,7 +13897,7 @@
       </p:sp>
       <p:pic>
         <p:nvPicPr>
-          <p:cNvPr id="150" name="Google Shape;150;p24"/>
+          <p:cNvPr id="152" name="Google Shape;152;p24"/>
           <p:cNvPicPr preferRelativeResize="0"/>
           <p:nvPr/>
         </p:nvPicPr>
@@ -13396,7 +13936,7 @@
       </p:pic>
       <p:pic>
         <p:nvPicPr>
-          <p:cNvPr id="151" name="Google Shape;151;p24" title="XSI.jpg"/>
+          <p:cNvPr id="153" name="Google Shape;153;p24" title="XSI.jpg"/>
           <p:cNvPicPr preferRelativeResize="0"/>
           <p:nvPr/>
         </p:nvPicPr>
@@ -13446,7 +13986,7 @@
   <p:cSld>
     <p:spTree>
       <p:nvGrpSpPr>
-        <p:cNvPr id="1" name="Shape 155"/>
+        <p:cNvPr id="1" name="Shape 157"/>
         <p:cNvGrpSpPr/>
         <p:nvPr/>
       </p:nvGrpSpPr>
@@ -13460,7 +14000,7 @@
       </p:grpSpPr>
       <p:sp>
         <p:nvSpPr>
-          <p:cNvPr id="156" name="Google Shape;156;p25"/>
+          <p:cNvPr id="158" name="Google Shape;158;p25"/>
           <p:cNvSpPr txBox="1"/>
           <p:nvPr/>
         </p:nvSpPr>
@@ -13512,7 +14052,7 @@
       </p:sp>
       <p:sp>
         <p:nvSpPr>
-          <p:cNvPr id="157" name="Google Shape;157;p25"/>
+          <p:cNvPr id="159" name="Google Shape;159;p25"/>
           <p:cNvSpPr txBox="1"/>
           <p:nvPr/>
         </p:nvSpPr>
@@ -13891,7 +14431,7 @@
       </p:sp>
       <p:pic>
         <p:nvPicPr>
-          <p:cNvPr id="158" name="Google Shape;158;p25"/>
+          <p:cNvPr id="160" name="Google Shape;160;p25"/>
           <p:cNvPicPr preferRelativeResize="0"/>
           <p:nvPr/>
         </p:nvPicPr>
@@ -13941,7 +14481,7 @@
   <p:cSld>
     <p:spTree>
       <p:nvGrpSpPr>
-        <p:cNvPr id="1" name="Shape 162"/>
+        <p:cNvPr id="1" name="Shape 164"/>
         <p:cNvGrpSpPr/>
         <p:nvPr/>
       </p:nvGrpSpPr>
@@ -13955,7 +14495,7 @@
       </p:grpSpPr>
       <p:sp>
         <p:nvSpPr>
-          <p:cNvPr id="163" name="Google Shape;163;p26"/>
+          <p:cNvPr id="165" name="Google Shape;165;p26"/>
           <p:cNvSpPr txBox="1"/>
           <p:nvPr/>
         </p:nvSpPr>
@@ -14007,7 +14547,7 @@
       </p:sp>
       <p:sp>
         <p:nvSpPr>
-          <p:cNvPr id="164" name="Google Shape;164;p26"/>
+          <p:cNvPr id="166" name="Google Shape;166;p26"/>
           <p:cNvSpPr txBox="1"/>
           <p:nvPr/>
         </p:nvSpPr>
@@ -15017,7 +15557,7 @@
       </p:sp>
       <p:pic>
         <p:nvPicPr>
-          <p:cNvPr id="165" name="Google Shape;165;p26"/>
+          <p:cNvPr id="167" name="Google Shape;167;p26"/>
           <p:cNvPicPr preferRelativeResize="0"/>
           <p:nvPr/>
         </p:nvPicPr>
@@ -15067,7 +15607,7 @@
   <p:cSld>
     <p:spTree>
       <p:nvGrpSpPr>
-        <p:cNvPr id="1" name="Shape 169"/>
+        <p:cNvPr id="1" name="Shape 171"/>
         <p:cNvGrpSpPr/>
         <p:nvPr/>
       </p:nvGrpSpPr>
@@ -15081,7 +15621,7 @@
       </p:grpSpPr>
       <p:sp>
         <p:nvSpPr>
-          <p:cNvPr id="170" name="Google Shape;170;p27"/>
+          <p:cNvPr id="172" name="Google Shape;172;p27"/>
           <p:cNvSpPr txBox="1"/>
           <p:nvPr/>
         </p:nvSpPr>
@@ -15133,7 +15673,7 @@
       </p:sp>
       <p:sp>
         <p:nvSpPr>
-          <p:cNvPr id="171" name="Google Shape;171;p27"/>
+          <p:cNvPr id="173" name="Google Shape;173;p27"/>
           <p:cNvSpPr txBox="1"/>
           <p:nvPr/>
         </p:nvSpPr>
@@ -15613,7 +16153,7 @@
       </p:sp>
       <p:sp>
         <p:nvSpPr>
-          <p:cNvPr id="172" name="Google Shape;172;p27"/>
+          <p:cNvPr id="174" name="Google Shape;174;p27"/>
           <p:cNvSpPr txBox="1"/>
           <p:nvPr/>
         </p:nvSpPr>
@@ -15933,7 +16473,7 @@
       </p:sp>
       <p:pic>
         <p:nvPicPr>
-          <p:cNvPr id="173" name="Google Shape;173;p27"/>
+          <p:cNvPr id="175" name="Google Shape;175;p27"/>
           <p:cNvPicPr preferRelativeResize="0"/>
           <p:nvPr/>
         </p:nvPicPr>
@@ -15967,7 +16507,7 @@
       </p:pic>
       <p:pic>
         <p:nvPicPr>
-          <p:cNvPr id="174" name="Google Shape;174;p27"/>
+          <p:cNvPr id="176" name="Google Shape;176;p27"/>
           <p:cNvPicPr preferRelativeResize="0"/>
           <p:nvPr/>
         </p:nvPicPr>
@@ -16017,7 +16557,7 @@
   <p:cSld>
     <p:spTree>
       <p:nvGrpSpPr>
-        <p:cNvPr id="1" name="Shape 178"/>
+        <p:cNvPr id="1" name="Shape 180"/>
         <p:cNvGrpSpPr/>
         <p:nvPr/>
       </p:nvGrpSpPr>
@@ -16031,7 +16571,7 @@
       </p:grpSpPr>
       <p:sp>
         <p:nvSpPr>
-          <p:cNvPr id="179" name="Google Shape;179;p28"/>
+          <p:cNvPr id="181" name="Google Shape;181;p28"/>
           <p:cNvSpPr txBox="1"/>
           <p:nvPr/>
         </p:nvSpPr>
@@ -16083,7 +16623,7 @@
       </p:sp>
       <p:sp>
         <p:nvSpPr>
-          <p:cNvPr id="180" name="Google Shape;180;p28"/>
+          <p:cNvPr id="182" name="Google Shape;182;p28"/>
           <p:cNvSpPr txBox="1"/>
           <p:nvPr/>
         </p:nvSpPr>
@@ -16536,7 +17076,7 @@
       </p:sp>
       <p:pic>
         <p:nvPicPr>
-          <p:cNvPr id="181" name="Google Shape;181;p28"/>
+          <p:cNvPr id="183" name="Google Shape;183;p28"/>
           <p:cNvPicPr preferRelativeResize="0"/>
           <p:nvPr/>
         </p:nvPicPr>
@@ -16575,7 +17115,7 @@
       </p:pic>
       <p:sp>
         <p:nvSpPr>
-          <p:cNvPr id="182" name="Google Shape;182;p28"/>
+          <p:cNvPr id="184" name="Google Shape;184;p28"/>
           <p:cNvSpPr txBox="1"/>
           <p:nvPr/>
         </p:nvSpPr>
@@ -16829,7 +17369,7 @@
   <p:cSld>
     <p:spTree>
       <p:nvGrpSpPr>
-        <p:cNvPr id="1" name="Shape 186"/>
+        <p:cNvPr id="1" name="Shape 188"/>
         <p:cNvGrpSpPr/>
         <p:nvPr/>
       </p:nvGrpSpPr>
@@ -16843,7 +17383,7 @@
       </p:grpSpPr>
       <p:sp>
         <p:nvSpPr>
-          <p:cNvPr id="187" name="Google Shape;187;p29"/>
+          <p:cNvPr id="189" name="Google Shape;189;p29"/>
           <p:cNvSpPr txBox="1"/>
           <p:nvPr/>
         </p:nvSpPr>
@@ -16895,7 +17435,7 @@
       </p:sp>
       <p:sp>
         <p:nvSpPr>
-          <p:cNvPr id="188" name="Google Shape;188;p29"/>
+          <p:cNvPr id="190" name="Google Shape;190;p29"/>
           <p:cNvSpPr txBox="1"/>
           <p:nvPr/>
         </p:nvSpPr>
@@ -17393,7 +17933,7 @@
       </p:sp>
       <p:pic>
         <p:nvPicPr>
-          <p:cNvPr id="189" name="Google Shape;189;p29"/>
+          <p:cNvPr id="191" name="Google Shape;191;p29"/>
           <p:cNvPicPr preferRelativeResize="0"/>
           <p:nvPr/>
         </p:nvPicPr>
@@ -17432,7 +17972,7 @@
       </p:pic>
       <p:sp>
         <p:nvSpPr>
-          <p:cNvPr id="190" name="Google Shape;190;p29"/>
+          <p:cNvPr id="192" name="Google Shape;192;p29"/>
           <p:cNvSpPr txBox="1"/>
           <p:nvPr/>
         </p:nvSpPr>
@@ -17700,7 +18240,7 @@
   <p:cSld>
     <p:spTree>
       <p:nvGrpSpPr>
-        <p:cNvPr id="1" name="Shape 194"/>
+        <p:cNvPr id="1" name="Shape 196"/>
         <p:cNvGrpSpPr/>
         <p:nvPr/>
       </p:nvGrpSpPr>
@@ -17714,7 +18254,7 @@
       </p:grpSpPr>
       <p:sp>
         <p:nvSpPr>
-          <p:cNvPr id="195" name="Google Shape;195;p30"/>
+          <p:cNvPr id="197" name="Google Shape;197;p30"/>
           <p:cNvSpPr txBox="1"/>
           <p:nvPr/>
         </p:nvSpPr>
@@ -17766,7 +18306,7 @@
       </p:sp>
       <p:sp>
         <p:nvSpPr>
-          <p:cNvPr id="196" name="Google Shape;196;p30"/>
+          <p:cNvPr id="198" name="Google Shape;198;p30"/>
           <p:cNvSpPr txBox="1"/>
           <p:nvPr/>
         </p:nvSpPr>
@@ -18061,7 +18601,7 @@
       </p:sp>
       <p:sp>
         <p:nvSpPr>
-          <p:cNvPr id="197" name="Google Shape;197;p30"/>
+          <p:cNvPr id="199" name="Google Shape;199;p30"/>
           <p:cNvSpPr txBox="1"/>
           <p:nvPr/>
         </p:nvSpPr>
@@ -18372,7 +18912,7 @@
       </p:sp>
       <p:pic>
         <p:nvPicPr>
-          <p:cNvPr id="198" name="Google Shape;198;p30"/>
+          <p:cNvPr id="200" name="Google Shape;200;p30"/>
           <p:cNvPicPr preferRelativeResize="0"/>
           <p:nvPr/>
         </p:nvPicPr>
@@ -18411,7 +18951,7 @@
       </p:pic>
       <p:pic>
         <p:nvPicPr>
-          <p:cNvPr id="199" name="Google Shape;199;p30"/>
+          <p:cNvPr id="201" name="Google Shape;201;p30"/>
           <p:cNvPicPr preferRelativeResize="0"/>
           <p:nvPr/>
         </p:nvPicPr>
@@ -18450,7 +18990,7 @@
       </p:pic>
       <p:sp>
         <p:nvSpPr>
-          <p:cNvPr id="200" name="Google Shape;200;p30"/>
+          <p:cNvPr id="202" name="Google Shape;202;p30"/>
           <p:cNvSpPr txBox="1"/>
           <p:nvPr/>
         </p:nvSpPr>
@@ -18744,7 +19284,7 @@
       </p:sp>
       <p:pic>
         <p:nvPicPr>
-          <p:cNvPr id="201" name="Google Shape;201;p30"/>
+          <p:cNvPr id="203" name="Google Shape;203;p30"/>
           <p:cNvPicPr preferRelativeResize="0"/>
           <p:nvPr/>
         </p:nvPicPr>
@@ -18794,7 +19334,7 @@
   <p:cSld>
     <p:spTree>
       <p:nvGrpSpPr>
-        <p:cNvPr id="1" name="Shape 205"/>
+        <p:cNvPr id="1" name="Shape 207"/>
         <p:cNvGrpSpPr/>
         <p:nvPr/>
       </p:nvGrpSpPr>
@@ -18808,7 +19348,7 @@
       </p:grpSpPr>
       <p:sp>
         <p:nvSpPr>
-          <p:cNvPr id="206" name="Google Shape;206;p31"/>
+          <p:cNvPr id="208" name="Google Shape;208;p31"/>
           <p:cNvSpPr txBox="1"/>
           <p:nvPr/>
         </p:nvSpPr>
@@ -18860,7 +19400,7 @@
       </p:sp>
       <p:sp>
         <p:nvSpPr>
-          <p:cNvPr id="207" name="Google Shape;207;p31"/>
+          <p:cNvPr id="209" name="Google Shape;209;p31"/>
           <p:cNvSpPr txBox="1"/>
           <p:nvPr/>
         </p:nvSpPr>
@@ -19138,7 +19678,7 @@
       </p:sp>
       <p:pic>
         <p:nvPicPr>
-          <p:cNvPr id="208" name="Google Shape;208;p31"/>
+          <p:cNvPr id="210" name="Google Shape;210;p31"/>
           <p:cNvPicPr preferRelativeResize="0"/>
           <p:nvPr/>
         </p:nvPicPr>
@@ -19669,7 +20209,7 @@
             <a:tbl>
               <a:tblPr>
                 <a:noFill/>
-                <a:tableStyleId>{42403455-CFFB-40D8-8E8D-176729F5D96D}</a:tableStyleId>
+                <a:tableStyleId>{BDD4FA7B-08E0-478A-AFCE-CFB2B937A43D}</a:tableStyleId>
               </a:tblPr>
               <a:tblGrid>
                 <a:gridCol w="219050">
@@ -20588,7 +21128,7 @@
             <a:tbl>
               <a:tblPr>
                 <a:noFill/>
-                <a:tableStyleId>{42403455-CFFB-40D8-8E8D-176729F5D96D}</a:tableStyleId>
+                <a:tableStyleId>{BDD4FA7B-08E0-478A-AFCE-CFB2B937A43D}</a:tableStyleId>
               </a:tblPr>
               <a:tblGrid>
                 <a:gridCol w="276225">
@@ -26920,7 +27460,7 @@
             <a:tbl>
               <a:tblPr>
                 <a:noFill/>
-                <a:tableStyleId>{42403455-CFFB-40D8-8E8D-176729F5D96D}</a:tableStyleId>
+                <a:tableStyleId>{BDD4FA7B-08E0-478A-AFCE-CFB2B937A43D}</a:tableStyleId>
               </a:tblPr>
               <a:tblGrid>
                 <a:gridCol w="276225">
@@ -33244,7 +33784,7 @@
   <p:cSld>
     <p:spTree>
       <p:nvGrpSpPr>
-        <p:cNvPr id="1" name="Shape 212"/>
+        <p:cNvPr id="1" name="Shape 214"/>
         <p:cNvGrpSpPr/>
         <p:nvPr/>
       </p:nvGrpSpPr>
@@ -33258,7 +33798,7 @@
       </p:grpSpPr>
       <p:sp>
         <p:nvSpPr>
-          <p:cNvPr id="213" name="Google Shape;213;p32"/>
+          <p:cNvPr id="215" name="Google Shape;215;p32"/>
           <p:cNvSpPr txBox="1"/>
           <p:nvPr/>
         </p:nvSpPr>
@@ -33310,7 +33850,7 @@
       </p:sp>
       <p:sp>
         <p:nvSpPr>
-          <p:cNvPr id="214" name="Google Shape;214;p32"/>
+          <p:cNvPr id="216" name="Google Shape;216;p32"/>
           <p:cNvSpPr txBox="1"/>
           <p:nvPr/>
         </p:nvSpPr>
@@ -33597,7 +34137,7 @@
       </p:sp>
       <p:sp>
         <p:nvSpPr>
-          <p:cNvPr id="215" name="Google Shape;215;p32"/>
+          <p:cNvPr id="217" name="Google Shape;217;p32"/>
           <p:cNvSpPr txBox="1"/>
           <p:nvPr/>
         </p:nvSpPr>
@@ -33910,7 +34450,7 @@
       </p:sp>
       <p:pic>
         <p:nvPicPr>
-          <p:cNvPr id="216" name="Google Shape;216;p32"/>
+          <p:cNvPr id="218" name="Google Shape;218;p32"/>
           <p:cNvPicPr preferRelativeResize="0"/>
           <p:nvPr/>
         </p:nvPicPr>
@@ -33948,7 +34488,7 @@
       </p:pic>
       <p:sp>
         <p:nvSpPr>
-          <p:cNvPr id="217" name="Google Shape;217;p32"/>
+          <p:cNvPr id="219" name="Google Shape;219;p32"/>
           <p:cNvSpPr txBox="1"/>
           <p:nvPr/>
         </p:nvSpPr>
@@ -34326,7 +34866,7 @@
       </p:sp>
       <p:pic>
         <p:nvPicPr>
-          <p:cNvPr id="218" name="Google Shape;218;p32"/>
+          <p:cNvPr id="220" name="Google Shape;220;p32"/>
           <p:cNvPicPr preferRelativeResize="0"/>
           <p:nvPr/>
         </p:nvPicPr>
@@ -34365,7 +34905,7 @@
       </p:pic>
       <p:pic>
         <p:nvPicPr>
-          <p:cNvPr id="219" name="Google Shape;219;p32"/>
+          <p:cNvPr id="221" name="Google Shape;221;p32"/>
           <p:cNvPicPr preferRelativeResize="0"/>
           <p:nvPr/>
         </p:nvPicPr>
@@ -34404,7 +34944,7 @@
       </p:pic>
       <p:pic>
         <p:nvPicPr>
-          <p:cNvPr id="220" name="Google Shape;220;p32"/>
+          <p:cNvPr id="222" name="Google Shape;222;p32"/>
           <p:cNvPicPr preferRelativeResize="0"/>
           <p:nvPr/>
         </p:nvPicPr>
@@ -34454,7 +34994,7 @@
   <p:cSld>
     <p:spTree>
       <p:nvGrpSpPr>
-        <p:cNvPr id="1" name="Shape 224"/>
+        <p:cNvPr id="1" name="Shape 226"/>
         <p:cNvGrpSpPr/>
         <p:nvPr/>
       </p:nvGrpSpPr>
@@ -34468,7 +35008,7 @@
       </p:grpSpPr>
       <p:sp>
         <p:nvSpPr>
-          <p:cNvPr id="225" name="Google Shape;225;p33"/>
+          <p:cNvPr id="227" name="Google Shape;227;p33"/>
           <p:cNvSpPr txBox="1"/>
           <p:nvPr/>
         </p:nvSpPr>
@@ -34520,7 +35060,7 @@
       </p:sp>
       <p:sp>
         <p:nvSpPr>
-          <p:cNvPr id="226" name="Google Shape;226;p33"/>
+          <p:cNvPr id="228" name="Google Shape;228;p33"/>
           <p:cNvSpPr txBox="1"/>
           <p:nvPr/>
         </p:nvSpPr>
@@ -34806,7 +35346,7 @@
       </p:sp>
       <p:pic>
         <p:nvPicPr>
-          <p:cNvPr id="227" name="Google Shape;227;p33"/>
+          <p:cNvPr id="229" name="Google Shape;229;p33"/>
           <p:cNvPicPr preferRelativeResize="0"/>
           <p:nvPr/>
         </p:nvPicPr>
@@ -34838,7 +35378,7 @@
       </p:pic>
       <p:pic>
         <p:nvPicPr>
-          <p:cNvPr id="228" name="Google Shape;228;p33"/>
+          <p:cNvPr id="230" name="Google Shape;230;p33"/>
           <p:cNvPicPr preferRelativeResize="0"/>
           <p:nvPr/>
         </p:nvPicPr>
@@ -34877,7 +35417,7 @@
       </p:pic>
       <p:sp>
         <p:nvSpPr>
-          <p:cNvPr id="229" name="Google Shape;229;p33"/>
+          <p:cNvPr id="231" name="Google Shape;231;p33"/>
           <p:cNvSpPr txBox="1"/>
           <p:nvPr/>
         </p:nvSpPr>
@@ -35203,7 +35743,7 @@
       </p:sp>
       <p:pic>
         <p:nvPicPr>
-          <p:cNvPr id="230" name="Google Shape;230;p33"/>
+          <p:cNvPr id="232" name="Google Shape;232;p33"/>
           <p:cNvPicPr preferRelativeResize="0"/>
           <p:nvPr/>
         </p:nvPicPr>
@@ -35242,7 +35782,7 @@
       </p:pic>
       <p:sp>
         <p:nvSpPr>
-          <p:cNvPr id="231" name="Google Shape;231;p33"/>
+          <p:cNvPr id="233" name="Google Shape;233;p33"/>
           <p:cNvSpPr txBox="1"/>
           <p:nvPr/>
         </p:nvSpPr>
@@ -35571,7 +36111,7 @@
       </p:sp>
       <p:pic>
         <p:nvPicPr>
-          <p:cNvPr id="232" name="Google Shape;232;p33"/>
+          <p:cNvPr id="234" name="Google Shape;234;p33"/>
           <p:cNvPicPr preferRelativeResize="0"/>
           <p:nvPr/>
         </p:nvPicPr>
@@ -35620,7 +36160,7 @@
   <p:cSld>
     <p:spTree>
       <p:nvGrpSpPr>
-        <p:cNvPr id="1" name="Shape 236"/>
+        <p:cNvPr id="1" name="Shape 238"/>
         <p:cNvGrpSpPr/>
         <p:nvPr/>
       </p:nvGrpSpPr>
@@ -35634,7 +36174,7 @@
       </p:grpSpPr>
       <p:sp>
         <p:nvSpPr>
-          <p:cNvPr id="237" name="Google Shape;237;p34"/>
+          <p:cNvPr id="239" name="Google Shape;239;p34"/>
           <p:cNvSpPr txBox="1"/>
           <p:nvPr/>
         </p:nvSpPr>
@@ -35686,7 +36226,7 @@
       </p:sp>
       <p:sp>
         <p:nvSpPr>
-          <p:cNvPr id="238" name="Google Shape;238;p34"/>
+          <p:cNvPr id="240" name="Google Shape;240;p34"/>
           <p:cNvSpPr txBox="1"/>
           <p:nvPr/>
         </p:nvSpPr>
@@ -36026,7 +36566,7 @@
       </p:sp>
       <p:pic>
         <p:nvPicPr>
-          <p:cNvPr id="239" name="Google Shape;239;p34"/>
+          <p:cNvPr id="241" name="Google Shape;241;p34"/>
           <p:cNvPicPr preferRelativeResize="0"/>
           <p:nvPr/>
         </p:nvPicPr>
@@ -36076,7 +36616,7 @@
   <p:cSld>
     <p:spTree>
       <p:nvGrpSpPr>
-        <p:cNvPr id="1" name="Shape 243"/>
+        <p:cNvPr id="1" name="Shape 245"/>
         <p:cNvGrpSpPr/>
         <p:nvPr/>
       </p:nvGrpSpPr>
@@ -36090,7 +36630,542 @@
       </p:grpSpPr>
       <p:sp>
         <p:nvSpPr>
-          <p:cNvPr id="244" name="Google Shape;244;p35"/>
+          <p:cNvPr id="246" name="Google Shape;246;p35"/>
+          <p:cNvSpPr txBox="1"/>
+          <p:nvPr/>
+        </p:nvSpPr>
+        <p:spPr>
+          <a:xfrm>
+            <a:off x="36576" y="-27432"/>
+            <a:ext cx="1177200" cy="326400"/>
+          </a:xfrm>
+          <a:prstGeom prst="rect">
+            <a:avLst/>
+          </a:prstGeom>
+          <a:noFill/>
+          <a:ln>
+            <a:noFill/>
+          </a:ln>
+        </p:spPr>
+        <p:txBody>
+          <a:bodyPr spcFirstLastPara="1" wrap="square" lIns="9125" tIns="9125" rIns="9125" bIns="9125" anchor="t" anchorCtr="0">
+            <a:spAutoFit/>
+          </a:bodyPr>
+          <a:lstStyle/>
+          <a:p>
+            <a:pPr marL="0" lvl="0" indent="0" algn="l" rtl="0">
+              <a:spcBef>
+                <a:spcPts val="0"/>
+              </a:spcBef>
+              <a:spcAft>
+                <a:spcPts val="0"/>
+              </a:spcAft>
+              <a:buNone/>
+            </a:pPr>
+            <a:r>
+              <a:rPr lang="en" sz="2000" b="1">
+                <a:latin typeface="Calibri"/>
+                <a:ea typeface="Calibri"/>
+                <a:cs typeface="Calibri"/>
+                <a:sym typeface="Calibri"/>
+              </a:rPr>
+              <a:t>AI News</a:t>
+            </a:r>
+            <a:endParaRPr sz="2000" b="1">
+              <a:latin typeface="Calibri"/>
+              <a:ea typeface="Calibri"/>
+              <a:cs typeface="Calibri"/>
+              <a:sym typeface="Calibri"/>
+            </a:endParaRPr>
+          </a:p>
+        </p:txBody>
+      </p:sp>
+      <p:sp>
+        <p:nvSpPr>
+          <p:cNvPr id="247" name="Google Shape;247;p35"/>
+          <p:cNvSpPr txBox="1"/>
+          <p:nvPr/>
+        </p:nvSpPr>
+        <p:spPr>
+          <a:xfrm>
+            <a:off x="93726" y="298976"/>
+            <a:ext cx="5669400" cy="1634700"/>
+          </a:xfrm>
+          <a:prstGeom prst="rect">
+            <a:avLst/>
+          </a:prstGeom>
+          <a:solidFill>
+            <a:srgbClr val="FFF2CC"/>
+          </a:solidFill>
+          <a:ln w="9525" cap="flat" cmpd="sng">
+            <a:solidFill>
+              <a:srgbClr val="FF0000"/>
+            </a:solidFill>
+            <a:prstDash val="solid"/>
+            <a:round/>
+            <a:headEnd type="none" w="sm" len="sm"/>
+            <a:tailEnd type="none" w="sm" len="sm"/>
+          </a:ln>
+        </p:spPr>
+        <p:txBody>
+          <a:bodyPr spcFirstLastPara="1" wrap="square" lIns="9125" tIns="9125" rIns="9125" bIns="9125" anchor="t" anchorCtr="0">
+            <a:spAutoFit/>
+          </a:bodyPr>
+          <a:lstStyle/>
+          <a:p>
+            <a:pPr marL="171450" lvl="0" indent="-133350" algn="l" rtl="0">
+              <a:spcBef>
+                <a:spcPts val="0"/>
+              </a:spcBef>
+              <a:spcAft>
+                <a:spcPts val="0"/>
+              </a:spcAft>
+              <a:buClr>
+                <a:srgbClr val="FF0000"/>
+              </a:buClr>
+              <a:buSzPts val="1200"/>
+              <a:buFont typeface="Calibri"/>
+              <a:buChar char="●"/>
+            </a:pPr>
+            <a:r>
+              <a:rPr lang="en" sz="1200" b="1">
+                <a:solidFill>
+                  <a:srgbClr val="FF0000"/>
+                </a:solidFill>
+                <a:latin typeface="Calibri"/>
+                <a:ea typeface="Calibri"/>
+                <a:cs typeface="Calibri"/>
+                <a:sym typeface="Calibri"/>
+              </a:rPr>
+              <a:t>OpenAI publishes 722 math papers from an unreleased model</a:t>
+            </a:r>
+            <a:endParaRPr sz="1200" b="1">
+              <a:solidFill>
+                <a:srgbClr val="FF0000"/>
+              </a:solidFill>
+              <a:latin typeface="Calibri"/>
+              <a:ea typeface="Calibri"/>
+              <a:cs typeface="Calibri"/>
+              <a:sym typeface="Calibri"/>
+            </a:endParaRPr>
+          </a:p>
+          <a:p>
+            <a:pPr marL="171450" lvl="0" indent="-133350" algn="l" rtl="0">
+              <a:spcBef>
+                <a:spcPts val="0"/>
+              </a:spcBef>
+              <a:spcAft>
+                <a:spcPts val="0"/>
+              </a:spcAft>
+              <a:buClr>
+                <a:srgbClr val="3C78D8"/>
+              </a:buClr>
+              <a:buSzPts val="1200"/>
+              <a:buFont typeface="Calibri"/>
+              <a:buChar char="●"/>
+            </a:pPr>
+            <a:r>
+              <a:rPr lang="en" sz="1200" b="1">
+                <a:solidFill>
+                  <a:srgbClr val="3C78D8"/>
+                </a:solidFill>
+                <a:latin typeface="Calibri"/>
+                <a:ea typeface="Calibri"/>
+                <a:cs typeface="Calibri"/>
+                <a:sym typeface="Calibri"/>
+              </a:rPr>
+              <a:t>722 manuscripts in 372 result families, posted on GitHub</a:t>
+            </a:r>
+            <a:endParaRPr sz="1200" b="1">
+              <a:solidFill>
+                <a:srgbClr val="3C78D8"/>
+              </a:solidFill>
+              <a:latin typeface="Calibri"/>
+              <a:ea typeface="Calibri"/>
+              <a:cs typeface="Calibri"/>
+              <a:sym typeface="Calibri"/>
+            </a:endParaRPr>
+          </a:p>
+          <a:p>
+            <a:pPr marL="171450" lvl="0" indent="-133350" algn="l" rtl="0">
+              <a:spcBef>
+                <a:spcPts val="0"/>
+              </a:spcBef>
+              <a:spcAft>
+                <a:spcPts val="0"/>
+              </a:spcAft>
+              <a:buSzPts val="1200"/>
+              <a:buFont typeface="Calibri"/>
+              <a:buChar char="●"/>
+            </a:pPr>
+            <a:r>
+              <a:rPr lang="en" sz="1200">
+                <a:latin typeface="Calibri"/>
+                <a:ea typeface="Calibri"/>
+                <a:cs typeface="Calibri"/>
+                <a:sym typeface="Calibri"/>
+              </a:rPr>
+              <a:t>Model tried about </a:t>
+            </a:r>
+            <a:r>
+              <a:rPr lang="en" sz="1200">
+                <a:highlight>
+                  <a:srgbClr val="FFF2CC"/>
+                </a:highlight>
+                <a:latin typeface="Calibri"/>
+                <a:ea typeface="Calibri"/>
+                <a:cs typeface="Calibri"/>
+                <a:sym typeface="Calibri"/>
+              </a:rPr>
+              <a:t>4,000</a:t>
+            </a:r>
+            <a:r>
+              <a:rPr lang="en" sz="1200">
+                <a:latin typeface="Calibri"/>
+                <a:ea typeface="Calibri"/>
+                <a:cs typeface="Calibri"/>
+                <a:sym typeface="Calibri"/>
+              </a:rPr>
+              <a:t> open research problems</a:t>
+            </a:r>
+            <a:endParaRPr sz="1200">
+              <a:latin typeface="Calibri"/>
+              <a:ea typeface="Calibri"/>
+              <a:cs typeface="Calibri"/>
+              <a:sym typeface="Calibri"/>
+            </a:endParaRPr>
+          </a:p>
+          <a:p>
+            <a:pPr marL="171450" lvl="0" indent="-133350" algn="l" rtl="0">
+              <a:spcBef>
+                <a:spcPts val="0"/>
+              </a:spcBef>
+              <a:spcAft>
+                <a:spcPts val="0"/>
+              </a:spcAft>
+              <a:buClr>
+                <a:srgbClr val="FF0000"/>
+              </a:buClr>
+              <a:buSzPts val="1200"/>
+              <a:buFont typeface="Calibri"/>
+              <a:buChar char="●"/>
+            </a:pPr>
+            <a:r>
+              <a:rPr lang="en" sz="1200" b="1">
+                <a:solidFill>
+                  <a:srgbClr val="FF0000"/>
+                </a:solidFill>
+                <a:latin typeface="Calibri"/>
+                <a:ea typeface="Calibri"/>
+                <a:cs typeface="Calibri"/>
+                <a:sym typeface="Calibri"/>
+              </a:rPr>
+              <a:t>Boldest claim: a proof of a quasi-Riemann hypothesis</a:t>
+            </a:r>
+            <a:endParaRPr sz="1200" b="1">
+              <a:solidFill>
+                <a:srgbClr val="FF0000"/>
+              </a:solidFill>
+              <a:latin typeface="Calibri"/>
+              <a:ea typeface="Calibri"/>
+              <a:cs typeface="Calibri"/>
+              <a:sym typeface="Calibri"/>
+            </a:endParaRPr>
+          </a:p>
+          <a:p>
+            <a:pPr marL="171450" lvl="0" indent="-133350" algn="l" rtl="0">
+              <a:spcBef>
+                <a:spcPts val="0"/>
+              </a:spcBef>
+              <a:spcAft>
+                <a:spcPts val="0"/>
+              </a:spcAft>
+              <a:buSzPts val="1200"/>
+              <a:buFont typeface="Calibri"/>
+              <a:buChar char="●"/>
+            </a:pPr>
+            <a:r>
+              <a:rPr lang="en" sz="1200">
+                <a:latin typeface="Calibri"/>
+                <a:ea typeface="Calibri"/>
+                <a:cs typeface="Calibri"/>
+                <a:sym typeface="Calibri"/>
+              </a:rPr>
+              <a:t>162 papers have their main results checked in Lean</a:t>
+            </a:r>
+            <a:endParaRPr sz="1200">
+              <a:latin typeface="Calibri"/>
+              <a:ea typeface="Calibri"/>
+              <a:cs typeface="Calibri"/>
+              <a:sym typeface="Calibri"/>
+            </a:endParaRPr>
+          </a:p>
+          <a:p>
+            <a:pPr marL="171450" lvl="0" indent="-133350" algn="l" rtl="0">
+              <a:spcBef>
+                <a:spcPts val="0"/>
+              </a:spcBef>
+              <a:spcAft>
+                <a:spcPts val="0"/>
+              </a:spcAft>
+              <a:buClr>
+                <a:srgbClr val="3C78D8"/>
+              </a:buClr>
+              <a:buSzPts val="1200"/>
+              <a:buFont typeface="Calibri"/>
+              <a:buChar char="●"/>
+            </a:pPr>
+            <a:r>
+              <a:rPr lang="en" sz="1200" b="1">
+                <a:solidFill>
+                  <a:srgbClr val="3C78D8"/>
+                </a:solidFill>
+                <a:latin typeface="Calibri"/>
+                <a:ea typeface="Calibri"/>
+                <a:cs typeface="Calibri"/>
+                <a:sym typeface="Calibri"/>
+              </a:rPr>
+              <a:t>Average cost: about </a:t>
+            </a:r>
+            <a:r>
+              <a:rPr lang="en" sz="1200" b="1">
+                <a:solidFill>
+                  <a:srgbClr val="3C78D8"/>
+                </a:solidFill>
+                <a:highlight>
+                  <a:srgbClr val="FFF2CC"/>
+                </a:highlight>
+                <a:latin typeface="Calibri"/>
+                <a:ea typeface="Calibri"/>
+                <a:cs typeface="Calibri"/>
+                <a:sym typeface="Calibri"/>
+              </a:rPr>
+              <a:t>3 hours</a:t>
+            </a:r>
+            <a:r>
+              <a:rPr lang="en" sz="1200" b="1">
+                <a:solidFill>
+                  <a:srgbClr val="3C78D8"/>
+                </a:solidFill>
+                <a:latin typeface="Calibri"/>
+                <a:ea typeface="Calibri"/>
+                <a:cs typeface="Calibri"/>
+                <a:sym typeface="Calibri"/>
+              </a:rPr>
+              <a:t> of ChatGPT Pro compute per result</a:t>
+            </a:r>
+            <a:endParaRPr sz="1200" b="1">
+              <a:solidFill>
+                <a:srgbClr val="3C78D8"/>
+              </a:solidFill>
+              <a:latin typeface="Calibri"/>
+              <a:ea typeface="Calibri"/>
+              <a:cs typeface="Calibri"/>
+              <a:sym typeface="Calibri"/>
+            </a:endParaRPr>
+          </a:p>
+          <a:p>
+            <a:pPr marL="171450" lvl="0" indent="-133350" algn="l" rtl="0">
+              <a:spcBef>
+                <a:spcPts val="0"/>
+              </a:spcBef>
+              <a:spcAft>
+                <a:spcPts val="0"/>
+              </a:spcAft>
+              <a:buSzPts val="1200"/>
+              <a:buFont typeface="Calibri"/>
+              <a:buChar char="●"/>
+            </a:pPr>
+            <a:r>
+              <a:rPr lang="en" sz="1200">
+                <a:latin typeface="Calibri"/>
+                <a:ea typeface="Calibri"/>
+                <a:cs typeface="Calibri"/>
+                <a:sym typeface="Calibri"/>
+              </a:rPr>
+              <a:t>Levent Alpöge (Anthropic): </a:t>
+            </a:r>
+            <a:r>
+              <a:rPr lang="en" sz="1200" b="1">
+                <a:solidFill>
+                  <a:srgbClr val="FF0000"/>
+                </a:solidFill>
+                <a:latin typeface="Calibri"/>
+                <a:ea typeface="Calibri"/>
+                <a:cs typeface="Calibri"/>
+                <a:sym typeface="Calibri"/>
+              </a:rPr>
+              <a:t>"the most significant moment in mathematical history"</a:t>
+            </a:r>
+            <a:endParaRPr sz="1200" b="1">
+              <a:solidFill>
+                <a:srgbClr val="FF0000"/>
+              </a:solidFill>
+              <a:latin typeface="Calibri"/>
+              <a:ea typeface="Calibri"/>
+              <a:cs typeface="Calibri"/>
+              <a:sym typeface="Calibri"/>
+            </a:endParaRPr>
+          </a:p>
+          <a:p>
+            <a:pPr marL="171450" lvl="0" indent="-133350" algn="l" rtl="0">
+              <a:spcBef>
+                <a:spcPts val="0"/>
+              </a:spcBef>
+              <a:spcAft>
+                <a:spcPts val="0"/>
+              </a:spcAft>
+              <a:buSzPts val="1200"/>
+              <a:buFont typeface="Calibri"/>
+              <a:buChar char="●"/>
+            </a:pPr>
+            <a:r>
+              <a:rPr lang="en" sz="1200">
+                <a:latin typeface="Calibri"/>
+                <a:ea typeface="Calibri"/>
+                <a:cs typeface="Calibri"/>
+                <a:sym typeface="Calibri"/>
+              </a:rPr>
+              <a:t>Nothing is peer reviewed yet; </a:t>
+            </a:r>
+            <a:r>
+              <a:rPr lang="en" sz="1200" b="1">
+                <a:solidFill>
+                  <a:srgbClr val="3C78D8"/>
+                </a:solidFill>
+                <a:latin typeface="Calibri"/>
+                <a:ea typeface="Calibri"/>
+                <a:cs typeface="Calibri"/>
+                <a:sym typeface="Calibri"/>
+              </a:rPr>
+              <a:t>some mathematicians are angry about the volume</a:t>
+            </a:r>
+            <a:endParaRPr sz="1200" b="1">
+              <a:solidFill>
+                <a:srgbClr val="3C78D8"/>
+              </a:solidFill>
+              <a:latin typeface="Calibri"/>
+              <a:ea typeface="Calibri"/>
+              <a:cs typeface="Calibri"/>
+              <a:sym typeface="Calibri"/>
+            </a:endParaRPr>
+          </a:p>
+          <a:p>
+            <a:pPr marL="171450" lvl="0" indent="-114300" algn="l" rtl="0">
+              <a:spcBef>
+                <a:spcPts val="0"/>
+              </a:spcBef>
+              <a:spcAft>
+                <a:spcPts val="0"/>
+              </a:spcAft>
+              <a:buSzPts val="900"/>
+              <a:buFont typeface="Calibri"/>
+              <a:buChar char="●"/>
+            </a:pPr>
+            <a:r>
+              <a:rPr lang="en" sz="900" u="sng">
+                <a:solidFill>
+                  <a:schemeClr val="hlink"/>
+                </a:solidFill>
+                <a:latin typeface="Calibri"/>
+                <a:ea typeface="Calibri"/>
+                <a:cs typeface="Calibri"/>
+                <a:sym typeface="Calibri"/>
+                <a:hlinkClick r:id="rId3"/>
+              </a:rPr>
+              <a:t>https://github.com/openai/math</a:t>
+            </a:r>
+            <a:r>
+              <a:rPr lang="en" sz="900">
+                <a:solidFill>
+                  <a:srgbClr val="0563C1"/>
+                </a:solidFill>
+                <a:latin typeface="Calibri"/>
+                <a:ea typeface="Calibri"/>
+                <a:cs typeface="Calibri"/>
+                <a:sym typeface="Calibri"/>
+              </a:rPr>
+              <a:t> </a:t>
+            </a:r>
+            <a:endParaRPr sz="900">
+              <a:solidFill>
+                <a:srgbClr val="0563C1"/>
+              </a:solidFill>
+              <a:latin typeface="Calibri"/>
+              <a:ea typeface="Calibri"/>
+              <a:cs typeface="Calibri"/>
+              <a:sym typeface="Calibri"/>
+            </a:endParaRPr>
+          </a:p>
+        </p:txBody>
+      </p:sp>
+      <p:pic>
+        <p:nvPicPr>
+          <p:cNvPr id="248" name="Google Shape;248;p35"/>
+          <p:cNvPicPr preferRelativeResize="0"/>
+          <p:nvPr/>
+        </p:nvPicPr>
+        <p:blipFill>
+          <a:blip r:embed="rId4" cstate="email">
+            <a:alphaModFix/>
+            <a:extLst>
+              <a:ext uri="{28A0092B-C50C-407E-A947-70E740481C1C}">
+                <a14:useLocalDpi xmlns:a14="http://schemas.microsoft.com/office/drawing/2010/main"/>
+              </a:ext>
+            </a:extLst>
+          </a:blip>
+          <a:stretch>
+            <a:fillRect/>
+          </a:stretch>
+        </p:blipFill>
+        <p:spPr>
+          <a:xfrm>
+            <a:off x="5896476" y="76297"/>
+            <a:ext cx="3031859" cy="2905028"/>
+          </a:xfrm>
+          <a:prstGeom prst="rect">
+            <a:avLst/>
+          </a:prstGeom>
+          <a:noFill/>
+          <a:ln w="9525" cap="flat" cmpd="sng">
+            <a:solidFill>
+              <a:srgbClr val="FF0000"/>
+            </a:solidFill>
+            <a:prstDash val="solid"/>
+            <a:round/>
+            <a:headEnd type="none" w="sm" len="sm"/>
+            <a:tailEnd type="none" w="sm" len="sm"/>
+          </a:ln>
+        </p:spPr>
+      </p:pic>
+    </p:spTree>
+  </p:cSld>
+  <p:clrMapOvr>
+    <a:masterClrMapping/>
+  </p:clrMapOvr>
+</p:sld>
+</file>
+
+<file path=ppt/slides/slide24.xml><?xml version="1.0" encoding="utf-8"?>
+<p:sld xmlns:a="http://schemas.openxmlformats.org/drawingml/2006/main" xmlns:r="http://schemas.openxmlformats.org/officeDocument/2006/relationships" xmlns:p="http://schemas.openxmlformats.org/presentationml/2006/main">
+  <p:cSld>
+    <p:spTree>
+      <p:nvGrpSpPr>
+        <p:cNvPr id="1" name="Shape 252"/>
+        <p:cNvGrpSpPr/>
+        <p:nvPr/>
+      </p:nvGrpSpPr>
+      <p:grpSpPr>
+        <a:xfrm>
+          <a:off x="0" y="0"/>
+          <a:ext cx="0" cy="0"/>
+          <a:chOff x="0" y="0"/>
+          <a:chExt cx="0" cy="0"/>
+        </a:xfrm>
+      </p:grpSpPr>
+      <p:sp>
+        <p:nvSpPr>
+          <p:cNvPr id="253" name="Google Shape;253;p36"/>
           <p:cNvSpPr txBox="1"/>
           <p:nvPr/>
         </p:nvSpPr>
@@ -36142,7 +37217,7 @@
       </p:sp>
       <p:sp>
         <p:nvSpPr>
-          <p:cNvPr id="245" name="Google Shape;245;p35"/>
+          <p:cNvPr id="254" name="Google Shape;254;p36"/>
           <p:cNvSpPr txBox="1"/>
           <p:nvPr/>
         </p:nvSpPr>
@@ -36282,7 +37357,7 @@
       </p:sp>
       <p:sp>
         <p:nvSpPr>
-          <p:cNvPr id="246" name="Google Shape;246;p35"/>
+          <p:cNvPr id="255" name="Google Shape;255;p36"/>
           <p:cNvSpPr txBox="1"/>
           <p:nvPr/>
         </p:nvSpPr>
@@ -36552,7 +37627,7 @@
       </p:sp>
       <p:sp>
         <p:nvSpPr>
-          <p:cNvPr id="247" name="Google Shape;247;p35"/>
+          <p:cNvPr id="256" name="Google Shape;256;p36"/>
           <p:cNvSpPr txBox="1"/>
           <p:nvPr/>
         </p:nvSpPr>
@@ -36813,7 +37888,7 @@
       </p:sp>
       <p:pic>
         <p:nvPicPr>
-          <p:cNvPr id="248" name="Google Shape;248;p35" descr="auto: layoffs-fyi-chart"/>
+          <p:cNvPr id="257" name="Google Shape;257;p36" descr="auto: layoffs-fyi-chart"/>
           <p:cNvPicPr preferRelativeResize="0"/>
           <p:nvPr/>
         </p:nvPicPr>
@@ -36852,7 +37927,7 @@
       </p:pic>
       <p:pic>
         <p:nvPicPr>
-          <p:cNvPr id="249" name="Google Shape;249;p35" descr="auto: trueup-chart"/>
+          <p:cNvPr id="258" name="Google Shape;258;p36" descr="auto: trueup-chart"/>
           <p:cNvPicPr preferRelativeResize="0"/>
           <p:nvPr/>
         </p:nvPicPr>
@@ -36897,12 +37972,12 @@
 </p:sld>
 </file>
 
-<file path=ppt/slides/slide24.xml><?xml version="1.0" encoding="utf-8"?>
+<file path=ppt/slides/slide25.xml><?xml version="1.0" encoding="utf-8"?>
 <p:sld xmlns:a="http://schemas.openxmlformats.org/drawingml/2006/main" xmlns:r="http://schemas.openxmlformats.org/officeDocument/2006/relationships" xmlns:p="http://schemas.openxmlformats.org/presentationml/2006/main">
   <p:cSld>
     <p:spTree>
       <p:nvGrpSpPr>
-        <p:cNvPr id="1" name="Shape 253"/>
+        <p:cNvPr id="1" name="Shape 262"/>
         <p:cNvGrpSpPr/>
         <p:nvPr/>
       </p:nvGrpSpPr>
@@ -36916,7 +37991,7 @@
       </p:grpSpPr>
       <p:sp>
         <p:nvSpPr>
-          <p:cNvPr id="254" name="Google Shape;254;p36"/>
+          <p:cNvPr id="263" name="Google Shape;263;p37"/>
           <p:cNvSpPr txBox="1"/>
           <p:nvPr/>
         </p:nvSpPr>
@@ -36968,7 +38043,7 @@
       </p:sp>
       <p:sp>
         <p:nvSpPr>
-          <p:cNvPr id="255" name="Google Shape;255;p36"/>
+          <p:cNvPr id="264" name="Google Shape;264;p37"/>
           <p:cNvSpPr txBox="1"/>
           <p:nvPr/>
         </p:nvSpPr>
@@ -37167,7 +38242,7 @@
       </p:sp>
       <p:sp>
         <p:nvSpPr>
-          <p:cNvPr id="256" name="Google Shape;256;p36"/>
+          <p:cNvPr id="265" name="Google Shape;265;p37"/>
           <p:cNvSpPr txBox="1"/>
           <p:nvPr/>
         </p:nvSpPr>
@@ -37517,7 +38592,7 @@
       </p:sp>
       <p:sp>
         <p:nvSpPr>
-          <p:cNvPr id="257" name="Google Shape;257;p36"/>
+          <p:cNvPr id="266" name="Google Shape;266;p37"/>
           <p:cNvSpPr txBox="1"/>
           <p:nvPr/>
         </p:nvSpPr>
@@ -38349,12 +39424,12 @@
 </p:sld>
 </file>
 
-<file path=ppt/slides/slide25.xml><?xml version="1.0" encoding="utf-8"?>
+<file path=ppt/slides/slide26.xml><?xml version="1.0" encoding="utf-8"?>
 <p:sld xmlns:a="http://schemas.openxmlformats.org/drawingml/2006/main" xmlns:r="http://schemas.openxmlformats.org/officeDocument/2006/relationships" xmlns:p="http://schemas.openxmlformats.org/presentationml/2006/main">
   <p:cSld>
     <p:spTree>
       <p:nvGrpSpPr>
-        <p:cNvPr id="1" name="Shape 261"/>
+        <p:cNvPr id="1" name="Shape 270"/>
         <p:cNvGrpSpPr/>
         <p:nvPr/>
       </p:nvGrpSpPr>
@@ -38368,7 +39443,7 @@
       </p:grpSpPr>
       <p:sp>
         <p:nvSpPr>
-          <p:cNvPr id="262" name="Google Shape;262;p37"/>
+          <p:cNvPr id="271" name="Google Shape;271;p38"/>
           <p:cNvSpPr txBox="1"/>
           <p:nvPr/>
         </p:nvSpPr>
@@ -38420,7 +39495,7 @@
       </p:sp>
       <p:sp>
         <p:nvSpPr>
-          <p:cNvPr id="263" name="Google Shape;263;p37"/>
+          <p:cNvPr id="272" name="Google Shape;272;p38"/>
           <p:cNvSpPr txBox="1"/>
           <p:nvPr/>
         </p:nvSpPr>
@@ -38629,7 +39704,7 @@
       </p:sp>
       <p:pic>
         <p:nvPicPr>
-          <p:cNvPr id="264" name="Google Shape;264;p37"/>
+          <p:cNvPr id="273" name="Google Shape;273;p38"/>
           <p:cNvPicPr preferRelativeResize="0"/>
           <p:nvPr/>
         </p:nvPicPr>
@@ -38674,12 +39749,12 @@
 </p:sld>
 </file>
 
-<file path=ppt/slides/slide26.xml><?xml version="1.0" encoding="utf-8"?>
+<file path=ppt/slides/slide27.xml><?xml version="1.0" encoding="utf-8"?>
 <p:sld xmlns:a="http://schemas.openxmlformats.org/drawingml/2006/main" xmlns:r="http://schemas.openxmlformats.org/officeDocument/2006/relationships" xmlns:p="http://schemas.openxmlformats.org/presentationml/2006/main">
   <p:cSld>
     <p:spTree>
       <p:nvGrpSpPr>
-        <p:cNvPr id="1" name="Shape 268"/>
+        <p:cNvPr id="1" name="Shape 277"/>
         <p:cNvGrpSpPr/>
         <p:nvPr/>
       </p:nvGrpSpPr>
@@ -38693,7 +39768,7 @@
       </p:grpSpPr>
       <p:sp>
         <p:nvSpPr>
-          <p:cNvPr id="269" name="Google Shape;269;p38"/>
+          <p:cNvPr id="278" name="Google Shape;278;p39"/>
           <p:cNvSpPr txBox="1"/>
           <p:nvPr/>
         </p:nvSpPr>
@@ -38745,7 +39820,7 @@
       </p:sp>
       <p:sp>
         <p:nvSpPr>
-          <p:cNvPr id="270" name="Google Shape;270;p38"/>
+          <p:cNvPr id="279" name="Google Shape;279;p39"/>
           <p:cNvSpPr txBox="1"/>
           <p:nvPr/>
         </p:nvSpPr>
@@ -38978,12 +40053,12 @@
 </p:sld>
 </file>
 
-<file path=ppt/slides/slide27.xml><?xml version="1.0" encoding="utf-8"?>
+<file path=ppt/slides/slide28.xml><?xml version="1.0" encoding="utf-8"?>
 <p:sld xmlns:a="http://schemas.openxmlformats.org/drawingml/2006/main" xmlns:r="http://schemas.openxmlformats.org/officeDocument/2006/relationships" xmlns:p="http://schemas.openxmlformats.org/presentationml/2006/main">
   <p:cSld>
     <p:spTree>
       <p:nvGrpSpPr>
-        <p:cNvPr id="1" name="Shape 274"/>
+        <p:cNvPr id="1" name="Shape 283"/>
         <p:cNvGrpSpPr/>
         <p:nvPr/>
       </p:nvGrpSpPr>
@@ -38997,7 +40072,7 @@
       </p:grpSpPr>
       <p:sp>
         <p:nvSpPr>
-          <p:cNvPr id="275" name="Google Shape;275;p39"/>
+          <p:cNvPr id="284" name="Google Shape;284;p40"/>
           <p:cNvSpPr txBox="1"/>
           <p:nvPr/>
         </p:nvSpPr>
@@ -39049,7 +40124,7 @@
       </p:sp>
       <p:sp>
         <p:nvSpPr>
-          <p:cNvPr id="276" name="Google Shape;276;p39"/>
+          <p:cNvPr id="285" name="Google Shape;285;p40"/>
           <p:cNvSpPr txBox="1"/>
           <p:nvPr/>
         </p:nvSpPr>
@@ -39134,1103 +40209,6 @@
             <a:endParaRPr sz="1800" b="1">
               <a:solidFill>
                 <a:srgbClr val="FF0000"/>
-              </a:solidFill>
-              <a:latin typeface="Calibri"/>
-              <a:ea typeface="Calibri"/>
-              <a:cs typeface="Calibri"/>
-              <a:sym typeface="Calibri"/>
-            </a:endParaRPr>
-          </a:p>
-        </p:txBody>
-      </p:sp>
-    </p:spTree>
-  </p:cSld>
-  <p:clrMapOvr>
-    <a:masterClrMapping/>
-  </p:clrMapOvr>
-</p:sld>
-</file>
-
-<file path=ppt/slides/slide28.xml><?xml version="1.0" encoding="utf-8"?>
-<p:sld xmlns:a="http://schemas.openxmlformats.org/drawingml/2006/main" xmlns:r="http://schemas.openxmlformats.org/officeDocument/2006/relationships" xmlns:p="http://schemas.openxmlformats.org/presentationml/2006/main">
-  <p:cSld>
-    <p:spTree>
-      <p:nvGrpSpPr>
-        <p:cNvPr id="1" name="Shape 280"/>
-        <p:cNvGrpSpPr/>
-        <p:nvPr/>
-      </p:nvGrpSpPr>
-      <p:grpSpPr>
-        <a:xfrm>
-          <a:off x="0" y="0"/>
-          <a:ext cx="0" cy="0"/>
-          <a:chOff x="0" y="0"/>
-          <a:chExt cx="0" cy="0"/>
-        </a:xfrm>
-      </p:grpSpPr>
-      <p:sp>
-        <p:nvSpPr>
-          <p:cNvPr id="281" name="Google Shape;281;p40"/>
-          <p:cNvSpPr txBox="1"/>
-          <p:nvPr/>
-        </p:nvSpPr>
-        <p:spPr>
-          <a:xfrm>
-            <a:off x="36576" y="-27432"/>
-            <a:ext cx="1177200" cy="326400"/>
-          </a:xfrm>
-          <a:prstGeom prst="rect">
-            <a:avLst/>
-          </a:prstGeom>
-          <a:noFill/>
-          <a:ln>
-            <a:noFill/>
-          </a:ln>
-        </p:spPr>
-        <p:txBody>
-          <a:bodyPr spcFirstLastPara="1" wrap="square" lIns="9125" tIns="9125" rIns="9125" bIns="9125" anchor="t" anchorCtr="0">
-            <a:spAutoFit/>
-          </a:bodyPr>
-          <a:lstStyle/>
-          <a:p>
-            <a:pPr marL="0" lvl="0" indent="0" algn="l" rtl="0">
-              <a:spcBef>
-                <a:spcPts val="0"/>
-              </a:spcBef>
-              <a:spcAft>
-                <a:spcPts val="0"/>
-              </a:spcAft>
-              <a:buNone/>
-            </a:pPr>
-            <a:r>
-              <a:rPr lang="en" sz="2000" b="1">
-                <a:latin typeface="Calibri"/>
-                <a:ea typeface="Calibri"/>
-                <a:cs typeface="Calibri"/>
-                <a:sym typeface="Calibri"/>
-              </a:rPr>
-              <a:t>AI News</a:t>
-            </a:r>
-            <a:endParaRPr sz="2000" b="1">
-              <a:latin typeface="Calibri"/>
-              <a:ea typeface="Calibri"/>
-              <a:cs typeface="Calibri"/>
-              <a:sym typeface="Calibri"/>
-            </a:endParaRPr>
-          </a:p>
-        </p:txBody>
-      </p:sp>
-      <p:sp>
-        <p:nvSpPr>
-          <p:cNvPr id="282" name="Google Shape;282;p40"/>
-          <p:cNvSpPr txBox="1"/>
-          <p:nvPr/>
-        </p:nvSpPr>
-        <p:spPr>
-          <a:xfrm>
-            <a:off x="72968" y="331044"/>
-            <a:ext cx="5669400" cy="988200"/>
-          </a:xfrm>
-          <a:prstGeom prst="rect">
-            <a:avLst/>
-          </a:prstGeom>
-          <a:noFill/>
-          <a:ln w="9525" cap="flat" cmpd="sng">
-            <a:solidFill>
-              <a:srgbClr val="FF0000"/>
-            </a:solidFill>
-            <a:prstDash val="solid"/>
-            <a:round/>
-            <a:headEnd type="none" w="sm" len="sm"/>
-            <a:tailEnd type="none" w="sm" len="sm"/>
-          </a:ln>
-        </p:spPr>
-        <p:txBody>
-          <a:bodyPr spcFirstLastPara="1" wrap="square" lIns="9125" tIns="9125" rIns="9125" bIns="9125" anchor="t" anchorCtr="0">
-            <a:spAutoFit/>
-          </a:bodyPr>
-          <a:lstStyle/>
-          <a:p>
-            <a:pPr marL="171450" lvl="0" indent="-114300" algn="l" rtl="0">
-              <a:spcBef>
-                <a:spcPts val="0"/>
-              </a:spcBef>
-              <a:spcAft>
-                <a:spcPts val="0"/>
-              </a:spcAft>
-              <a:buClr>
-                <a:srgbClr val="FF0000"/>
-              </a:buClr>
-              <a:buSzPts val="900"/>
-              <a:buFont typeface="Calibri"/>
-              <a:buChar char="●"/>
-            </a:pPr>
-            <a:r>
-              <a:rPr lang="en" sz="900" b="1">
-                <a:solidFill>
-                  <a:srgbClr val="FF0000"/>
-                </a:solidFill>
-                <a:latin typeface="Calibri"/>
-                <a:ea typeface="Calibri"/>
-                <a:cs typeface="Calibri"/>
-                <a:sym typeface="Calibri"/>
-              </a:rPr>
-              <a:t>FTC prepares subpoenas for OpenAI, Anthropic and METR</a:t>
-            </a:r>
-            <a:endParaRPr sz="900" b="1">
-              <a:solidFill>
-                <a:srgbClr val="FF0000"/>
-              </a:solidFill>
-              <a:latin typeface="Calibri"/>
-              <a:ea typeface="Calibri"/>
-              <a:cs typeface="Calibri"/>
-              <a:sym typeface="Calibri"/>
-            </a:endParaRPr>
-          </a:p>
-          <a:p>
-            <a:pPr marL="171450" lvl="0" indent="-114300" algn="l" rtl="0">
-              <a:spcBef>
-                <a:spcPts val="0"/>
-              </a:spcBef>
-              <a:spcAft>
-                <a:spcPts val="0"/>
-              </a:spcAft>
-              <a:buSzPts val="900"/>
-              <a:buFont typeface="Calibri"/>
-              <a:buChar char="●"/>
-            </a:pPr>
-            <a:r>
-              <a:rPr lang="en" sz="900">
-                <a:latin typeface="Calibri"/>
-                <a:ea typeface="Calibri"/>
-                <a:cs typeface="Calibri"/>
-                <a:sym typeface="Calibri"/>
-              </a:rPr>
-              <a:t>Chair Andrew Ferguson is drafting </a:t>
-            </a:r>
-            <a:r>
-              <a:rPr lang="en" sz="900" b="1">
-                <a:latin typeface="Calibri"/>
-                <a:ea typeface="Calibri"/>
-                <a:cs typeface="Calibri"/>
-                <a:sym typeface="Calibri"/>
-              </a:rPr>
-              <a:t>civil investigative demands</a:t>
-            </a:r>
-            <a:r>
-              <a:rPr lang="en" sz="900">
-                <a:latin typeface="Calibri"/>
-                <a:ea typeface="Calibri"/>
-                <a:cs typeface="Calibri"/>
-                <a:sym typeface="Calibri"/>
-              </a:rPr>
-              <a:t>, which work like subpoenas</a:t>
-            </a:r>
-            <a:endParaRPr sz="900">
-              <a:latin typeface="Calibri"/>
-              <a:ea typeface="Calibri"/>
-              <a:cs typeface="Calibri"/>
-              <a:sym typeface="Calibri"/>
-            </a:endParaRPr>
-          </a:p>
-          <a:p>
-            <a:pPr marL="171450" lvl="0" indent="-114300" algn="l" rtl="0">
-              <a:spcBef>
-                <a:spcPts val="0"/>
-              </a:spcBef>
-              <a:spcAft>
-                <a:spcPts val="0"/>
-              </a:spcAft>
-              <a:buSzPts val="900"/>
-              <a:buFont typeface="Calibri"/>
-              <a:buChar char="●"/>
-            </a:pPr>
-            <a:r>
-              <a:rPr lang="en" sz="900">
-                <a:latin typeface="Calibri"/>
-                <a:ea typeface="Calibri"/>
-                <a:cs typeface="Calibri"/>
-                <a:sym typeface="Calibri"/>
-              </a:rPr>
-              <a:t>They can compel documents and executive testimony on model safety</a:t>
-            </a:r>
-            <a:endParaRPr sz="900">
-              <a:latin typeface="Calibri"/>
-              <a:ea typeface="Calibri"/>
-              <a:cs typeface="Calibri"/>
-              <a:sym typeface="Calibri"/>
-            </a:endParaRPr>
-          </a:p>
-          <a:p>
-            <a:pPr marL="171450" lvl="0" indent="-114300" algn="l" rtl="0">
-              <a:spcBef>
-                <a:spcPts val="0"/>
-              </a:spcBef>
-              <a:spcAft>
-                <a:spcPts val="0"/>
-              </a:spcAft>
-              <a:buSzPts val="900"/>
-              <a:buFont typeface="Calibri"/>
-              <a:buChar char="●"/>
-            </a:pPr>
-            <a:r>
-              <a:rPr lang="en" sz="900">
-                <a:latin typeface="Calibri"/>
-                <a:ea typeface="Calibri"/>
-                <a:cs typeface="Calibri"/>
-                <a:sym typeface="Calibri"/>
-              </a:rPr>
-              <a:t>Topics: safeguards, known risks, internal testing, incident response, public safety claims</a:t>
-            </a:r>
-            <a:endParaRPr sz="900">
-              <a:latin typeface="Calibri"/>
-              <a:ea typeface="Calibri"/>
-              <a:cs typeface="Calibri"/>
-              <a:sym typeface="Calibri"/>
-            </a:endParaRPr>
-          </a:p>
-          <a:p>
-            <a:pPr marL="171450" lvl="0" indent="-114300" algn="l" rtl="0">
-              <a:spcBef>
-                <a:spcPts val="0"/>
-              </a:spcBef>
-              <a:spcAft>
-                <a:spcPts val="0"/>
-              </a:spcAft>
-              <a:buSzPts val="900"/>
-              <a:buFont typeface="Calibri"/>
-              <a:buChar char="●"/>
-            </a:pPr>
-            <a:r>
-              <a:rPr lang="en" sz="900">
-                <a:latin typeface="Calibri"/>
-                <a:ea typeface="Calibri"/>
-                <a:cs typeface="Calibri"/>
-                <a:sym typeface="Calibri"/>
-              </a:rPr>
-              <a:t>METR, the outside evaluator the labs cite, is pulled in too</a:t>
-            </a:r>
-            <a:endParaRPr sz="900">
-              <a:latin typeface="Calibri"/>
-              <a:ea typeface="Calibri"/>
-              <a:cs typeface="Calibri"/>
-              <a:sym typeface="Calibri"/>
-            </a:endParaRPr>
-          </a:p>
-          <a:p>
-            <a:pPr marL="171450" lvl="0" indent="-114300" algn="l" rtl="0">
-              <a:spcBef>
-                <a:spcPts val="0"/>
-              </a:spcBef>
-              <a:spcAft>
-                <a:spcPts val="0"/>
-              </a:spcAft>
-              <a:buSzPts val="900"/>
-              <a:buFont typeface="Calibri"/>
-              <a:buChar char="●"/>
-            </a:pPr>
-            <a:r>
-              <a:rPr lang="en" sz="900">
-                <a:latin typeface="Calibri"/>
-                <a:ea typeface="Calibri"/>
-                <a:cs typeface="Calibri"/>
-                <a:sym typeface="Calibri"/>
-              </a:rPr>
-              <a:t>Demands expected within weeks, one day after the White House accord</a:t>
-            </a:r>
-            <a:endParaRPr sz="900">
-              <a:latin typeface="Calibri"/>
-              <a:ea typeface="Calibri"/>
-              <a:cs typeface="Calibri"/>
-              <a:sym typeface="Calibri"/>
-            </a:endParaRPr>
-          </a:p>
-          <a:p>
-            <a:pPr marL="171450" lvl="0" indent="-114300" algn="l" rtl="0">
-              <a:spcBef>
-                <a:spcPts val="0"/>
-              </a:spcBef>
-              <a:spcAft>
-                <a:spcPts val="0"/>
-              </a:spcAft>
-              <a:buSzPts val="900"/>
-              <a:buFont typeface="Calibri"/>
-              <a:buChar char="●"/>
-            </a:pPr>
-            <a:r>
-              <a:rPr lang="en" sz="900" u="sng">
-                <a:solidFill>
-                  <a:srgbClr val="0563C1"/>
-                </a:solidFill>
-                <a:latin typeface="Calibri"/>
-                <a:ea typeface="Calibri"/>
-                <a:cs typeface="Calibri"/>
-                <a:sym typeface="Calibri"/>
-                <a:hlinkClick r:id="rId3">
-                  <a:extLst>
-                    <a:ext uri="{A12FA001-AC4F-418D-AE19-62706E023703}">
-                      <ahyp:hlinkClr xmlns:ahyp="http://schemas.microsoft.com/office/drawing/2018/hyperlinkcolor" val="tx"/>
-                    </a:ext>
-                  </a:extLst>
-                </a:hlinkClick>
-              </a:rPr>
-              <a:t>https://www.axios.com/2026/09/30/ftc-openai-anthropic-ai-safety-investigation</a:t>
-            </a:r>
-            <a:endParaRPr sz="900">
-              <a:solidFill>
-                <a:srgbClr val="0563C1"/>
-              </a:solidFill>
-              <a:latin typeface="Calibri"/>
-              <a:ea typeface="Calibri"/>
-              <a:cs typeface="Calibri"/>
-              <a:sym typeface="Calibri"/>
-            </a:endParaRPr>
-          </a:p>
-        </p:txBody>
-      </p:sp>
-      <p:sp>
-        <p:nvSpPr>
-          <p:cNvPr id="283" name="Google Shape;283;p40"/>
-          <p:cNvSpPr txBox="1"/>
-          <p:nvPr/>
-        </p:nvSpPr>
-        <p:spPr>
-          <a:xfrm>
-            <a:off x="72969" y="1365187"/>
-            <a:ext cx="5669400" cy="988200"/>
-          </a:xfrm>
-          <a:prstGeom prst="rect">
-            <a:avLst/>
-          </a:prstGeom>
-          <a:noFill/>
-          <a:ln w="9525" cap="flat" cmpd="sng">
-            <a:solidFill>
-              <a:srgbClr val="FF0000"/>
-            </a:solidFill>
-            <a:prstDash val="solid"/>
-            <a:round/>
-            <a:headEnd type="none" w="sm" len="sm"/>
-            <a:tailEnd type="none" w="sm" len="sm"/>
-          </a:ln>
-        </p:spPr>
-        <p:txBody>
-          <a:bodyPr spcFirstLastPara="1" wrap="square" lIns="9125" tIns="9125" rIns="9125" bIns="9125" anchor="t" anchorCtr="0">
-            <a:spAutoFit/>
-          </a:bodyPr>
-          <a:lstStyle/>
-          <a:p>
-            <a:pPr marL="171450" lvl="0" indent="-114300" algn="l" rtl="0">
-              <a:spcBef>
-                <a:spcPts val="0"/>
-              </a:spcBef>
-              <a:spcAft>
-                <a:spcPts val="0"/>
-              </a:spcAft>
-              <a:buClr>
-                <a:srgbClr val="FF0000"/>
-              </a:buClr>
-              <a:buSzPts val="900"/>
-              <a:buFont typeface="Calibri"/>
-              <a:buChar char="●"/>
-            </a:pPr>
-            <a:r>
-              <a:rPr lang="en" sz="900" b="1">
-                <a:solidFill>
-                  <a:srgbClr val="FF0000"/>
-                </a:solidFill>
-                <a:latin typeface="Calibri"/>
-                <a:ea typeface="Calibri"/>
-                <a:cs typeface="Calibri"/>
-                <a:sym typeface="Calibri"/>
-              </a:rPr>
-              <a:t>Broadcom will lend Anthropic up to $42B to lease TPUs</a:t>
-            </a:r>
-            <a:endParaRPr sz="900" b="1">
-              <a:solidFill>
-                <a:srgbClr val="FF0000"/>
-              </a:solidFill>
-              <a:latin typeface="Calibri"/>
-              <a:ea typeface="Calibri"/>
-              <a:cs typeface="Calibri"/>
-              <a:sym typeface="Calibri"/>
-            </a:endParaRPr>
-          </a:p>
-          <a:p>
-            <a:pPr marL="171450" lvl="0" indent="-114300" algn="l" rtl="0">
-              <a:spcBef>
-                <a:spcPts val="0"/>
-              </a:spcBef>
-              <a:spcAft>
-                <a:spcPts val="0"/>
-              </a:spcAft>
-              <a:buSzPts val="900"/>
-              <a:buFont typeface="Calibri"/>
-              <a:buChar char="●"/>
-            </a:pPr>
-            <a:r>
-              <a:rPr lang="en" sz="900">
-                <a:latin typeface="Calibri"/>
-                <a:ea typeface="Calibri"/>
-                <a:cs typeface="Calibri"/>
-                <a:sym typeface="Calibri"/>
-              </a:rPr>
-              <a:t>Disclosed in Anthropic's IPO prospectus</a:t>
-            </a:r>
-            <a:endParaRPr sz="900">
-              <a:latin typeface="Calibri"/>
-              <a:ea typeface="Calibri"/>
-              <a:cs typeface="Calibri"/>
-              <a:sym typeface="Calibri"/>
-            </a:endParaRPr>
-          </a:p>
-          <a:p>
-            <a:pPr marL="171450" lvl="0" indent="-114300" algn="l" rtl="0">
-              <a:spcBef>
-                <a:spcPts val="0"/>
-              </a:spcBef>
-              <a:spcAft>
-                <a:spcPts val="0"/>
-              </a:spcAft>
-              <a:buSzPts val="900"/>
-              <a:buFont typeface="Calibri"/>
-              <a:buChar char="●"/>
-            </a:pPr>
-            <a:r>
-              <a:rPr lang="en" sz="900" b="1">
-                <a:latin typeface="Calibri"/>
-                <a:ea typeface="Calibri"/>
-                <a:cs typeface="Calibri"/>
-                <a:sym typeface="Calibri"/>
-              </a:rPr>
-              <a:t>Convertible notes</a:t>
-            </a:r>
-            <a:r>
-              <a:rPr lang="en" sz="900">
-                <a:latin typeface="Calibri"/>
-                <a:ea typeface="Calibri"/>
-                <a:cs typeface="Calibri"/>
-                <a:sym typeface="Calibri"/>
-              </a:rPr>
-              <a:t> that can turn into Anthropic shares</a:t>
-            </a:r>
-            <a:endParaRPr sz="900">
-              <a:latin typeface="Calibri"/>
-              <a:ea typeface="Calibri"/>
-              <a:cs typeface="Calibri"/>
-              <a:sym typeface="Calibri"/>
-            </a:endParaRPr>
-          </a:p>
-          <a:p>
-            <a:pPr marL="171450" lvl="0" indent="-114300" algn="l" rtl="0">
-              <a:spcBef>
-                <a:spcPts val="0"/>
-              </a:spcBef>
-              <a:spcAft>
-                <a:spcPts val="0"/>
-              </a:spcAft>
-              <a:buSzPts val="900"/>
-              <a:buFont typeface="Calibri"/>
-              <a:buChar char="●"/>
-            </a:pPr>
-            <a:r>
-              <a:rPr lang="en" sz="900">
-                <a:latin typeface="Calibri"/>
-                <a:ea typeface="Calibri"/>
-                <a:cs typeface="Calibri"/>
-                <a:sym typeface="Calibri"/>
-              </a:rPr>
-              <a:t>Money only for TPU capacity leases, chips Broadcom co-designs with Google</a:t>
-            </a:r>
-            <a:endParaRPr sz="900">
-              <a:latin typeface="Calibri"/>
-              <a:ea typeface="Calibri"/>
-              <a:cs typeface="Calibri"/>
-              <a:sym typeface="Calibri"/>
-            </a:endParaRPr>
-          </a:p>
-          <a:p>
-            <a:pPr marL="171450" lvl="0" indent="-114300" algn="l" rtl="0">
-              <a:spcBef>
-                <a:spcPts val="0"/>
-              </a:spcBef>
-              <a:spcAft>
-                <a:spcPts val="0"/>
-              </a:spcAft>
-              <a:buSzPts val="900"/>
-              <a:buFont typeface="Calibri"/>
-              <a:buChar char="●"/>
-            </a:pPr>
-            <a:r>
-              <a:rPr lang="en" sz="900">
-                <a:latin typeface="Calibri"/>
-                <a:ea typeface="Calibri"/>
-                <a:cs typeface="Calibri"/>
-                <a:sym typeface="Calibri"/>
-              </a:rPr>
-              <a:t>Covers about a third of the </a:t>
-            </a:r>
-            <a:r>
-              <a:rPr lang="en" sz="900">
-                <a:highlight>
-                  <a:srgbClr val="FFF2CC"/>
-                </a:highlight>
-                <a:latin typeface="Calibri"/>
-                <a:ea typeface="Calibri"/>
-                <a:cs typeface="Calibri"/>
-                <a:sym typeface="Calibri"/>
-              </a:rPr>
-              <a:t>$125.2B</a:t>
-            </a:r>
-            <a:r>
-              <a:rPr lang="en" sz="900">
-                <a:latin typeface="Calibri"/>
-                <a:ea typeface="Calibri"/>
-                <a:cs typeface="Calibri"/>
-                <a:sym typeface="Calibri"/>
-              </a:rPr>
-              <a:t> five-year TPU commitment</a:t>
-            </a:r>
-            <a:endParaRPr sz="900">
-              <a:latin typeface="Calibri"/>
-              <a:ea typeface="Calibri"/>
-              <a:cs typeface="Calibri"/>
-              <a:sym typeface="Calibri"/>
-            </a:endParaRPr>
-          </a:p>
-          <a:p>
-            <a:pPr marL="171450" lvl="0" indent="-114300" algn="l" rtl="0">
-              <a:spcBef>
-                <a:spcPts val="0"/>
-              </a:spcBef>
-              <a:spcAft>
-                <a:spcPts val="0"/>
-              </a:spcAft>
-              <a:buSzPts val="900"/>
-              <a:buFont typeface="Calibri"/>
-              <a:buChar char="●"/>
-            </a:pPr>
-            <a:r>
-              <a:rPr lang="en" sz="900">
-                <a:latin typeface="Calibri"/>
-                <a:ea typeface="Calibri"/>
-                <a:cs typeface="Calibri"/>
-                <a:sym typeface="Calibri"/>
-              </a:rPr>
-              <a:t>No notes sold before the IPO; Anthropic flags conflicts of interest</a:t>
-            </a:r>
-            <a:endParaRPr sz="900">
-              <a:latin typeface="Calibri"/>
-              <a:ea typeface="Calibri"/>
-              <a:cs typeface="Calibri"/>
-              <a:sym typeface="Calibri"/>
-            </a:endParaRPr>
-          </a:p>
-          <a:p>
-            <a:pPr marL="171450" lvl="0" indent="-114300" algn="l" rtl="0">
-              <a:spcBef>
-                <a:spcPts val="0"/>
-              </a:spcBef>
-              <a:spcAft>
-                <a:spcPts val="0"/>
-              </a:spcAft>
-              <a:buSzPts val="900"/>
-              <a:buFont typeface="Calibri"/>
-              <a:buChar char="●"/>
-            </a:pPr>
-            <a:r>
-              <a:rPr lang="en" sz="900" u="sng">
-                <a:solidFill>
-                  <a:srgbClr val="0563C1"/>
-                </a:solidFill>
-                <a:latin typeface="Calibri"/>
-                <a:ea typeface="Calibri"/>
-                <a:cs typeface="Calibri"/>
-                <a:sym typeface="Calibri"/>
-                <a:hlinkClick r:id="rId4">
-                  <a:extLst>
-                    <a:ext uri="{A12FA001-AC4F-418D-AE19-62706E023703}">
-                      <ahyp:hlinkClr xmlns:ahyp="http://schemas.microsoft.com/office/drawing/2018/hyperlinkcolor" val="tx"/>
-                    </a:ext>
-                  </a:extLst>
-                </a:hlinkClick>
-              </a:rPr>
-              <a:t>https://www.implicator.ai/broadcom-agrees-to-lend-anthropic-up-to-42-billion-to-lease-chips-it-helps-design/</a:t>
-            </a:r>
-            <a:endParaRPr sz="900">
-              <a:solidFill>
-                <a:srgbClr val="0563C1"/>
-              </a:solidFill>
-              <a:latin typeface="Calibri"/>
-              <a:ea typeface="Calibri"/>
-              <a:cs typeface="Calibri"/>
-              <a:sym typeface="Calibri"/>
-            </a:endParaRPr>
-          </a:p>
-        </p:txBody>
-      </p:sp>
-      <p:sp>
-        <p:nvSpPr>
-          <p:cNvPr id="284" name="Google Shape;284;p40"/>
-          <p:cNvSpPr txBox="1"/>
-          <p:nvPr/>
-        </p:nvSpPr>
-        <p:spPr>
-          <a:xfrm>
-            <a:off x="68052" y="2415032"/>
-            <a:ext cx="5669400" cy="849600"/>
-          </a:xfrm>
-          <a:prstGeom prst="rect">
-            <a:avLst/>
-          </a:prstGeom>
-          <a:noFill/>
-          <a:ln w="9525" cap="flat" cmpd="sng">
-            <a:solidFill>
-              <a:srgbClr val="FF0000"/>
-            </a:solidFill>
-            <a:prstDash val="solid"/>
-            <a:round/>
-            <a:headEnd type="none" w="sm" len="sm"/>
-            <a:tailEnd type="none" w="sm" len="sm"/>
-          </a:ln>
-        </p:spPr>
-        <p:txBody>
-          <a:bodyPr spcFirstLastPara="1" wrap="square" lIns="9125" tIns="9125" rIns="9125" bIns="9125" anchor="t" anchorCtr="0">
-            <a:spAutoFit/>
-          </a:bodyPr>
-          <a:lstStyle/>
-          <a:p>
-            <a:pPr marL="171450" lvl="0" indent="-114300" algn="l" rtl="0">
-              <a:spcBef>
-                <a:spcPts val="0"/>
-              </a:spcBef>
-              <a:spcAft>
-                <a:spcPts val="0"/>
-              </a:spcAft>
-              <a:buClr>
-                <a:srgbClr val="FF0000"/>
-              </a:buClr>
-              <a:buSzPts val="900"/>
-              <a:buFont typeface="Calibri"/>
-              <a:buChar char="●"/>
-            </a:pPr>
-            <a:r>
-              <a:rPr lang="en" sz="900" b="1">
-                <a:solidFill>
-                  <a:srgbClr val="FF0000"/>
-                </a:solidFill>
-                <a:latin typeface="Calibri"/>
-                <a:ea typeface="Calibri"/>
-                <a:cs typeface="Calibri"/>
-                <a:sym typeface="Calibri"/>
-              </a:rPr>
-              <a:t>NVIDIA DGX Spark 64GB: a cheaper local AI box at $5K</a:t>
-            </a:r>
-            <a:endParaRPr sz="900" b="1">
-              <a:solidFill>
-                <a:srgbClr val="FF0000"/>
-              </a:solidFill>
-              <a:latin typeface="Calibri"/>
-              <a:ea typeface="Calibri"/>
-              <a:cs typeface="Calibri"/>
-              <a:sym typeface="Calibri"/>
-            </a:endParaRPr>
-          </a:p>
-          <a:p>
-            <a:pPr marL="171450" lvl="0" indent="-114300" algn="l" rtl="0">
-              <a:spcBef>
-                <a:spcPts val="0"/>
-              </a:spcBef>
-              <a:spcAft>
-                <a:spcPts val="0"/>
-              </a:spcAft>
-              <a:buSzPts val="900"/>
-              <a:buFont typeface="Calibri"/>
-              <a:buChar char="●"/>
-            </a:pPr>
-            <a:r>
-              <a:rPr lang="en" sz="900">
-                <a:latin typeface="Calibri"/>
-                <a:ea typeface="Calibri"/>
-                <a:cs typeface="Calibri"/>
-                <a:sym typeface="Calibri"/>
-              </a:rPr>
-              <a:t>Same GB10 Grace Blackwell chip, but only </a:t>
-            </a:r>
-            <a:r>
-              <a:rPr lang="en" sz="900">
-                <a:solidFill>
-                  <a:schemeClr val="dk1"/>
-                </a:solidFill>
-                <a:latin typeface="Calibri"/>
-                <a:ea typeface="Calibri"/>
-                <a:cs typeface="Calibri"/>
-                <a:sym typeface="Calibri"/>
-              </a:rPr>
-              <a:t>64GB unified memory </a:t>
-            </a:r>
-            <a:endParaRPr sz="900">
-              <a:latin typeface="Calibri"/>
-              <a:ea typeface="Calibri"/>
-              <a:cs typeface="Calibri"/>
-              <a:sym typeface="Calibri"/>
-            </a:endParaRPr>
-          </a:p>
-          <a:p>
-            <a:pPr marL="171450" lvl="0" indent="-114300" algn="l" rtl="0">
-              <a:spcBef>
-                <a:spcPts val="0"/>
-              </a:spcBef>
-              <a:spcAft>
-                <a:spcPts val="0"/>
-              </a:spcAft>
-              <a:buSzPts val="900"/>
-              <a:buFont typeface="Calibri"/>
-              <a:buChar char="●"/>
-            </a:pPr>
-            <a:r>
-              <a:rPr lang="en" sz="900">
-                <a:latin typeface="Calibri"/>
-                <a:ea typeface="Calibri"/>
-                <a:cs typeface="Calibri"/>
-                <a:sym typeface="Calibri"/>
-              </a:rPr>
-              <a:t>Two units cluster over ConnectX-7 into 128GB</a:t>
-            </a:r>
-            <a:endParaRPr sz="900">
-              <a:latin typeface="Calibri"/>
-              <a:ea typeface="Calibri"/>
-              <a:cs typeface="Calibri"/>
-              <a:sym typeface="Calibri"/>
-            </a:endParaRPr>
-          </a:p>
-          <a:p>
-            <a:pPr marL="171450" lvl="0" indent="-114300" algn="l" rtl="0">
-              <a:spcBef>
-                <a:spcPts val="0"/>
-              </a:spcBef>
-              <a:spcAft>
-                <a:spcPts val="0"/>
-              </a:spcAft>
-              <a:buSzPts val="900"/>
-              <a:buFont typeface="Calibri"/>
-              <a:buChar char="●"/>
-            </a:pPr>
-            <a:r>
-              <a:rPr lang="en" sz="900">
-                <a:latin typeface="Calibri"/>
-                <a:ea typeface="Calibri"/>
-                <a:cs typeface="Calibri"/>
-                <a:sym typeface="Calibri"/>
-              </a:rPr>
-              <a:t>The 128GB model rose from $3,999 to </a:t>
-            </a:r>
-            <a:r>
-              <a:rPr lang="en" sz="900">
-                <a:highlight>
-                  <a:srgbClr val="FFF2CC"/>
-                </a:highlight>
-                <a:latin typeface="Calibri"/>
-                <a:ea typeface="Calibri"/>
-                <a:cs typeface="Calibri"/>
-                <a:sym typeface="Calibri"/>
-              </a:rPr>
-              <a:t>$6,950</a:t>
-            </a:r>
-            <a:r>
-              <a:rPr lang="en" sz="900">
-                <a:latin typeface="Calibri"/>
-                <a:ea typeface="Calibri"/>
-                <a:cs typeface="Calibri"/>
-                <a:sym typeface="Calibri"/>
-              </a:rPr>
-              <a:t> on memory prices</a:t>
-            </a:r>
-            <a:endParaRPr sz="900">
-              <a:latin typeface="Calibri"/>
-              <a:ea typeface="Calibri"/>
-              <a:cs typeface="Calibri"/>
-              <a:sym typeface="Calibri"/>
-            </a:endParaRPr>
-          </a:p>
-          <a:p>
-            <a:pPr marL="171450" lvl="0" indent="-114300" algn="l" rtl="0">
-              <a:spcBef>
-                <a:spcPts val="0"/>
-              </a:spcBef>
-              <a:spcAft>
-                <a:spcPts val="0"/>
-              </a:spcAft>
-              <a:buSzPts val="900"/>
-              <a:buFont typeface="Calibri"/>
-              <a:buChar char="●"/>
-            </a:pPr>
-            <a:r>
-              <a:rPr lang="en" sz="900">
-                <a:latin typeface="Calibri"/>
-                <a:ea typeface="Calibri"/>
-                <a:cs typeface="Calibri"/>
-                <a:sym typeface="Calibri"/>
-              </a:rPr>
-              <a:t>Ships Oct 23 from Acer, ASUS, Dell, Gigabyte, HP and MSI</a:t>
-            </a:r>
-            <a:endParaRPr sz="900">
-              <a:latin typeface="Calibri"/>
-              <a:ea typeface="Calibri"/>
-              <a:cs typeface="Calibri"/>
-              <a:sym typeface="Calibri"/>
-            </a:endParaRPr>
-          </a:p>
-          <a:p>
-            <a:pPr marL="171450" lvl="0" indent="-114300" algn="l" rtl="0">
-              <a:spcBef>
-                <a:spcPts val="0"/>
-              </a:spcBef>
-              <a:spcAft>
-                <a:spcPts val="0"/>
-              </a:spcAft>
-              <a:buSzPts val="900"/>
-              <a:buFont typeface="Calibri"/>
-              <a:buChar char="●"/>
-            </a:pPr>
-            <a:r>
-              <a:rPr lang="en" sz="900" u="sng">
-                <a:solidFill>
-                  <a:srgbClr val="0563C1"/>
-                </a:solidFill>
-                <a:latin typeface="Calibri"/>
-                <a:ea typeface="Calibri"/>
-                <a:cs typeface="Calibri"/>
-                <a:sym typeface="Calibri"/>
-                <a:hlinkClick r:id="rId5">
-                  <a:extLst>
-                    <a:ext uri="{A12FA001-AC4F-418D-AE19-62706E023703}">
-                      <ahyp:hlinkClr xmlns:ahyp="http://schemas.microsoft.com/office/drawing/2018/hyperlinkcolor" val="tx"/>
-                    </a:ext>
-                  </a:extLst>
-                </a:hlinkClick>
-              </a:rPr>
-              <a:t>https://blogs.nvidia.com/blog/local-ai-dgx-spark-64gb-sync/</a:t>
-            </a:r>
-            <a:endParaRPr sz="900">
-              <a:solidFill>
-                <a:srgbClr val="0563C1"/>
-              </a:solidFill>
-              <a:latin typeface="Calibri"/>
-              <a:ea typeface="Calibri"/>
-              <a:cs typeface="Calibri"/>
-              <a:sym typeface="Calibri"/>
-            </a:endParaRPr>
-          </a:p>
-        </p:txBody>
-      </p:sp>
-      <p:sp>
-        <p:nvSpPr>
-          <p:cNvPr id="285" name="Google Shape;285;p40"/>
-          <p:cNvSpPr txBox="1"/>
-          <p:nvPr/>
-        </p:nvSpPr>
-        <p:spPr>
-          <a:xfrm>
-            <a:off x="72975" y="3326275"/>
-            <a:ext cx="8299500" cy="849600"/>
-          </a:xfrm>
-          <a:prstGeom prst="rect">
-            <a:avLst/>
-          </a:prstGeom>
-          <a:noFill/>
-          <a:ln w="9525" cap="flat" cmpd="sng">
-            <a:solidFill>
-              <a:srgbClr val="FF0000"/>
-            </a:solidFill>
-            <a:prstDash val="solid"/>
-            <a:round/>
-            <a:headEnd type="none" w="sm" len="sm"/>
-            <a:tailEnd type="none" w="sm" len="sm"/>
-          </a:ln>
-        </p:spPr>
-        <p:txBody>
-          <a:bodyPr spcFirstLastPara="1" wrap="square" lIns="9125" tIns="9125" rIns="9125" bIns="9125" anchor="t" anchorCtr="0">
-            <a:spAutoFit/>
-          </a:bodyPr>
-          <a:lstStyle/>
-          <a:p>
-            <a:pPr marL="171450" lvl="0" indent="-114300" algn="l" rtl="0">
-              <a:spcBef>
-                <a:spcPts val="0"/>
-              </a:spcBef>
-              <a:spcAft>
-                <a:spcPts val="0"/>
-              </a:spcAft>
-              <a:buClr>
-                <a:schemeClr val="dk1"/>
-              </a:buClr>
-              <a:buSzPts val="900"/>
-              <a:buFont typeface="Calibri"/>
-              <a:buChar char="●"/>
-            </a:pPr>
-            <a:r>
-              <a:rPr lang="en" sz="900">
-                <a:solidFill>
-                  <a:schemeClr val="dk1"/>
-                </a:solidFill>
-                <a:latin typeface="Calibri"/>
-                <a:ea typeface="Calibri"/>
-                <a:cs typeface="Calibri"/>
-                <a:sym typeface="Calibri"/>
-              </a:rPr>
-              <a:t>Google introduced Gemini 3.8 Flash TTS on September 23, 2026, enabling expressive, customizable voices for audio content and voice tools.</a:t>
-            </a:r>
-            <a:endParaRPr sz="900">
-              <a:solidFill>
-                <a:schemeClr val="dk1"/>
-              </a:solidFill>
-              <a:latin typeface="Calibri"/>
-              <a:ea typeface="Calibri"/>
-              <a:cs typeface="Calibri"/>
-              <a:sym typeface="Calibri"/>
-            </a:endParaRPr>
-          </a:p>
-          <a:p>
-            <a:pPr marL="171450" lvl="0" indent="-114300" algn="l" rtl="0">
-              <a:spcBef>
-                <a:spcPts val="0"/>
-              </a:spcBef>
-              <a:spcAft>
-                <a:spcPts val="0"/>
-              </a:spcAft>
-              <a:buClr>
-                <a:schemeClr val="dk1"/>
-              </a:buClr>
-              <a:buSzPts val="900"/>
-              <a:buFont typeface="Calibri"/>
-              <a:buChar char="●"/>
-            </a:pPr>
-            <a:r>
-              <a:rPr lang="en" sz="900">
-                <a:solidFill>
-                  <a:schemeClr val="dk1"/>
-                </a:solidFill>
-                <a:latin typeface="Calibri"/>
-                <a:ea typeface="Calibri"/>
-                <a:cs typeface="Calibri"/>
-                <a:sym typeface="Calibri"/>
-              </a:rPr>
-              <a:t>- On September 24, Gemini 3.8 Live with Live Avatar brought real-time video conversation and background tool use to Gemini Enterprise.</a:t>
-            </a:r>
-            <a:endParaRPr sz="900">
-              <a:solidFill>
-                <a:schemeClr val="dk1"/>
-              </a:solidFill>
-              <a:latin typeface="Calibri"/>
-              <a:ea typeface="Calibri"/>
-              <a:cs typeface="Calibri"/>
-              <a:sym typeface="Calibri"/>
-            </a:endParaRPr>
-          </a:p>
-          <a:p>
-            <a:pPr marL="171450" lvl="0" indent="-114300" algn="l" rtl="0">
-              <a:spcBef>
-                <a:spcPts val="0"/>
-              </a:spcBef>
-              <a:spcAft>
-                <a:spcPts val="0"/>
-              </a:spcAft>
-              <a:buClr>
-                <a:schemeClr val="dk1"/>
-              </a:buClr>
-              <a:buSzPts val="900"/>
-              <a:buFont typeface="Calibri"/>
-              <a:buChar char="●"/>
-            </a:pPr>
-            <a:r>
-              <a:rPr lang="en" sz="900">
-                <a:solidFill>
-                  <a:schemeClr val="dk1"/>
-                </a:solidFill>
-                <a:latin typeface="Calibri"/>
-                <a:ea typeface="Calibri"/>
-                <a:cs typeface="Calibri"/>
-                <a:sym typeface="Calibri"/>
-              </a:rPr>
-              <a:t>- Gemini Notebook updates described in the video turn sources into interactive learning materials; clearer, well-organized content may be easier for AI tools to use.</a:t>
-            </a:r>
-            <a:endParaRPr sz="900">
-              <a:solidFill>
-                <a:schemeClr val="dk1"/>
-              </a:solidFill>
-              <a:latin typeface="Calibri"/>
-              <a:ea typeface="Calibri"/>
-              <a:cs typeface="Calibri"/>
-              <a:sym typeface="Calibri"/>
-            </a:endParaRPr>
-          </a:p>
-          <a:p>
-            <a:pPr marL="171450" lvl="0" indent="-114300" algn="l" rtl="0">
-              <a:spcBef>
-                <a:spcPts val="0"/>
-              </a:spcBef>
-              <a:spcAft>
-                <a:spcPts val="0"/>
-              </a:spcAft>
-              <a:buClr>
-                <a:schemeClr val="dk1"/>
-              </a:buClr>
-              <a:buSzPts val="900"/>
-              <a:buFont typeface="Calibri"/>
-              <a:buChar char="●"/>
-            </a:pPr>
-            <a:r>
-              <a:rPr lang="en" sz="900">
-                <a:solidFill>
-                  <a:schemeClr val="dk1"/>
-                </a:solidFill>
-                <a:latin typeface="Calibri"/>
-                <a:ea typeface="Calibri"/>
-                <a:cs typeface="Calibri"/>
-                <a:sym typeface="Calibri"/>
-              </a:rPr>
-              <a:t>- Google’s Project Suncatcher will test whether TPUs can operate in orbit, addressing radiation, cooling, and satellite-link challenges, with a two-satellite test planned for 2027.</a:t>
-            </a:r>
-            <a:endParaRPr sz="900">
-              <a:solidFill>
-                <a:schemeClr val="dk1"/>
-              </a:solidFill>
-              <a:latin typeface="Calibri"/>
-              <a:ea typeface="Calibri"/>
-              <a:cs typeface="Calibri"/>
-              <a:sym typeface="Calibri"/>
-            </a:endParaRPr>
-          </a:p>
-          <a:p>
-            <a:pPr marL="171450" lvl="0" indent="-114300" algn="l" rtl="0">
-              <a:spcBef>
-                <a:spcPts val="0"/>
-              </a:spcBef>
-              <a:spcAft>
-                <a:spcPts val="0"/>
-              </a:spcAft>
-              <a:buClr>
-                <a:schemeClr val="dk1"/>
-              </a:buClr>
-              <a:buSzPts val="900"/>
-              <a:buFont typeface="Calibri"/>
-              <a:buChar char="●"/>
-            </a:pPr>
-            <a:r>
-              <a:rPr lang="en" sz="900">
-                <a:solidFill>
-                  <a:schemeClr val="dk1"/>
-                </a:solidFill>
-                <a:latin typeface="Calibri"/>
-                <a:ea typeface="Calibri"/>
-                <a:cs typeface="Calibri"/>
-                <a:sym typeface="Calibri"/>
-              </a:rPr>
-              <a:t>- For SEO, the speaker’s takeaway is to publish clear, trustworthy answers that work well across search and AI experiences. The updates matter because they expand how people may consume and interact with information.</a:t>
-            </a:r>
-            <a:endParaRPr sz="900">
-              <a:solidFill>
-                <a:schemeClr val="dk1"/>
               </a:solidFill>
               <a:latin typeface="Calibri"/>
               <a:ea typeface="Calibri"/>
@@ -40274,7 +40252,7 @@
         <p:spPr>
           <a:xfrm>
             <a:off x="36576" y="-27432"/>
-            <a:ext cx="1859100" cy="384000"/>
+            <a:ext cx="1177200" cy="326400"/>
           </a:xfrm>
           <a:prstGeom prst="rect">
             <a:avLst/>
@@ -40285,8 +40263,8 @@
           </a:ln>
         </p:spPr>
         <p:txBody>
-          <a:bodyPr spcFirstLastPara="1" wrap="square" lIns="91425" tIns="91425" rIns="91425" bIns="91425" anchor="t" anchorCtr="0">
-            <a:noAutofit/>
+          <a:bodyPr spcFirstLastPara="1" wrap="square" lIns="9125" tIns="9125" rIns="9125" bIns="9125" anchor="t" anchorCtr="0">
+            <a:spAutoFit/>
           </a:bodyPr>
           <a:lstStyle/>
           <a:p>
@@ -40306,7 +40284,7 @@
                 <a:cs typeface="Calibri"/>
                 <a:sym typeface="Calibri"/>
               </a:rPr>
-              <a:t>Parked topics</a:t>
+              <a:t>AI News</a:t>
             </a:r>
             <a:endParaRPr sz="2000" b="1">
               <a:latin typeface="Calibri"/>
@@ -40325,8 +40303,8 @@
         </p:nvSpPr>
         <p:spPr>
           <a:xfrm>
-            <a:off x="60825" y="371749"/>
-            <a:ext cx="7897200" cy="1819200"/>
+            <a:off x="72968" y="331044"/>
+            <a:ext cx="5669400" cy="988200"/>
           </a:xfrm>
           <a:prstGeom prst="rect">
             <a:avLst/>
@@ -40367,9 +40345,198 @@
                 <a:solidFill>
                   <a:srgbClr val="FF0000"/>
                 </a:solidFill>
-                <a:uFill>
-                  <a:noFill/>
-                </a:uFill>
+                <a:latin typeface="Calibri"/>
+                <a:ea typeface="Calibri"/>
+                <a:cs typeface="Calibri"/>
+                <a:sym typeface="Calibri"/>
+              </a:rPr>
+              <a:t>FTC prepares subpoenas for OpenAI, Anthropic and METR</a:t>
+            </a:r>
+            <a:endParaRPr sz="900" b="1">
+              <a:solidFill>
+                <a:srgbClr val="FF0000"/>
+              </a:solidFill>
+              <a:latin typeface="Calibri"/>
+              <a:ea typeface="Calibri"/>
+              <a:cs typeface="Calibri"/>
+              <a:sym typeface="Calibri"/>
+            </a:endParaRPr>
+          </a:p>
+          <a:p>
+            <a:pPr marL="171450" lvl="0" indent="-114300" algn="l" rtl="0">
+              <a:spcBef>
+                <a:spcPts val="0"/>
+              </a:spcBef>
+              <a:spcAft>
+                <a:spcPts val="0"/>
+              </a:spcAft>
+              <a:buSzPts val="900"/>
+              <a:buFont typeface="Calibri"/>
+              <a:buChar char="●"/>
+            </a:pPr>
+            <a:r>
+              <a:rPr lang="en" sz="900">
+                <a:latin typeface="Calibri"/>
+                <a:ea typeface="Calibri"/>
+                <a:cs typeface="Calibri"/>
+                <a:sym typeface="Calibri"/>
+              </a:rPr>
+              <a:t>Chair Andrew Ferguson is drafting </a:t>
+            </a:r>
+            <a:r>
+              <a:rPr lang="en" sz="900" b="1">
+                <a:latin typeface="Calibri"/>
+                <a:ea typeface="Calibri"/>
+                <a:cs typeface="Calibri"/>
+                <a:sym typeface="Calibri"/>
+              </a:rPr>
+              <a:t>civil investigative demands</a:t>
+            </a:r>
+            <a:r>
+              <a:rPr lang="en" sz="900">
+                <a:latin typeface="Calibri"/>
+                <a:ea typeface="Calibri"/>
+                <a:cs typeface="Calibri"/>
+                <a:sym typeface="Calibri"/>
+              </a:rPr>
+              <a:t>, which work like subpoenas</a:t>
+            </a:r>
+            <a:endParaRPr sz="900">
+              <a:latin typeface="Calibri"/>
+              <a:ea typeface="Calibri"/>
+              <a:cs typeface="Calibri"/>
+              <a:sym typeface="Calibri"/>
+            </a:endParaRPr>
+          </a:p>
+          <a:p>
+            <a:pPr marL="171450" lvl="0" indent="-114300" algn="l" rtl="0">
+              <a:spcBef>
+                <a:spcPts val="0"/>
+              </a:spcBef>
+              <a:spcAft>
+                <a:spcPts val="0"/>
+              </a:spcAft>
+              <a:buSzPts val="900"/>
+              <a:buFont typeface="Calibri"/>
+              <a:buChar char="●"/>
+            </a:pPr>
+            <a:r>
+              <a:rPr lang="en" sz="900">
+                <a:latin typeface="Calibri"/>
+                <a:ea typeface="Calibri"/>
+                <a:cs typeface="Calibri"/>
+                <a:sym typeface="Calibri"/>
+              </a:rPr>
+              <a:t>They can compel documents and executive testimony on model safety</a:t>
+            </a:r>
+            <a:endParaRPr sz="900">
+              <a:latin typeface="Calibri"/>
+              <a:ea typeface="Calibri"/>
+              <a:cs typeface="Calibri"/>
+              <a:sym typeface="Calibri"/>
+            </a:endParaRPr>
+          </a:p>
+          <a:p>
+            <a:pPr marL="171450" lvl="0" indent="-114300" algn="l" rtl="0">
+              <a:spcBef>
+                <a:spcPts val="0"/>
+              </a:spcBef>
+              <a:spcAft>
+                <a:spcPts val="0"/>
+              </a:spcAft>
+              <a:buSzPts val="900"/>
+              <a:buFont typeface="Calibri"/>
+              <a:buChar char="●"/>
+            </a:pPr>
+            <a:r>
+              <a:rPr lang="en" sz="900">
+                <a:latin typeface="Calibri"/>
+                <a:ea typeface="Calibri"/>
+                <a:cs typeface="Calibri"/>
+                <a:sym typeface="Calibri"/>
+              </a:rPr>
+              <a:t>Topics: safeguards, known risks, internal testing, incident response, public safety claims</a:t>
+            </a:r>
+            <a:endParaRPr sz="900">
+              <a:latin typeface="Calibri"/>
+              <a:ea typeface="Calibri"/>
+              <a:cs typeface="Calibri"/>
+              <a:sym typeface="Calibri"/>
+            </a:endParaRPr>
+          </a:p>
+          <a:p>
+            <a:pPr marL="171450" lvl="0" indent="-114300" algn="l" rtl="0">
+              <a:spcBef>
+                <a:spcPts val="0"/>
+              </a:spcBef>
+              <a:spcAft>
+                <a:spcPts val="0"/>
+              </a:spcAft>
+              <a:buSzPts val="900"/>
+              <a:buFont typeface="Calibri"/>
+              <a:buChar char="●"/>
+            </a:pPr>
+            <a:r>
+              <a:rPr lang="en" sz="900">
+                <a:latin typeface="Calibri"/>
+                <a:ea typeface="Calibri"/>
+                <a:cs typeface="Calibri"/>
+                <a:sym typeface="Calibri"/>
+              </a:rPr>
+              <a:t>METR, the outside evaluator the labs cite, is pulled in too</a:t>
+            </a:r>
+            <a:endParaRPr sz="900">
+              <a:latin typeface="Calibri"/>
+              <a:ea typeface="Calibri"/>
+              <a:cs typeface="Calibri"/>
+              <a:sym typeface="Calibri"/>
+            </a:endParaRPr>
+          </a:p>
+          <a:p>
+            <a:pPr marL="171450" lvl="0" indent="-114300" algn="l" rtl="0">
+              <a:spcBef>
+                <a:spcPts val="0"/>
+              </a:spcBef>
+              <a:spcAft>
+                <a:spcPts val="0"/>
+              </a:spcAft>
+              <a:buSzPts val="900"/>
+              <a:buFont typeface="Calibri"/>
+              <a:buChar char="●"/>
+            </a:pPr>
+            <a:r>
+              <a:rPr lang="en" sz="900">
+                <a:latin typeface="Calibri"/>
+                <a:ea typeface="Calibri"/>
+                <a:cs typeface="Calibri"/>
+                <a:sym typeface="Calibri"/>
+              </a:rPr>
+              <a:t>Demands expected within weeks, one day after the White House accord</a:t>
+            </a:r>
+            <a:endParaRPr sz="900">
+              <a:latin typeface="Calibri"/>
+              <a:ea typeface="Calibri"/>
+              <a:cs typeface="Calibri"/>
+              <a:sym typeface="Calibri"/>
+            </a:endParaRPr>
+          </a:p>
+          <a:p>
+            <a:pPr marL="171450" lvl="0" indent="-114300" algn="l" rtl="0">
+              <a:spcBef>
+                <a:spcPts val="0"/>
+              </a:spcBef>
+              <a:spcAft>
+                <a:spcPts val="0"/>
+              </a:spcAft>
+              <a:buSzPts val="900"/>
+              <a:buFont typeface="Calibri"/>
+              <a:buChar char="●"/>
+            </a:pPr>
+            <a:r>
+              <a:rPr lang="en" sz="900" u="sng">
+                <a:solidFill>
+                  <a:srgbClr val="0563C1"/>
+                </a:solidFill>
                 <a:latin typeface="Calibri"/>
                 <a:ea typeface="Calibri"/>
                 <a:cs typeface="Calibri"/>
@@ -40382,353 +40549,7 @@
                   </a:extLst>
                 </a:hlinkClick>
               </a:rPr>
-              <a:t>PrimeIntellect.ai</a:t>
-            </a:r>
-            <a:r>
-              <a:rPr lang="en" sz="900" b="1">
-                <a:solidFill>
-                  <a:srgbClr val="FF0000"/>
-                </a:solidFill>
-                <a:latin typeface="Calibri"/>
-                <a:ea typeface="Calibri"/>
-                <a:cs typeface="Calibri"/>
-                <a:sym typeface="Calibri"/>
-              </a:rPr>
-              <a:t>  launches Prime Inference for open models</a:t>
-            </a:r>
-            <a:endParaRPr sz="900" b="1">
-              <a:solidFill>
-                <a:srgbClr val="FF0000"/>
-              </a:solidFill>
-              <a:latin typeface="Calibri"/>
-              <a:ea typeface="Calibri"/>
-              <a:cs typeface="Calibri"/>
-              <a:sym typeface="Calibri"/>
-            </a:endParaRPr>
-          </a:p>
-          <a:p>
-            <a:pPr marL="171450" lvl="0" indent="-114300" algn="l" rtl="0">
-              <a:spcBef>
-                <a:spcPts val="0"/>
-              </a:spcBef>
-              <a:spcAft>
-                <a:spcPts val="0"/>
-              </a:spcAft>
-              <a:buSzPts val="900"/>
-              <a:buFont typeface="Calibri"/>
-              <a:buChar char="●"/>
-            </a:pPr>
-            <a:r>
-              <a:rPr lang="en" sz="900">
-                <a:latin typeface="Calibri"/>
-                <a:ea typeface="Calibri"/>
-                <a:cs typeface="Calibri"/>
-                <a:sym typeface="Calibri"/>
-              </a:rPr>
-              <a:t>Blackwell GPUs, serve open-model and agent infrastructure at scale</a:t>
-            </a:r>
-            <a:endParaRPr sz="900">
-              <a:latin typeface="Calibri"/>
-              <a:ea typeface="Calibri"/>
-              <a:cs typeface="Calibri"/>
-              <a:sym typeface="Calibri"/>
-            </a:endParaRPr>
-          </a:p>
-          <a:p>
-            <a:pPr marL="171450" lvl="0" indent="-114300" algn="l" rtl="0">
-              <a:spcBef>
-                <a:spcPts val="0"/>
-              </a:spcBef>
-              <a:spcAft>
-                <a:spcPts val="0"/>
-              </a:spcAft>
-              <a:buSzPts val="900"/>
-              <a:buFont typeface="Calibri"/>
-              <a:buChar char="●"/>
-            </a:pPr>
-            <a:r>
-              <a:rPr lang="en" sz="900" b="1">
-                <a:latin typeface="Calibri"/>
-                <a:ea typeface="Calibri"/>
-                <a:cs typeface="Calibri"/>
-                <a:sym typeface="Calibri"/>
-              </a:rPr>
-              <a:t>OpenAI-compatible API</a:t>
-            </a:r>
-            <a:endParaRPr sz="900" b="1">
-              <a:latin typeface="Calibri"/>
-              <a:ea typeface="Calibri"/>
-              <a:cs typeface="Calibri"/>
-              <a:sym typeface="Calibri"/>
-            </a:endParaRPr>
-          </a:p>
-          <a:p>
-            <a:pPr marL="171450" lvl="0" indent="-114300" algn="l" rtl="0">
-              <a:spcBef>
-                <a:spcPts val="0"/>
-              </a:spcBef>
-              <a:spcAft>
-                <a:spcPts val="0"/>
-              </a:spcAft>
-              <a:buSzPts val="900"/>
-              <a:buFont typeface="Calibri"/>
-              <a:buChar char="●"/>
-            </a:pPr>
-            <a:r>
-              <a:rPr lang="en" sz="900">
-                <a:latin typeface="Calibri"/>
-                <a:ea typeface="Calibri"/>
-                <a:cs typeface="Calibri"/>
-                <a:sym typeface="Calibri"/>
-              </a:rPr>
-              <a:t>GLM-5.3 on GB200 NVL72: 66 sessions at 101 tokens/sec each</a:t>
-            </a:r>
-            <a:endParaRPr sz="900">
-              <a:latin typeface="Calibri"/>
-              <a:ea typeface="Calibri"/>
-              <a:cs typeface="Calibri"/>
-              <a:sym typeface="Calibri"/>
-            </a:endParaRPr>
-          </a:p>
-          <a:p>
-            <a:pPr marL="171450" lvl="0" indent="-114300" algn="l" rtl="0">
-              <a:spcBef>
-                <a:spcPts val="0"/>
-              </a:spcBef>
-              <a:spcAft>
-                <a:spcPts val="0"/>
-              </a:spcAft>
-              <a:buSzPts val="900"/>
-              <a:buFont typeface="Calibri"/>
-              <a:buChar char="●"/>
-            </a:pPr>
-            <a:r>
-              <a:rPr lang="en" sz="900" u="sng">
-                <a:solidFill>
-                  <a:schemeClr val="hlink"/>
-                </a:solidFill>
-                <a:latin typeface="Calibri"/>
-                <a:ea typeface="Calibri"/>
-                <a:cs typeface="Calibri"/>
-                <a:sym typeface="Calibri"/>
-                <a:hlinkClick r:id="rId3"/>
-              </a:rPr>
-              <a:t>PrimeIntellect.ai</a:t>
-            </a:r>
-            <a:r>
-              <a:rPr lang="en" sz="900">
-                <a:latin typeface="Calibri"/>
-                <a:ea typeface="Calibri"/>
-                <a:cs typeface="Calibri"/>
-                <a:sym typeface="Calibri"/>
-              </a:rPr>
-              <a:t> is a startup from CA, since 2023</a:t>
-            </a:r>
-            <a:endParaRPr sz="900">
-              <a:latin typeface="Calibri"/>
-              <a:ea typeface="Calibri"/>
-              <a:cs typeface="Calibri"/>
-              <a:sym typeface="Calibri"/>
-            </a:endParaRPr>
-          </a:p>
-          <a:p>
-            <a:pPr marL="171450" lvl="0" indent="-114300" algn="l" rtl="0">
-              <a:spcBef>
-                <a:spcPts val="0"/>
-              </a:spcBef>
-              <a:spcAft>
-                <a:spcPts val="0"/>
-              </a:spcAft>
-              <a:buSzPts val="900"/>
-              <a:buFont typeface="Calibri"/>
-              <a:buChar char="●"/>
-            </a:pPr>
-            <a:r>
-              <a:rPr lang="en" sz="900">
-                <a:latin typeface="Calibri"/>
-                <a:ea typeface="Calibri"/>
-                <a:cs typeface="Calibri"/>
-                <a:sym typeface="Calibri"/>
-              </a:rPr>
-              <a:t>- What: The platform offers serverless endpoints and reserved capacity on Prime’s NVIDIA Blackwell GPU infrastructure.</a:t>
-            </a:r>
-            <a:endParaRPr sz="900">
-              <a:latin typeface="Calibri"/>
-              <a:ea typeface="Calibri"/>
-              <a:cs typeface="Calibri"/>
-              <a:sym typeface="Calibri"/>
-            </a:endParaRPr>
-          </a:p>
-          <a:p>
-            <a:pPr marL="171450" lvl="0" indent="-114300" algn="l" rtl="0">
-              <a:spcBef>
-                <a:spcPts val="0"/>
-              </a:spcBef>
-              <a:spcAft>
-                <a:spcPts val="0"/>
-              </a:spcAft>
-              <a:buSzPts val="900"/>
-              <a:buFont typeface="Calibri"/>
-              <a:buChar char="●"/>
-            </a:pPr>
-            <a:r>
-              <a:rPr lang="en" sz="900">
-                <a:latin typeface="Calibri"/>
-                <a:ea typeface="Calibri"/>
-                <a:cs typeface="Calibri"/>
-                <a:sym typeface="Calibri"/>
-              </a:rPr>
-              <a:t>Developers can use an OpenAI-compatible API by changing the base URL; automatic failover routes traffic across datacenters.</a:t>
-            </a:r>
-            <a:endParaRPr sz="900">
-              <a:latin typeface="Calibri"/>
-              <a:ea typeface="Calibri"/>
-              <a:cs typeface="Calibri"/>
-              <a:sym typeface="Calibri"/>
-            </a:endParaRPr>
-          </a:p>
-          <a:p>
-            <a:pPr marL="171450" lvl="0" indent="-114300" algn="l" rtl="0">
-              <a:spcBef>
-                <a:spcPts val="0"/>
-              </a:spcBef>
-              <a:spcAft>
-                <a:spcPts val="0"/>
-              </a:spcAft>
-              <a:buSzPts val="900"/>
-              <a:buFont typeface="Calibri"/>
-              <a:buChar char="●"/>
-            </a:pPr>
-            <a:r>
-              <a:rPr lang="en" sz="900">
-                <a:latin typeface="Calibri"/>
-                <a:ea typeface="Calibri"/>
-                <a:cs typeface="Calibri"/>
-                <a:sym typeface="Calibri"/>
-              </a:rPr>
-              <a:t>Long-context, multi-turn agents need responsive, dependable inference. Prime separates prefill and decode, reuses cached context, and adds safeguards to handle failures and overload.</a:t>
-            </a:r>
-            <a:endParaRPr sz="900">
-              <a:latin typeface="Calibri"/>
-              <a:ea typeface="Calibri"/>
-              <a:cs typeface="Calibri"/>
-              <a:sym typeface="Calibri"/>
-            </a:endParaRPr>
-          </a:p>
-          <a:p>
-            <a:pPr marL="171450" lvl="0" indent="-114300" algn="l" rtl="0">
-              <a:spcBef>
-                <a:spcPts val="0"/>
-              </a:spcBef>
-              <a:spcAft>
-                <a:spcPts val="0"/>
-              </a:spcAft>
-              <a:buSzPts val="900"/>
-              <a:buFont typeface="Calibri"/>
-              <a:buChar char="●"/>
-            </a:pPr>
-            <a:r>
-              <a:rPr lang="en" sz="900">
-                <a:latin typeface="Calibri"/>
-                <a:ea typeface="Calibri"/>
-                <a:cs typeface="Calibri"/>
-                <a:sym typeface="Calibri"/>
-              </a:rPr>
-              <a:t>Before public release, the service supported Prime’s reinforcement-learning and coding-agent workloads at nearly one trillion tokens daily.</a:t>
-            </a:r>
-            <a:endParaRPr sz="900">
-              <a:latin typeface="Calibri"/>
-              <a:ea typeface="Calibri"/>
-              <a:cs typeface="Calibri"/>
-              <a:sym typeface="Calibri"/>
-            </a:endParaRPr>
-          </a:p>
-          <a:p>
-            <a:pPr marL="171450" lvl="0" indent="-114300" algn="l" rtl="0">
-              <a:spcBef>
-                <a:spcPts val="0"/>
-              </a:spcBef>
-              <a:spcAft>
-                <a:spcPts val="0"/>
-              </a:spcAft>
-              <a:buSzPts val="900"/>
-              <a:buFont typeface="Calibri"/>
-              <a:buChar char="●"/>
-            </a:pPr>
-            <a:r>
-              <a:rPr lang="en" sz="900">
-                <a:latin typeface="Calibri"/>
-                <a:ea typeface="Calibri"/>
-                <a:cs typeface="Calibri"/>
-                <a:sym typeface="Calibri"/>
-              </a:rPr>
-              <a:t>Prime reports GLM-5.3 serving 66 concurrent sessions at 101 tokens per second per user on GB200 NVL72.</a:t>
-            </a:r>
-            <a:endParaRPr sz="900">
-              <a:latin typeface="Calibri"/>
-              <a:ea typeface="Calibri"/>
-              <a:cs typeface="Calibri"/>
-              <a:sym typeface="Calibri"/>
-            </a:endParaRPr>
-          </a:p>
-          <a:p>
-            <a:pPr marL="171450" lvl="0" indent="-114300" algn="l" rtl="0">
-              <a:spcBef>
-                <a:spcPts val="0"/>
-              </a:spcBef>
-              <a:spcAft>
-                <a:spcPts val="0"/>
-              </a:spcAft>
-              <a:buSzPts val="900"/>
-              <a:buFont typeface="Calibri"/>
-              <a:buChar char="●"/>
-            </a:pPr>
-            <a:r>
-              <a:rPr lang="en" sz="900">
-                <a:latin typeface="Calibri"/>
-                <a:ea typeface="Calibri"/>
-                <a:cs typeface="Calibri"/>
-                <a:sym typeface="Calibri"/>
-              </a:rPr>
-              <a:t>The launch makes Prime’s production-scale open-model serving available to external developers and customers.</a:t>
-            </a:r>
-            <a:endParaRPr sz="900">
-              <a:latin typeface="Calibri"/>
-              <a:ea typeface="Calibri"/>
-              <a:cs typeface="Calibri"/>
-              <a:sym typeface="Calibri"/>
-            </a:endParaRPr>
-          </a:p>
-          <a:p>
-            <a:pPr marL="171450" lvl="0" indent="-114300" algn="l" rtl="0">
-              <a:spcBef>
-                <a:spcPts val="0"/>
-              </a:spcBef>
-              <a:spcAft>
-                <a:spcPts val="0"/>
-              </a:spcAft>
-              <a:buSzPts val="900"/>
-              <a:buFont typeface="Calibri"/>
-              <a:buChar char="●"/>
-            </a:pPr>
-            <a:r>
-              <a:rPr lang="en" sz="900" u="sng">
-                <a:solidFill>
-                  <a:srgbClr val="0563C1"/>
-                </a:solidFill>
-                <a:latin typeface="Calibri"/>
-                <a:ea typeface="Calibri"/>
-                <a:cs typeface="Calibri"/>
-                <a:sym typeface="Calibri"/>
-                <a:hlinkClick r:id="rId4">
-                  <a:extLst>
-                    <a:ext uri="{A12FA001-AC4F-418D-AE19-62706E023703}">
-                      <ahyp:hlinkClr xmlns:ahyp="http://schemas.microsoft.com/office/drawing/2018/hyperlinkcolor" val="tx"/>
-                    </a:ext>
-                  </a:extLst>
-                </a:hlinkClick>
-              </a:rPr>
-              <a:t>https://www.primeintellect.ai/blog/prime-inference</a:t>
+              <a:t>https://www.axios.com/2026/09/30/ftc-openai-anthropic-ai-safety-investigation</a:t>
             </a:r>
             <a:endParaRPr sz="900">
               <a:solidFill>
@@ -40750,8 +40571,8 @@
         </p:nvSpPr>
         <p:spPr>
           <a:xfrm>
-            <a:off x="60825" y="2288300"/>
-            <a:ext cx="4667400" cy="1126800"/>
+            <a:off x="72969" y="1365187"/>
+            <a:ext cx="5669400" cy="988200"/>
           </a:xfrm>
           <a:prstGeom prst="rect">
             <a:avLst/>
@@ -40773,7 +40594,7 @@
           </a:bodyPr>
           <a:lstStyle/>
           <a:p>
-            <a:pPr marL="171450" lvl="0" indent="-173736" algn="l" rtl="0">
+            <a:pPr marL="171450" lvl="0" indent="-114300" algn="l" rtl="0">
               <a:spcBef>
                 <a:spcPts val="0"/>
               </a:spcBef>
@@ -40797,7 +40618,7 @@
                 <a:cs typeface="Calibri"/>
                 <a:sym typeface="Calibri"/>
               </a:rPr>
-              <a:t>OpenAI safety report lead quits, calls the culture broken</a:t>
+              <a:t>Broadcom will lend Anthropic up to $42B to lease TPUs</a:t>
             </a:r>
             <a:endParaRPr sz="900" b="1">
               <a:solidFill>
@@ -40810,7 +40631,7 @@
             </a:endParaRPr>
           </a:p>
           <a:p>
-            <a:pPr marL="171450" lvl="0" indent="-173736" algn="l" rtl="0">
+            <a:pPr marL="171450" lvl="0" indent="-114300" algn="l" rtl="0">
               <a:spcBef>
                 <a:spcPts val="0"/>
               </a:spcBef>
@@ -40828,7 +40649,100 @@
                 <a:cs typeface="Calibri"/>
                 <a:sym typeface="Calibri"/>
               </a:rPr>
-              <a:t>David Robinson, </a:t>
+              <a:t>Disclosed in Anthropic's IPO prospectus</a:t>
+            </a:r>
+            <a:endParaRPr sz="900">
+              <a:latin typeface="Calibri"/>
+              <a:ea typeface="Calibri"/>
+              <a:cs typeface="Calibri"/>
+              <a:sym typeface="Calibri"/>
+            </a:endParaRPr>
+          </a:p>
+          <a:p>
+            <a:pPr marL="171450" lvl="0" indent="-114300" algn="l" rtl="0">
+              <a:spcBef>
+                <a:spcPts val="0"/>
+              </a:spcBef>
+              <a:spcAft>
+                <a:spcPts val="0"/>
+              </a:spcAft>
+              <a:buSzPts val="900"/>
+              <a:buFont typeface="Calibri"/>
+              <a:buChar char="●"/>
+            </a:pPr>
+            <a:r>
+              <a:rPr lang="en" sz="900" b="1">
+                <a:latin typeface="Calibri"/>
+                <a:ea typeface="Calibri"/>
+                <a:cs typeface="Calibri"/>
+                <a:sym typeface="Calibri"/>
+              </a:rPr>
+              <a:t>Convertible notes</a:t>
+            </a:r>
+            <a:r>
+              <a:rPr lang="en" sz="900">
+                <a:latin typeface="Calibri"/>
+                <a:ea typeface="Calibri"/>
+                <a:cs typeface="Calibri"/>
+                <a:sym typeface="Calibri"/>
+              </a:rPr>
+              <a:t> that can turn into Anthropic shares</a:t>
+            </a:r>
+            <a:endParaRPr sz="900">
+              <a:latin typeface="Calibri"/>
+              <a:ea typeface="Calibri"/>
+              <a:cs typeface="Calibri"/>
+              <a:sym typeface="Calibri"/>
+            </a:endParaRPr>
+          </a:p>
+          <a:p>
+            <a:pPr marL="171450" lvl="0" indent="-114300" algn="l" rtl="0">
+              <a:spcBef>
+                <a:spcPts val="0"/>
+              </a:spcBef>
+              <a:spcAft>
+                <a:spcPts val="0"/>
+              </a:spcAft>
+              <a:buSzPts val="900"/>
+              <a:buFont typeface="Calibri"/>
+              <a:buChar char="●"/>
+            </a:pPr>
+            <a:r>
+              <a:rPr lang="en" sz="900">
+                <a:latin typeface="Calibri"/>
+                <a:ea typeface="Calibri"/>
+                <a:cs typeface="Calibri"/>
+                <a:sym typeface="Calibri"/>
+              </a:rPr>
+              <a:t>Money only for TPU capacity leases, chips Broadcom co-designs with Google</a:t>
+            </a:r>
+            <a:endParaRPr sz="900">
+              <a:latin typeface="Calibri"/>
+              <a:ea typeface="Calibri"/>
+              <a:cs typeface="Calibri"/>
+              <a:sym typeface="Calibri"/>
+            </a:endParaRPr>
+          </a:p>
+          <a:p>
+            <a:pPr marL="171450" lvl="0" indent="-114300" algn="l" rtl="0">
+              <a:spcBef>
+                <a:spcPts val="0"/>
+              </a:spcBef>
+              <a:spcAft>
+                <a:spcPts val="0"/>
+              </a:spcAft>
+              <a:buSzPts val="900"/>
+              <a:buFont typeface="Calibri"/>
+              <a:buChar char="●"/>
+            </a:pPr>
+            <a:r>
+              <a:rPr lang="en" sz="900">
+                <a:latin typeface="Calibri"/>
+                <a:ea typeface="Calibri"/>
+                <a:cs typeface="Calibri"/>
+                <a:sym typeface="Calibri"/>
+              </a:rPr>
+              <a:t>Covers about a third of the </a:t>
             </a:r>
             <a:r>
               <a:rPr lang="en" sz="900">
@@ -40840,7 +40754,7 @@
                 <a:cs typeface="Calibri"/>
                 <a:sym typeface="Calibri"/>
               </a:rPr>
-              <a:t>3.5 years</a:t>
+              <a:t>$125.2B</a:t>
             </a:r>
             <a:r>
               <a:rPr lang="en" sz="900">
@@ -40849,7 +40763,7 @@
                 <a:cs typeface="Calibri"/>
                 <a:sym typeface="Calibri"/>
               </a:rPr>
-              <a:t> at OpenAI, wrote up his exit in The Atlantic</a:t>
+              <a:t> five-year TPU commitment</a:t>
             </a:r>
             <a:endParaRPr sz="900">
               <a:latin typeface="Calibri"/>
@@ -40859,7 +40773,7 @@
             </a:endParaRPr>
           </a:p>
           <a:p>
-            <a:pPr marL="171450" lvl="0" indent="-173736" algn="l" rtl="0">
+            <a:pPr marL="171450" lvl="0" indent="-114300" algn="l" rtl="0">
               <a:spcBef>
                 <a:spcPts val="0"/>
               </a:spcBef>
@@ -40877,25 +40791,7 @@
                 <a:cs typeface="Calibri"/>
                 <a:sym typeface="Calibri"/>
               </a:rPr>
-              <a:t>He oversaw safety reports for </a:t>
-            </a:r>
-            <a:r>
-              <a:rPr lang="en" sz="900" b="1">
-                <a:latin typeface="Calibri"/>
-                <a:ea typeface="Calibri"/>
-                <a:cs typeface="Calibri"/>
-                <a:sym typeface="Calibri"/>
-              </a:rPr>
-              <a:t>12 frontier launches</a:t>
-            </a:r>
-            <a:r>
-              <a:rPr lang="en" sz="900">
-                <a:latin typeface="Calibri"/>
-                <a:ea typeface="Calibri"/>
-                <a:cs typeface="Calibri"/>
-                <a:sym typeface="Calibri"/>
-              </a:rPr>
-              <a:t> and drafted the Preparedness Framework</a:t>
+              <a:t>No notes sold before the IPO; Anthropic flags conflicts of interest</a:t>
             </a:r>
             <a:endParaRPr sz="900">
               <a:latin typeface="Calibri"/>
@@ -40905,119 +40801,7 @@
             </a:endParaRPr>
           </a:p>
           <a:p>
-            <a:pPr marL="171450" lvl="0" indent="-173736" algn="l" rtl="0">
-              <a:spcBef>
-                <a:spcPts val="0"/>
-              </a:spcBef>
-              <a:spcAft>
-                <a:spcPts val="0"/>
-              </a:spcAft>
-              <a:buSzPts val="900"/>
-              <a:buFont typeface="Calibri"/>
-              <a:buChar char="●"/>
-            </a:pPr>
-            <a:r>
-              <a:rPr lang="en" sz="900">
-                <a:latin typeface="Calibri"/>
-                <a:ea typeface="Calibri"/>
-                <a:cs typeface="Calibri"/>
-                <a:sym typeface="Calibri"/>
-              </a:rPr>
-              <a:t>"The time for trial and error is over"</a:t>
-            </a:r>
-            <a:endParaRPr sz="900">
-              <a:latin typeface="Calibri"/>
-              <a:ea typeface="Calibri"/>
-              <a:cs typeface="Calibri"/>
-              <a:sym typeface="Calibri"/>
-            </a:endParaRPr>
-          </a:p>
-          <a:p>
-            <a:pPr marL="171450" lvl="0" indent="-173736" algn="l" rtl="0">
-              <a:spcBef>
-                <a:spcPts val="0"/>
-              </a:spcBef>
-              <a:spcAft>
-                <a:spcPts val="0"/>
-              </a:spcAft>
-              <a:buSzPts val="900"/>
-              <a:buFont typeface="Calibri"/>
-              <a:buChar char="●"/>
-            </a:pPr>
-            <a:r>
-              <a:rPr lang="en" sz="900">
-                <a:latin typeface="Calibri"/>
-                <a:ea typeface="Calibri"/>
-                <a:cs typeface="Calibri"/>
-                <a:sym typeface="Calibri"/>
-              </a:rPr>
-              <a:t>Wants labs run like nuclear plants or airports, with layers of redundancy</a:t>
-            </a:r>
-            <a:endParaRPr sz="900">
-              <a:latin typeface="Calibri"/>
-              <a:ea typeface="Calibri"/>
-              <a:cs typeface="Calibri"/>
-              <a:sym typeface="Calibri"/>
-            </a:endParaRPr>
-          </a:p>
-          <a:p>
-            <a:pPr marL="171450" lvl="0" indent="-173736" algn="l" rtl="0">
-              <a:spcBef>
-                <a:spcPts val="0"/>
-              </a:spcBef>
-              <a:spcAft>
-                <a:spcPts val="0"/>
-              </a:spcAft>
-              <a:buSzPts val="900"/>
-              <a:buFont typeface="Calibri"/>
-              <a:buChar char="●"/>
-            </a:pPr>
-            <a:r>
-              <a:rPr lang="en" sz="900">
-                <a:latin typeface="Calibri"/>
-                <a:ea typeface="Calibri"/>
-                <a:cs typeface="Calibri"/>
-                <a:sym typeface="Calibri"/>
-              </a:rPr>
-              <a:t>Says the team was too busy sprinting to make big changes</a:t>
-            </a:r>
-            <a:endParaRPr sz="900">
-              <a:latin typeface="Calibri"/>
-              <a:ea typeface="Calibri"/>
-              <a:cs typeface="Calibri"/>
-              <a:sym typeface="Calibri"/>
-            </a:endParaRPr>
-          </a:p>
-          <a:p>
-            <a:pPr marL="171450" lvl="0" indent="-173736" algn="l" rtl="0">
-              <a:spcBef>
-                <a:spcPts val="0"/>
-              </a:spcBef>
-              <a:spcAft>
-                <a:spcPts val="0"/>
-              </a:spcAft>
-              <a:buSzPts val="900"/>
-              <a:buFont typeface="Calibri"/>
-              <a:buChar char="●"/>
-            </a:pPr>
-            <a:r>
-              <a:rPr lang="en" sz="900">
-                <a:latin typeface="Calibri"/>
-                <a:ea typeface="Calibri"/>
-                <a:cs typeface="Calibri"/>
-                <a:sym typeface="Calibri"/>
-              </a:rPr>
-              <a:t>Follows the firing of three safety researchers over alleged leaks</a:t>
-            </a:r>
-            <a:endParaRPr sz="900">
-              <a:latin typeface="Calibri"/>
-              <a:ea typeface="Calibri"/>
-              <a:cs typeface="Calibri"/>
-              <a:sym typeface="Calibri"/>
-            </a:endParaRPr>
-          </a:p>
-          <a:p>
-            <a:pPr marL="171450" lvl="0" indent="-173736" algn="l" rtl="0">
+            <a:pPr marL="171450" lvl="0" indent="-114300" algn="l" rtl="0">
               <a:spcBef>
                 <a:spcPts val="0"/>
               </a:spcBef>
@@ -41037,7 +40821,7 @@
                 <a:ea typeface="Calibri"/>
                 <a:cs typeface="Calibri"/>
                 <a:sym typeface="Calibri"/>
-                <a:hlinkClick r:id="rId5">
+                <a:hlinkClick r:id="rId4">
                   <a:extLst>
                     <a:ext uri="{A12FA001-AC4F-418D-AE19-62706E023703}">
                       <ahyp:hlinkClr xmlns:ahyp="http://schemas.microsoft.com/office/drawing/2018/hyperlinkcolor" val="tx"/>
@@ -41045,7 +40829,7 @@
                   </a:extLst>
                 </a:hlinkClick>
               </a:rPr>
-              <a:t>https://www.calcalistech.com/ctechnews/article/zienaylz5</a:t>
+              <a:t>https://www.implicator.ai/broadcom-agrees-to-lend-anthropic-up-to-42-billion-to-lease-chips-it-helps-design/</a:t>
             </a:r>
             <a:endParaRPr sz="900">
               <a:solidFill>
@@ -41067,8 +40851,8 @@
         </p:nvSpPr>
         <p:spPr>
           <a:xfrm>
-            <a:off x="60825" y="3512450"/>
-            <a:ext cx="4076400" cy="988200"/>
+            <a:off x="68052" y="2415032"/>
+            <a:ext cx="5669400" cy="849600"/>
           </a:xfrm>
           <a:prstGeom prst="rect">
             <a:avLst/>
@@ -41090,7 +40874,7 @@
           </a:bodyPr>
           <a:lstStyle/>
           <a:p>
-            <a:pPr marL="171450" lvl="0" indent="-173736" algn="l" rtl="0">
+            <a:pPr marL="171450" lvl="0" indent="-114300" algn="l" rtl="0">
               <a:spcBef>
                 <a:spcPts val="0"/>
               </a:spcBef>
@@ -41114,7 +40898,7 @@
                 <a:cs typeface="Calibri"/>
                 <a:sym typeface="Calibri"/>
               </a:rPr>
-              <a:t>Apple will tighten Full Disk Access on Macs because of AI agents</a:t>
+              <a:t>NVIDIA DGX Spark 64GB: a cheaper local AI box at $5K</a:t>
             </a:r>
             <a:endParaRPr sz="900" b="1">
               <a:solidFill>
@@ -41127,7 +40911,7 @@
             </a:endParaRPr>
           </a:p>
           <a:p>
-            <a:pPr marL="171450" lvl="0" indent="-173736" algn="l" rtl="0">
+            <a:pPr marL="171450" lvl="0" indent="-114300" algn="l" rtl="0">
               <a:spcBef>
                 <a:spcPts val="0"/>
               </a:spcBef>
@@ -41145,7 +40929,19 @@
                 <a:cs typeface="Calibri"/>
                 <a:sym typeface="Calibri"/>
               </a:rPr>
-              <a:t>Full Disk Access lets an app read all files, Mail, Messages and Safari history</a:t>
+              <a:t>Same GB10 Grace Blackwell chip, but only </a:t>
+            </a:r>
+            <a:r>
+              <a:rPr lang="en" sz="900">
+                <a:solidFill>
+                  <a:schemeClr val="dk1"/>
+                </a:solidFill>
+                <a:latin typeface="Calibri"/>
+                <a:ea typeface="Calibri"/>
+                <a:cs typeface="Calibri"/>
+                <a:sym typeface="Calibri"/>
+              </a:rPr>
+              <a:t>64GB unified memory </a:t>
             </a:r>
             <a:endParaRPr sz="900">
               <a:latin typeface="Calibri"/>
@@ -41155,7 +40951,7 @@
             </a:endParaRPr>
           </a:p>
           <a:p>
-            <a:pPr marL="171450" lvl="0" indent="-173736" algn="l" rtl="0">
+            <a:pPr marL="171450" lvl="0" indent="-114300" algn="l" rtl="0">
               <a:spcBef>
                 <a:spcPts val="0"/>
               </a:spcBef>
@@ -41173,7 +40969,7 @@
                 <a:cs typeface="Calibri"/>
                 <a:sym typeface="Calibri"/>
               </a:rPr>
-              <a:t>Apple says agents that act across the Mac make that risk grow</a:t>
+              <a:t>Two units cluster over ConnectX-7 into 128GB</a:t>
             </a:r>
             <a:endParaRPr sz="900">
               <a:latin typeface="Calibri"/>
@@ -41183,7 +40979,7 @@
             </a:endParaRPr>
           </a:p>
           <a:p>
-            <a:pPr marL="171450" lvl="0" indent="-173736" algn="l" rtl="0">
+            <a:pPr marL="171450" lvl="0" indent="-114300" algn="l" rtl="0">
               <a:spcBef>
                 <a:spcPts val="0"/>
               </a:spcBef>
@@ -41201,26 +40997,38 @@
                 <a:cs typeface="Calibri"/>
                 <a:sym typeface="Calibri"/>
               </a:rPr>
-              <a:t>Future macOS will grant it only with a </a:t>
-            </a:r>
-            <a:r>
-              <a:rPr lang="en" sz="900" b="1">
-                <a:latin typeface="Calibri"/>
-                <a:ea typeface="Calibri"/>
-                <a:cs typeface="Calibri"/>
-                <a:sym typeface="Calibri"/>
-              </a:rPr>
-              <a:t>very explicit user action</a:t>
-            </a:r>
-            <a:endParaRPr sz="900" b="1">
-              <a:latin typeface="Calibri"/>
-              <a:ea typeface="Calibri"/>
-              <a:cs typeface="Calibri"/>
-              <a:sym typeface="Calibri"/>
-            </a:endParaRPr>
-          </a:p>
-          <a:p>
-            <a:pPr marL="171450" lvl="0" indent="-173736" algn="l" rtl="0">
+              <a:t>The 128GB model rose from $3,999 to </a:t>
+            </a:r>
+            <a:r>
+              <a:rPr lang="en" sz="900">
+                <a:highlight>
+                  <a:srgbClr val="FFF2CC"/>
+                </a:highlight>
+                <a:latin typeface="Calibri"/>
+                <a:ea typeface="Calibri"/>
+                <a:cs typeface="Calibri"/>
+                <a:sym typeface="Calibri"/>
+              </a:rPr>
+              <a:t>$6,950</a:t>
+            </a:r>
+            <a:r>
+              <a:rPr lang="en" sz="900">
+                <a:latin typeface="Calibri"/>
+                <a:ea typeface="Calibri"/>
+                <a:cs typeface="Calibri"/>
+                <a:sym typeface="Calibri"/>
+              </a:rPr>
+              <a:t> on memory prices</a:t>
+            </a:r>
+            <a:endParaRPr sz="900">
+              <a:latin typeface="Calibri"/>
+              <a:ea typeface="Calibri"/>
+              <a:cs typeface="Calibri"/>
+              <a:sym typeface="Calibri"/>
+            </a:endParaRPr>
+          </a:p>
+          <a:p>
+            <a:pPr marL="171450" lvl="0" indent="-114300" algn="l" rtl="0">
               <a:spcBef>
                 <a:spcPts val="0"/>
               </a:spcBef>
@@ -41238,7 +41046,7 @@
                 <a:cs typeface="Calibri"/>
                 <a:sym typeface="Calibri"/>
               </a:rPr>
-              <a:t>Some developers ask for it in ways users do not understand, Apple says</a:t>
+              <a:t>Ships Oct 23 from Acer, ASUS, Dell, Gigabyte, HP and MSI</a:t>
             </a:r>
             <a:endParaRPr sz="900">
               <a:latin typeface="Calibri"/>
@@ -41248,35 +41056,7 @@
             </a:endParaRPr>
           </a:p>
           <a:p>
-            <a:pPr marL="171450" lvl="0" indent="-173736" algn="l" rtl="0">
-              <a:spcBef>
-                <a:spcPts val="0"/>
-              </a:spcBef>
-              <a:spcAft>
-                <a:spcPts val="0"/>
-              </a:spcAft>
-              <a:buSzPts val="900"/>
-              <a:buFont typeface="Calibri"/>
-              <a:buChar char="●"/>
-            </a:pPr>
-            <a:r>
-              <a:rPr lang="en" sz="900">
-                <a:latin typeface="Calibri"/>
-                <a:ea typeface="Calibri"/>
-                <a:cs typeface="Calibri"/>
-                <a:sym typeface="Calibri"/>
-              </a:rPr>
-              <a:t>No release date yet</a:t>
-            </a:r>
-            <a:endParaRPr sz="900">
-              <a:latin typeface="Calibri"/>
-              <a:ea typeface="Calibri"/>
-              <a:cs typeface="Calibri"/>
-              <a:sym typeface="Calibri"/>
-            </a:endParaRPr>
-          </a:p>
-          <a:p>
-            <a:pPr marL="171450" lvl="0" indent="-173736" algn="l" rtl="0">
+            <a:pPr marL="171450" lvl="0" indent="-114300" algn="l" rtl="0">
               <a:spcBef>
                 <a:spcPts val="0"/>
               </a:spcBef>
@@ -41296,7 +41076,7 @@
                 <a:ea typeface="Calibri"/>
                 <a:cs typeface="Calibri"/>
                 <a:sym typeface="Calibri"/>
-                <a:hlinkClick r:id="rId6">
+                <a:hlinkClick r:id="rId5">
                   <a:extLst>
                     <a:ext uri="{A12FA001-AC4F-418D-AE19-62706E023703}">
                       <ahyp:hlinkClr xmlns:ahyp="http://schemas.microsoft.com/office/drawing/2018/hyperlinkcolor" val="tx"/>
@@ -41304,11 +41084,228 @@
                   </a:extLst>
                 </a:hlinkClick>
               </a:rPr>
-              <a:t>https://thehackernews.com/2026/10/apple-plans-tighter-macos-full-disk.html</a:t>
+              <a:t>https://blogs.nvidia.com/blog/local-ai-dgx-spark-64gb-sync/</a:t>
             </a:r>
             <a:endParaRPr sz="900">
               <a:solidFill>
                 <a:srgbClr val="0563C1"/>
+              </a:solidFill>
+              <a:latin typeface="Calibri"/>
+              <a:ea typeface="Calibri"/>
+              <a:cs typeface="Calibri"/>
+              <a:sym typeface="Calibri"/>
+            </a:endParaRPr>
+          </a:p>
+        </p:txBody>
+      </p:sp>
+      <p:sp>
+        <p:nvSpPr>
+          <p:cNvPr id="294" name="Google Shape;294;p41"/>
+          <p:cNvSpPr txBox="1"/>
+          <p:nvPr/>
+        </p:nvSpPr>
+        <p:spPr>
+          <a:xfrm>
+            <a:off x="72975" y="3326275"/>
+            <a:ext cx="8299500" cy="849600"/>
+          </a:xfrm>
+          <a:prstGeom prst="rect">
+            <a:avLst/>
+          </a:prstGeom>
+          <a:noFill/>
+          <a:ln w="9525" cap="flat" cmpd="sng">
+            <a:solidFill>
+              <a:srgbClr val="FF0000"/>
+            </a:solidFill>
+            <a:prstDash val="solid"/>
+            <a:round/>
+            <a:headEnd type="none" w="sm" len="sm"/>
+            <a:tailEnd type="none" w="sm" len="sm"/>
+          </a:ln>
+        </p:spPr>
+        <p:txBody>
+          <a:bodyPr spcFirstLastPara="1" wrap="square" lIns="9125" tIns="9125" rIns="9125" bIns="9125" anchor="t" anchorCtr="0">
+            <a:spAutoFit/>
+          </a:bodyPr>
+          <a:lstStyle/>
+          <a:p>
+            <a:pPr marL="171450" lvl="0" indent="-114300" algn="l" rtl="0">
+              <a:spcBef>
+                <a:spcPts val="0"/>
+              </a:spcBef>
+              <a:spcAft>
+                <a:spcPts val="0"/>
+              </a:spcAft>
+              <a:buClr>
+                <a:schemeClr val="dk1"/>
+              </a:buClr>
+              <a:buSzPts val="900"/>
+              <a:buFont typeface="Calibri"/>
+              <a:buChar char="●"/>
+            </a:pPr>
+            <a:r>
+              <a:rPr lang="en" sz="900">
+                <a:solidFill>
+                  <a:schemeClr val="dk1"/>
+                </a:solidFill>
+                <a:latin typeface="Calibri"/>
+                <a:ea typeface="Calibri"/>
+                <a:cs typeface="Calibri"/>
+                <a:sym typeface="Calibri"/>
+              </a:rPr>
+              <a:t>Google introduced Gemini 3.8 Flash TTS on September 23, 2026, enabling expressive, customizable voices for audio content and voice tools.</a:t>
+            </a:r>
+            <a:endParaRPr sz="900">
+              <a:solidFill>
+                <a:schemeClr val="dk1"/>
+              </a:solidFill>
+              <a:latin typeface="Calibri"/>
+              <a:ea typeface="Calibri"/>
+              <a:cs typeface="Calibri"/>
+              <a:sym typeface="Calibri"/>
+            </a:endParaRPr>
+          </a:p>
+          <a:p>
+            <a:pPr marL="171450" lvl="0" indent="-114300" algn="l" rtl="0">
+              <a:spcBef>
+                <a:spcPts val="0"/>
+              </a:spcBef>
+              <a:spcAft>
+                <a:spcPts val="0"/>
+              </a:spcAft>
+              <a:buClr>
+                <a:schemeClr val="dk1"/>
+              </a:buClr>
+              <a:buSzPts val="900"/>
+              <a:buFont typeface="Calibri"/>
+              <a:buChar char="●"/>
+            </a:pPr>
+            <a:r>
+              <a:rPr lang="en" sz="900">
+                <a:solidFill>
+                  <a:schemeClr val="dk1"/>
+                </a:solidFill>
+                <a:latin typeface="Calibri"/>
+                <a:ea typeface="Calibri"/>
+                <a:cs typeface="Calibri"/>
+                <a:sym typeface="Calibri"/>
+              </a:rPr>
+              <a:t>- On September 24, Gemini 3.8 Live with Live Avatar brought real-time video conversation and background tool use to Gemini Enterprise.</a:t>
+            </a:r>
+            <a:endParaRPr sz="900">
+              <a:solidFill>
+                <a:schemeClr val="dk1"/>
+              </a:solidFill>
+              <a:latin typeface="Calibri"/>
+              <a:ea typeface="Calibri"/>
+              <a:cs typeface="Calibri"/>
+              <a:sym typeface="Calibri"/>
+            </a:endParaRPr>
+          </a:p>
+          <a:p>
+            <a:pPr marL="171450" lvl="0" indent="-114300" algn="l" rtl="0">
+              <a:spcBef>
+                <a:spcPts val="0"/>
+              </a:spcBef>
+              <a:spcAft>
+                <a:spcPts val="0"/>
+              </a:spcAft>
+              <a:buClr>
+                <a:schemeClr val="dk1"/>
+              </a:buClr>
+              <a:buSzPts val="900"/>
+              <a:buFont typeface="Calibri"/>
+              <a:buChar char="●"/>
+            </a:pPr>
+            <a:r>
+              <a:rPr lang="en" sz="900">
+                <a:solidFill>
+                  <a:schemeClr val="dk1"/>
+                </a:solidFill>
+                <a:latin typeface="Calibri"/>
+                <a:ea typeface="Calibri"/>
+                <a:cs typeface="Calibri"/>
+                <a:sym typeface="Calibri"/>
+              </a:rPr>
+              <a:t>- Gemini Notebook updates described in the video turn sources into interactive learning materials; clearer, well-organized content may be easier for AI tools to use.</a:t>
+            </a:r>
+            <a:endParaRPr sz="900">
+              <a:solidFill>
+                <a:schemeClr val="dk1"/>
+              </a:solidFill>
+              <a:latin typeface="Calibri"/>
+              <a:ea typeface="Calibri"/>
+              <a:cs typeface="Calibri"/>
+              <a:sym typeface="Calibri"/>
+            </a:endParaRPr>
+          </a:p>
+          <a:p>
+            <a:pPr marL="171450" lvl="0" indent="-114300" algn="l" rtl="0">
+              <a:spcBef>
+                <a:spcPts val="0"/>
+              </a:spcBef>
+              <a:spcAft>
+                <a:spcPts val="0"/>
+              </a:spcAft>
+              <a:buClr>
+                <a:schemeClr val="dk1"/>
+              </a:buClr>
+              <a:buSzPts val="900"/>
+              <a:buFont typeface="Calibri"/>
+              <a:buChar char="●"/>
+            </a:pPr>
+            <a:r>
+              <a:rPr lang="en" sz="900">
+                <a:solidFill>
+                  <a:schemeClr val="dk1"/>
+                </a:solidFill>
+                <a:latin typeface="Calibri"/>
+                <a:ea typeface="Calibri"/>
+                <a:cs typeface="Calibri"/>
+                <a:sym typeface="Calibri"/>
+              </a:rPr>
+              <a:t>- Google’s Project Suncatcher will test whether TPUs can operate in orbit, addressing radiation, cooling, and satellite-link challenges, with a two-satellite test planned for 2027.</a:t>
+            </a:r>
+            <a:endParaRPr sz="900">
+              <a:solidFill>
+                <a:schemeClr val="dk1"/>
+              </a:solidFill>
+              <a:latin typeface="Calibri"/>
+              <a:ea typeface="Calibri"/>
+              <a:cs typeface="Calibri"/>
+              <a:sym typeface="Calibri"/>
+            </a:endParaRPr>
+          </a:p>
+          <a:p>
+            <a:pPr marL="171450" lvl="0" indent="-114300" algn="l" rtl="0">
+              <a:spcBef>
+                <a:spcPts val="0"/>
+              </a:spcBef>
+              <a:spcAft>
+                <a:spcPts val="0"/>
+              </a:spcAft>
+              <a:buClr>
+                <a:schemeClr val="dk1"/>
+              </a:buClr>
+              <a:buSzPts val="900"/>
+              <a:buFont typeface="Calibri"/>
+              <a:buChar char="●"/>
+            </a:pPr>
+            <a:r>
+              <a:rPr lang="en" sz="900">
+                <a:solidFill>
+                  <a:schemeClr val="dk1"/>
+                </a:solidFill>
+                <a:latin typeface="Calibri"/>
+                <a:ea typeface="Calibri"/>
+                <a:cs typeface="Calibri"/>
+                <a:sym typeface="Calibri"/>
+              </a:rPr>
+              <a:t>- For SEO, the speaker’s takeaway is to publish clear, trustworthy answers that work well across search and AI experiences. The updates matter because they expand how people may consume and interact with information.</a:t>
+            </a:r>
+            <a:endParaRPr sz="900">
+              <a:solidFill>
+                <a:schemeClr val="dk1"/>
               </a:solidFill>
               <a:latin typeface="Calibri"/>
               <a:ea typeface="Calibri"/>
@@ -41691,7 +41688,7 @@
   <p:cSld>
     <p:spTree>
       <p:nvGrpSpPr>
-        <p:cNvPr id="1" name="Shape 297"/>
+        <p:cNvPr id="1" name="Shape 298"/>
         <p:cNvGrpSpPr/>
         <p:nvPr/>
       </p:nvGrpSpPr>
@@ -41705,7 +41702,7 @@
       </p:grpSpPr>
       <p:sp>
         <p:nvSpPr>
-          <p:cNvPr id="298" name="Google Shape;298;p42"/>
+          <p:cNvPr id="299" name="Google Shape;299;p42"/>
           <p:cNvSpPr txBox="1"/>
           <p:nvPr/>
         </p:nvSpPr>
@@ -41757,7 +41754,1085 @@
       </p:sp>
       <p:sp>
         <p:nvSpPr>
-          <p:cNvPr id="299" name="Google Shape;299;p42"/>
+          <p:cNvPr id="300" name="Google Shape;300;p42"/>
+          <p:cNvSpPr txBox="1"/>
+          <p:nvPr/>
+        </p:nvSpPr>
+        <p:spPr>
+          <a:xfrm>
+            <a:off x="60825" y="371749"/>
+            <a:ext cx="7897200" cy="1819200"/>
+          </a:xfrm>
+          <a:prstGeom prst="rect">
+            <a:avLst/>
+          </a:prstGeom>
+          <a:noFill/>
+          <a:ln w="9525" cap="flat" cmpd="sng">
+            <a:solidFill>
+              <a:srgbClr val="FF0000"/>
+            </a:solidFill>
+            <a:prstDash val="solid"/>
+            <a:round/>
+            <a:headEnd type="none" w="sm" len="sm"/>
+            <a:tailEnd type="none" w="sm" len="sm"/>
+          </a:ln>
+        </p:spPr>
+        <p:txBody>
+          <a:bodyPr spcFirstLastPara="1" wrap="square" lIns="9125" tIns="9125" rIns="9125" bIns="9125" anchor="t" anchorCtr="0">
+            <a:spAutoFit/>
+          </a:bodyPr>
+          <a:lstStyle/>
+          <a:p>
+            <a:pPr marL="171450" lvl="0" indent="-114300" algn="l" rtl="0">
+              <a:spcBef>
+                <a:spcPts val="0"/>
+              </a:spcBef>
+              <a:spcAft>
+                <a:spcPts val="0"/>
+              </a:spcAft>
+              <a:buClr>
+                <a:srgbClr val="FF0000"/>
+              </a:buClr>
+              <a:buSzPts val="900"/>
+              <a:buFont typeface="Calibri"/>
+              <a:buChar char="●"/>
+            </a:pPr>
+            <a:r>
+              <a:rPr lang="en" sz="900" b="1">
+                <a:solidFill>
+                  <a:srgbClr val="FF0000"/>
+                </a:solidFill>
+                <a:uFill>
+                  <a:noFill/>
+                </a:uFill>
+                <a:latin typeface="Calibri"/>
+                <a:ea typeface="Calibri"/>
+                <a:cs typeface="Calibri"/>
+                <a:sym typeface="Calibri"/>
+                <a:hlinkClick r:id="rId3">
+                  <a:extLst>
+                    <a:ext uri="{A12FA001-AC4F-418D-AE19-62706E023703}">
+                      <ahyp:hlinkClr xmlns:ahyp="http://schemas.microsoft.com/office/drawing/2018/hyperlinkcolor" val="tx"/>
+                    </a:ext>
+                  </a:extLst>
+                </a:hlinkClick>
+              </a:rPr>
+              <a:t>PrimeIntellect.ai</a:t>
+            </a:r>
+            <a:r>
+              <a:rPr lang="en" sz="900" b="1">
+                <a:solidFill>
+                  <a:srgbClr val="FF0000"/>
+                </a:solidFill>
+                <a:latin typeface="Calibri"/>
+                <a:ea typeface="Calibri"/>
+                <a:cs typeface="Calibri"/>
+                <a:sym typeface="Calibri"/>
+              </a:rPr>
+              <a:t>  launches Prime Inference for open models</a:t>
+            </a:r>
+            <a:endParaRPr sz="900" b="1">
+              <a:solidFill>
+                <a:srgbClr val="FF0000"/>
+              </a:solidFill>
+              <a:latin typeface="Calibri"/>
+              <a:ea typeface="Calibri"/>
+              <a:cs typeface="Calibri"/>
+              <a:sym typeface="Calibri"/>
+            </a:endParaRPr>
+          </a:p>
+          <a:p>
+            <a:pPr marL="171450" lvl="0" indent="-114300" algn="l" rtl="0">
+              <a:spcBef>
+                <a:spcPts val="0"/>
+              </a:spcBef>
+              <a:spcAft>
+                <a:spcPts val="0"/>
+              </a:spcAft>
+              <a:buSzPts val="900"/>
+              <a:buFont typeface="Calibri"/>
+              <a:buChar char="●"/>
+            </a:pPr>
+            <a:r>
+              <a:rPr lang="en" sz="900">
+                <a:latin typeface="Calibri"/>
+                <a:ea typeface="Calibri"/>
+                <a:cs typeface="Calibri"/>
+                <a:sym typeface="Calibri"/>
+              </a:rPr>
+              <a:t>Blackwell GPUs, serve open-model and agent infrastructure at scale</a:t>
+            </a:r>
+            <a:endParaRPr sz="900">
+              <a:latin typeface="Calibri"/>
+              <a:ea typeface="Calibri"/>
+              <a:cs typeface="Calibri"/>
+              <a:sym typeface="Calibri"/>
+            </a:endParaRPr>
+          </a:p>
+          <a:p>
+            <a:pPr marL="171450" lvl="0" indent="-114300" algn="l" rtl="0">
+              <a:spcBef>
+                <a:spcPts val="0"/>
+              </a:spcBef>
+              <a:spcAft>
+                <a:spcPts val="0"/>
+              </a:spcAft>
+              <a:buSzPts val="900"/>
+              <a:buFont typeface="Calibri"/>
+              <a:buChar char="●"/>
+            </a:pPr>
+            <a:r>
+              <a:rPr lang="en" sz="900" b="1">
+                <a:latin typeface="Calibri"/>
+                <a:ea typeface="Calibri"/>
+                <a:cs typeface="Calibri"/>
+                <a:sym typeface="Calibri"/>
+              </a:rPr>
+              <a:t>OpenAI-compatible API</a:t>
+            </a:r>
+            <a:endParaRPr sz="900" b="1">
+              <a:latin typeface="Calibri"/>
+              <a:ea typeface="Calibri"/>
+              <a:cs typeface="Calibri"/>
+              <a:sym typeface="Calibri"/>
+            </a:endParaRPr>
+          </a:p>
+          <a:p>
+            <a:pPr marL="171450" lvl="0" indent="-114300" algn="l" rtl="0">
+              <a:spcBef>
+                <a:spcPts val="0"/>
+              </a:spcBef>
+              <a:spcAft>
+                <a:spcPts val="0"/>
+              </a:spcAft>
+              <a:buSzPts val="900"/>
+              <a:buFont typeface="Calibri"/>
+              <a:buChar char="●"/>
+            </a:pPr>
+            <a:r>
+              <a:rPr lang="en" sz="900">
+                <a:latin typeface="Calibri"/>
+                <a:ea typeface="Calibri"/>
+                <a:cs typeface="Calibri"/>
+                <a:sym typeface="Calibri"/>
+              </a:rPr>
+              <a:t>GLM-5.3 on GB200 NVL72: 66 sessions at 101 tokens/sec each</a:t>
+            </a:r>
+            <a:endParaRPr sz="900">
+              <a:latin typeface="Calibri"/>
+              <a:ea typeface="Calibri"/>
+              <a:cs typeface="Calibri"/>
+              <a:sym typeface="Calibri"/>
+            </a:endParaRPr>
+          </a:p>
+          <a:p>
+            <a:pPr marL="171450" lvl="0" indent="-114300" algn="l" rtl="0">
+              <a:spcBef>
+                <a:spcPts val="0"/>
+              </a:spcBef>
+              <a:spcAft>
+                <a:spcPts val="0"/>
+              </a:spcAft>
+              <a:buSzPts val="900"/>
+              <a:buFont typeface="Calibri"/>
+              <a:buChar char="●"/>
+            </a:pPr>
+            <a:r>
+              <a:rPr lang="en" sz="900" u="sng">
+                <a:solidFill>
+                  <a:schemeClr val="hlink"/>
+                </a:solidFill>
+                <a:latin typeface="Calibri"/>
+                <a:ea typeface="Calibri"/>
+                <a:cs typeface="Calibri"/>
+                <a:sym typeface="Calibri"/>
+                <a:hlinkClick r:id="rId3"/>
+              </a:rPr>
+              <a:t>PrimeIntellect.ai</a:t>
+            </a:r>
+            <a:r>
+              <a:rPr lang="en" sz="900">
+                <a:latin typeface="Calibri"/>
+                <a:ea typeface="Calibri"/>
+                <a:cs typeface="Calibri"/>
+                <a:sym typeface="Calibri"/>
+              </a:rPr>
+              <a:t> is a startup from CA, since 2023</a:t>
+            </a:r>
+            <a:endParaRPr sz="900">
+              <a:latin typeface="Calibri"/>
+              <a:ea typeface="Calibri"/>
+              <a:cs typeface="Calibri"/>
+              <a:sym typeface="Calibri"/>
+            </a:endParaRPr>
+          </a:p>
+          <a:p>
+            <a:pPr marL="171450" lvl="0" indent="-114300" algn="l" rtl="0">
+              <a:spcBef>
+                <a:spcPts val="0"/>
+              </a:spcBef>
+              <a:spcAft>
+                <a:spcPts val="0"/>
+              </a:spcAft>
+              <a:buSzPts val="900"/>
+              <a:buFont typeface="Calibri"/>
+              <a:buChar char="●"/>
+            </a:pPr>
+            <a:r>
+              <a:rPr lang="en" sz="900">
+                <a:latin typeface="Calibri"/>
+                <a:ea typeface="Calibri"/>
+                <a:cs typeface="Calibri"/>
+                <a:sym typeface="Calibri"/>
+              </a:rPr>
+              <a:t>- What: The platform offers serverless endpoints and reserved capacity on Prime’s NVIDIA Blackwell GPU infrastructure.</a:t>
+            </a:r>
+            <a:endParaRPr sz="900">
+              <a:latin typeface="Calibri"/>
+              <a:ea typeface="Calibri"/>
+              <a:cs typeface="Calibri"/>
+              <a:sym typeface="Calibri"/>
+            </a:endParaRPr>
+          </a:p>
+          <a:p>
+            <a:pPr marL="171450" lvl="0" indent="-114300" algn="l" rtl="0">
+              <a:spcBef>
+                <a:spcPts val="0"/>
+              </a:spcBef>
+              <a:spcAft>
+                <a:spcPts val="0"/>
+              </a:spcAft>
+              <a:buSzPts val="900"/>
+              <a:buFont typeface="Calibri"/>
+              <a:buChar char="●"/>
+            </a:pPr>
+            <a:r>
+              <a:rPr lang="en" sz="900">
+                <a:latin typeface="Calibri"/>
+                <a:ea typeface="Calibri"/>
+                <a:cs typeface="Calibri"/>
+                <a:sym typeface="Calibri"/>
+              </a:rPr>
+              <a:t>Developers can use an OpenAI-compatible API by changing the base URL; automatic failover routes traffic across datacenters.</a:t>
+            </a:r>
+            <a:endParaRPr sz="900">
+              <a:latin typeface="Calibri"/>
+              <a:ea typeface="Calibri"/>
+              <a:cs typeface="Calibri"/>
+              <a:sym typeface="Calibri"/>
+            </a:endParaRPr>
+          </a:p>
+          <a:p>
+            <a:pPr marL="171450" lvl="0" indent="-114300" algn="l" rtl="0">
+              <a:spcBef>
+                <a:spcPts val="0"/>
+              </a:spcBef>
+              <a:spcAft>
+                <a:spcPts val="0"/>
+              </a:spcAft>
+              <a:buSzPts val="900"/>
+              <a:buFont typeface="Calibri"/>
+              <a:buChar char="●"/>
+            </a:pPr>
+            <a:r>
+              <a:rPr lang="en" sz="900">
+                <a:latin typeface="Calibri"/>
+                <a:ea typeface="Calibri"/>
+                <a:cs typeface="Calibri"/>
+                <a:sym typeface="Calibri"/>
+              </a:rPr>
+              <a:t>Long-context, multi-turn agents need responsive, dependable inference. Prime separates prefill and decode, reuses cached context, and adds safeguards to handle failures and overload.</a:t>
+            </a:r>
+            <a:endParaRPr sz="900">
+              <a:latin typeface="Calibri"/>
+              <a:ea typeface="Calibri"/>
+              <a:cs typeface="Calibri"/>
+              <a:sym typeface="Calibri"/>
+            </a:endParaRPr>
+          </a:p>
+          <a:p>
+            <a:pPr marL="171450" lvl="0" indent="-114300" algn="l" rtl="0">
+              <a:spcBef>
+                <a:spcPts val="0"/>
+              </a:spcBef>
+              <a:spcAft>
+                <a:spcPts val="0"/>
+              </a:spcAft>
+              <a:buSzPts val="900"/>
+              <a:buFont typeface="Calibri"/>
+              <a:buChar char="●"/>
+            </a:pPr>
+            <a:r>
+              <a:rPr lang="en" sz="900">
+                <a:latin typeface="Calibri"/>
+                <a:ea typeface="Calibri"/>
+                <a:cs typeface="Calibri"/>
+                <a:sym typeface="Calibri"/>
+              </a:rPr>
+              <a:t>Before public release, the service supported Prime’s reinforcement-learning and coding-agent workloads at nearly one trillion tokens daily.</a:t>
+            </a:r>
+            <a:endParaRPr sz="900">
+              <a:latin typeface="Calibri"/>
+              <a:ea typeface="Calibri"/>
+              <a:cs typeface="Calibri"/>
+              <a:sym typeface="Calibri"/>
+            </a:endParaRPr>
+          </a:p>
+          <a:p>
+            <a:pPr marL="171450" lvl="0" indent="-114300" algn="l" rtl="0">
+              <a:spcBef>
+                <a:spcPts val="0"/>
+              </a:spcBef>
+              <a:spcAft>
+                <a:spcPts val="0"/>
+              </a:spcAft>
+              <a:buSzPts val="900"/>
+              <a:buFont typeface="Calibri"/>
+              <a:buChar char="●"/>
+            </a:pPr>
+            <a:r>
+              <a:rPr lang="en" sz="900">
+                <a:latin typeface="Calibri"/>
+                <a:ea typeface="Calibri"/>
+                <a:cs typeface="Calibri"/>
+                <a:sym typeface="Calibri"/>
+              </a:rPr>
+              <a:t>Prime reports GLM-5.3 serving 66 concurrent sessions at 101 tokens per second per user on GB200 NVL72.</a:t>
+            </a:r>
+            <a:endParaRPr sz="900">
+              <a:latin typeface="Calibri"/>
+              <a:ea typeface="Calibri"/>
+              <a:cs typeface="Calibri"/>
+              <a:sym typeface="Calibri"/>
+            </a:endParaRPr>
+          </a:p>
+          <a:p>
+            <a:pPr marL="171450" lvl="0" indent="-114300" algn="l" rtl="0">
+              <a:spcBef>
+                <a:spcPts val="0"/>
+              </a:spcBef>
+              <a:spcAft>
+                <a:spcPts val="0"/>
+              </a:spcAft>
+              <a:buSzPts val="900"/>
+              <a:buFont typeface="Calibri"/>
+              <a:buChar char="●"/>
+            </a:pPr>
+            <a:r>
+              <a:rPr lang="en" sz="900">
+                <a:latin typeface="Calibri"/>
+                <a:ea typeface="Calibri"/>
+                <a:cs typeface="Calibri"/>
+                <a:sym typeface="Calibri"/>
+              </a:rPr>
+              <a:t>The launch makes Prime’s production-scale open-model serving available to external developers and customers.</a:t>
+            </a:r>
+            <a:endParaRPr sz="900">
+              <a:latin typeface="Calibri"/>
+              <a:ea typeface="Calibri"/>
+              <a:cs typeface="Calibri"/>
+              <a:sym typeface="Calibri"/>
+            </a:endParaRPr>
+          </a:p>
+          <a:p>
+            <a:pPr marL="171450" lvl="0" indent="-114300" algn="l" rtl="0">
+              <a:spcBef>
+                <a:spcPts val="0"/>
+              </a:spcBef>
+              <a:spcAft>
+                <a:spcPts val="0"/>
+              </a:spcAft>
+              <a:buSzPts val="900"/>
+              <a:buFont typeface="Calibri"/>
+              <a:buChar char="●"/>
+            </a:pPr>
+            <a:r>
+              <a:rPr lang="en" sz="900" u="sng">
+                <a:solidFill>
+                  <a:srgbClr val="0563C1"/>
+                </a:solidFill>
+                <a:latin typeface="Calibri"/>
+                <a:ea typeface="Calibri"/>
+                <a:cs typeface="Calibri"/>
+                <a:sym typeface="Calibri"/>
+                <a:hlinkClick r:id="rId4">
+                  <a:extLst>
+                    <a:ext uri="{A12FA001-AC4F-418D-AE19-62706E023703}">
+                      <ahyp:hlinkClr xmlns:ahyp="http://schemas.microsoft.com/office/drawing/2018/hyperlinkcolor" val="tx"/>
+                    </a:ext>
+                  </a:extLst>
+                </a:hlinkClick>
+              </a:rPr>
+              <a:t>https://www.primeintellect.ai/blog/prime-inference</a:t>
+            </a:r>
+            <a:endParaRPr sz="900">
+              <a:solidFill>
+                <a:srgbClr val="0563C1"/>
+              </a:solidFill>
+              <a:latin typeface="Calibri"/>
+              <a:ea typeface="Calibri"/>
+              <a:cs typeface="Calibri"/>
+              <a:sym typeface="Calibri"/>
+            </a:endParaRPr>
+          </a:p>
+        </p:txBody>
+      </p:sp>
+      <p:sp>
+        <p:nvSpPr>
+          <p:cNvPr id="301" name="Google Shape;301;p42"/>
+          <p:cNvSpPr txBox="1"/>
+          <p:nvPr/>
+        </p:nvSpPr>
+        <p:spPr>
+          <a:xfrm>
+            <a:off x="60825" y="2288300"/>
+            <a:ext cx="4667400" cy="1126800"/>
+          </a:xfrm>
+          <a:prstGeom prst="rect">
+            <a:avLst/>
+          </a:prstGeom>
+          <a:noFill/>
+          <a:ln w="9525" cap="flat" cmpd="sng">
+            <a:solidFill>
+              <a:srgbClr val="FF0000"/>
+            </a:solidFill>
+            <a:prstDash val="solid"/>
+            <a:round/>
+            <a:headEnd type="none" w="sm" len="sm"/>
+            <a:tailEnd type="none" w="sm" len="sm"/>
+          </a:ln>
+        </p:spPr>
+        <p:txBody>
+          <a:bodyPr spcFirstLastPara="1" wrap="square" lIns="9125" tIns="9125" rIns="9125" bIns="9125" anchor="t" anchorCtr="0">
+            <a:spAutoFit/>
+          </a:bodyPr>
+          <a:lstStyle/>
+          <a:p>
+            <a:pPr marL="171450" lvl="0" indent="-173736" algn="l" rtl="0">
+              <a:spcBef>
+                <a:spcPts val="0"/>
+              </a:spcBef>
+              <a:spcAft>
+                <a:spcPts val="0"/>
+              </a:spcAft>
+              <a:buClr>
+                <a:srgbClr val="FF0000"/>
+              </a:buClr>
+              <a:buSzPts val="900"/>
+              <a:buFont typeface="Calibri"/>
+              <a:buChar char="●"/>
+            </a:pPr>
+            <a:r>
+              <a:rPr lang="en" sz="900" b="1">
+                <a:solidFill>
+                  <a:srgbClr val="FF0000"/>
+                </a:solidFill>
+                <a:latin typeface="Calibri"/>
+                <a:ea typeface="Calibri"/>
+                <a:cs typeface="Calibri"/>
+                <a:sym typeface="Calibri"/>
+              </a:rPr>
+              <a:t>OpenAI safety report lead quits, calls the culture broken</a:t>
+            </a:r>
+            <a:endParaRPr sz="900" b="1">
+              <a:solidFill>
+                <a:srgbClr val="FF0000"/>
+              </a:solidFill>
+              <a:latin typeface="Calibri"/>
+              <a:ea typeface="Calibri"/>
+              <a:cs typeface="Calibri"/>
+              <a:sym typeface="Calibri"/>
+            </a:endParaRPr>
+          </a:p>
+          <a:p>
+            <a:pPr marL="171450" lvl="0" indent="-173736" algn="l" rtl="0">
+              <a:spcBef>
+                <a:spcPts val="0"/>
+              </a:spcBef>
+              <a:spcAft>
+                <a:spcPts val="0"/>
+              </a:spcAft>
+              <a:buSzPts val="900"/>
+              <a:buFont typeface="Calibri"/>
+              <a:buChar char="●"/>
+            </a:pPr>
+            <a:r>
+              <a:rPr lang="en" sz="900">
+                <a:latin typeface="Calibri"/>
+                <a:ea typeface="Calibri"/>
+                <a:cs typeface="Calibri"/>
+                <a:sym typeface="Calibri"/>
+              </a:rPr>
+              <a:t>David Robinson, </a:t>
+            </a:r>
+            <a:r>
+              <a:rPr lang="en" sz="900">
+                <a:highlight>
+                  <a:srgbClr val="FFF2CC"/>
+                </a:highlight>
+                <a:latin typeface="Calibri"/>
+                <a:ea typeface="Calibri"/>
+                <a:cs typeface="Calibri"/>
+                <a:sym typeface="Calibri"/>
+              </a:rPr>
+              <a:t>3.5 years</a:t>
+            </a:r>
+            <a:r>
+              <a:rPr lang="en" sz="900">
+                <a:latin typeface="Calibri"/>
+                <a:ea typeface="Calibri"/>
+                <a:cs typeface="Calibri"/>
+                <a:sym typeface="Calibri"/>
+              </a:rPr>
+              <a:t> at OpenAI, wrote up his exit in The Atlantic</a:t>
+            </a:r>
+            <a:endParaRPr sz="900">
+              <a:latin typeface="Calibri"/>
+              <a:ea typeface="Calibri"/>
+              <a:cs typeface="Calibri"/>
+              <a:sym typeface="Calibri"/>
+            </a:endParaRPr>
+          </a:p>
+          <a:p>
+            <a:pPr marL="171450" lvl="0" indent="-173736" algn="l" rtl="0">
+              <a:spcBef>
+                <a:spcPts val="0"/>
+              </a:spcBef>
+              <a:spcAft>
+                <a:spcPts val="0"/>
+              </a:spcAft>
+              <a:buSzPts val="900"/>
+              <a:buFont typeface="Calibri"/>
+              <a:buChar char="●"/>
+            </a:pPr>
+            <a:r>
+              <a:rPr lang="en" sz="900">
+                <a:latin typeface="Calibri"/>
+                <a:ea typeface="Calibri"/>
+                <a:cs typeface="Calibri"/>
+                <a:sym typeface="Calibri"/>
+              </a:rPr>
+              <a:t>He oversaw safety reports for </a:t>
+            </a:r>
+            <a:r>
+              <a:rPr lang="en" sz="900" b="1">
+                <a:latin typeface="Calibri"/>
+                <a:ea typeface="Calibri"/>
+                <a:cs typeface="Calibri"/>
+                <a:sym typeface="Calibri"/>
+              </a:rPr>
+              <a:t>12 frontier launches</a:t>
+            </a:r>
+            <a:r>
+              <a:rPr lang="en" sz="900">
+                <a:latin typeface="Calibri"/>
+                <a:ea typeface="Calibri"/>
+                <a:cs typeface="Calibri"/>
+                <a:sym typeface="Calibri"/>
+              </a:rPr>
+              <a:t> and drafted the Preparedness Framework</a:t>
+            </a:r>
+            <a:endParaRPr sz="900">
+              <a:latin typeface="Calibri"/>
+              <a:ea typeface="Calibri"/>
+              <a:cs typeface="Calibri"/>
+              <a:sym typeface="Calibri"/>
+            </a:endParaRPr>
+          </a:p>
+          <a:p>
+            <a:pPr marL="171450" lvl="0" indent="-173736" algn="l" rtl="0">
+              <a:spcBef>
+                <a:spcPts val="0"/>
+              </a:spcBef>
+              <a:spcAft>
+                <a:spcPts val="0"/>
+              </a:spcAft>
+              <a:buSzPts val="900"/>
+              <a:buFont typeface="Calibri"/>
+              <a:buChar char="●"/>
+            </a:pPr>
+            <a:r>
+              <a:rPr lang="en" sz="900">
+                <a:latin typeface="Calibri"/>
+                <a:ea typeface="Calibri"/>
+                <a:cs typeface="Calibri"/>
+                <a:sym typeface="Calibri"/>
+              </a:rPr>
+              <a:t>"The time for trial and error is over"</a:t>
+            </a:r>
+            <a:endParaRPr sz="900">
+              <a:latin typeface="Calibri"/>
+              <a:ea typeface="Calibri"/>
+              <a:cs typeface="Calibri"/>
+              <a:sym typeface="Calibri"/>
+            </a:endParaRPr>
+          </a:p>
+          <a:p>
+            <a:pPr marL="171450" lvl="0" indent="-173736" algn="l" rtl="0">
+              <a:spcBef>
+                <a:spcPts val="0"/>
+              </a:spcBef>
+              <a:spcAft>
+                <a:spcPts val="0"/>
+              </a:spcAft>
+              <a:buSzPts val="900"/>
+              <a:buFont typeface="Calibri"/>
+              <a:buChar char="●"/>
+            </a:pPr>
+            <a:r>
+              <a:rPr lang="en" sz="900">
+                <a:latin typeface="Calibri"/>
+                <a:ea typeface="Calibri"/>
+                <a:cs typeface="Calibri"/>
+                <a:sym typeface="Calibri"/>
+              </a:rPr>
+              <a:t>Wants labs run like nuclear plants or airports, with layers of redundancy</a:t>
+            </a:r>
+            <a:endParaRPr sz="900">
+              <a:latin typeface="Calibri"/>
+              <a:ea typeface="Calibri"/>
+              <a:cs typeface="Calibri"/>
+              <a:sym typeface="Calibri"/>
+            </a:endParaRPr>
+          </a:p>
+          <a:p>
+            <a:pPr marL="171450" lvl="0" indent="-173736" algn="l" rtl="0">
+              <a:spcBef>
+                <a:spcPts val="0"/>
+              </a:spcBef>
+              <a:spcAft>
+                <a:spcPts val="0"/>
+              </a:spcAft>
+              <a:buSzPts val="900"/>
+              <a:buFont typeface="Calibri"/>
+              <a:buChar char="●"/>
+            </a:pPr>
+            <a:r>
+              <a:rPr lang="en" sz="900">
+                <a:latin typeface="Calibri"/>
+                <a:ea typeface="Calibri"/>
+                <a:cs typeface="Calibri"/>
+                <a:sym typeface="Calibri"/>
+              </a:rPr>
+              <a:t>Says the team was too busy sprinting to make big changes</a:t>
+            </a:r>
+            <a:endParaRPr sz="900">
+              <a:latin typeface="Calibri"/>
+              <a:ea typeface="Calibri"/>
+              <a:cs typeface="Calibri"/>
+              <a:sym typeface="Calibri"/>
+            </a:endParaRPr>
+          </a:p>
+          <a:p>
+            <a:pPr marL="171450" lvl="0" indent="-173736" algn="l" rtl="0">
+              <a:spcBef>
+                <a:spcPts val="0"/>
+              </a:spcBef>
+              <a:spcAft>
+                <a:spcPts val="0"/>
+              </a:spcAft>
+              <a:buSzPts val="900"/>
+              <a:buFont typeface="Calibri"/>
+              <a:buChar char="●"/>
+            </a:pPr>
+            <a:r>
+              <a:rPr lang="en" sz="900">
+                <a:latin typeface="Calibri"/>
+                <a:ea typeface="Calibri"/>
+                <a:cs typeface="Calibri"/>
+                <a:sym typeface="Calibri"/>
+              </a:rPr>
+              <a:t>Follows the firing of three safety researchers over alleged leaks</a:t>
+            </a:r>
+            <a:endParaRPr sz="900">
+              <a:latin typeface="Calibri"/>
+              <a:ea typeface="Calibri"/>
+              <a:cs typeface="Calibri"/>
+              <a:sym typeface="Calibri"/>
+            </a:endParaRPr>
+          </a:p>
+          <a:p>
+            <a:pPr marL="171450" lvl="0" indent="-173736" algn="l" rtl="0">
+              <a:spcBef>
+                <a:spcPts val="0"/>
+              </a:spcBef>
+              <a:spcAft>
+                <a:spcPts val="0"/>
+              </a:spcAft>
+              <a:buSzPts val="900"/>
+              <a:buFont typeface="Calibri"/>
+              <a:buChar char="●"/>
+            </a:pPr>
+            <a:r>
+              <a:rPr lang="en" sz="900" u="sng">
+                <a:solidFill>
+                  <a:srgbClr val="0563C1"/>
+                </a:solidFill>
+                <a:latin typeface="Calibri"/>
+                <a:ea typeface="Calibri"/>
+                <a:cs typeface="Calibri"/>
+                <a:sym typeface="Calibri"/>
+                <a:hlinkClick r:id="rId5">
+                  <a:extLst>
+                    <a:ext uri="{A12FA001-AC4F-418D-AE19-62706E023703}">
+                      <ahyp:hlinkClr xmlns:ahyp="http://schemas.microsoft.com/office/drawing/2018/hyperlinkcolor" val="tx"/>
+                    </a:ext>
+                  </a:extLst>
+                </a:hlinkClick>
+              </a:rPr>
+              <a:t>https://www.calcalistech.com/ctechnews/article/zienaylz5</a:t>
+            </a:r>
+            <a:endParaRPr sz="900">
+              <a:solidFill>
+                <a:srgbClr val="0563C1"/>
+              </a:solidFill>
+              <a:latin typeface="Calibri"/>
+              <a:ea typeface="Calibri"/>
+              <a:cs typeface="Calibri"/>
+              <a:sym typeface="Calibri"/>
+            </a:endParaRPr>
+          </a:p>
+        </p:txBody>
+      </p:sp>
+      <p:sp>
+        <p:nvSpPr>
+          <p:cNvPr id="302" name="Google Shape;302;p42"/>
+          <p:cNvSpPr txBox="1"/>
+          <p:nvPr/>
+        </p:nvSpPr>
+        <p:spPr>
+          <a:xfrm>
+            <a:off x="60825" y="3512450"/>
+            <a:ext cx="4076400" cy="988200"/>
+          </a:xfrm>
+          <a:prstGeom prst="rect">
+            <a:avLst/>
+          </a:prstGeom>
+          <a:noFill/>
+          <a:ln w="9525" cap="flat" cmpd="sng">
+            <a:solidFill>
+              <a:srgbClr val="FF0000"/>
+            </a:solidFill>
+            <a:prstDash val="solid"/>
+            <a:round/>
+            <a:headEnd type="none" w="sm" len="sm"/>
+            <a:tailEnd type="none" w="sm" len="sm"/>
+          </a:ln>
+        </p:spPr>
+        <p:txBody>
+          <a:bodyPr spcFirstLastPara="1" wrap="square" lIns="9125" tIns="9125" rIns="9125" bIns="9125" anchor="t" anchorCtr="0">
+            <a:spAutoFit/>
+          </a:bodyPr>
+          <a:lstStyle/>
+          <a:p>
+            <a:pPr marL="171450" lvl="0" indent="-173736" algn="l" rtl="0">
+              <a:spcBef>
+                <a:spcPts val="0"/>
+              </a:spcBef>
+              <a:spcAft>
+                <a:spcPts val="0"/>
+              </a:spcAft>
+              <a:buClr>
+                <a:srgbClr val="FF0000"/>
+              </a:buClr>
+              <a:buSzPts val="900"/>
+              <a:buFont typeface="Calibri"/>
+              <a:buChar char="●"/>
+            </a:pPr>
+            <a:r>
+              <a:rPr lang="en" sz="900" b="1">
+                <a:solidFill>
+                  <a:srgbClr val="FF0000"/>
+                </a:solidFill>
+                <a:latin typeface="Calibri"/>
+                <a:ea typeface="Calibri"/>
+                <a:cs typeface="Calibri"/>
+                <a:sym typeface="Calibri"/>
+              </a:rPr>
+              <a:t>Apple will tighten Full Disk Access on Macs because of AI agents</a:t>
+            </a:r>
+            <a:endParaRPr sz="900" b="1">
+              <a:solidFill>
+                <a:srgbClr val="FF0000"/>
+              </a:solidFill>
+              <a:latin typeface="Calibri"/>
+              <a:ea typeface="Calibri"/>
+              <a:cs typeface="Calibri"/>
+              <a:sym typeface="Calibri"/>
+            </a:endParaRPr>
+          </a:p>
+          <a:p>
+            <a:pPr marL="171450" lvl="0" indent="-173736" algn="l" rtl="0">
+              <a:spcBef>
+                <a:spcPts val="0"/>
+              </a:spcBef>
+              <a:spcAft>
+                <a:spcPts val="0"/>
+              </a:spcAft>
+              <a:buSzPts val="900"/>
+              <a:buFont typeface="Calibri"/>
+              <a:buChar char="●"/>
+            </a:pPr>
+            <a:r>
+              <a:rPr lang="en" sz="900">
+                <a:latin typeface="Calibri"/>
+                <a:ea typeface="Calibri"/>
+                <a:cs typeface="Calibri"/>
+                <a:sym typeface="Calibri"/>
+              </a:rPr>
+              <a:t>Full Disk Access lets an app read all files, Mail, Messages and Safari history</a:t>
+            </a:r>
+            <a:endParaRPr sz="900">
+              <a:latin typeface="Calibri"/>
+              <a:ea typeface="Calibri"/>
+              <a:cs typeface="Calibri"/>
+              <a:sym typeface="Calibri"/>
+            </a:endParaRPr>
+          </a:p>
+          <a:p>
+            <a:pPr marL="171450" lvl="0" indent="-173736" algn="l" rtl="0">
+              <a:spcBef>
+                <a:spcPts val="0"/>
+              </a:spcBef>
+              <a:spcAft>
+                <a:spcPts val="0"/>
+              </a:spcAft>
+              <a:buSzPts val="900"/>
+              <a:buFont typeface="Calibri"/>
+              <a:buChar char="●"/>
+            </a:pPr>
+            <a:r>
+              <a:rPr lang="en" sz="900">
+                <a:latin typeface="Calibri"/>
+                <a:ea typeface="Calibri"/>
+                <a:cs typeface="Calibri"/>
+                <a:sym typeface="Calibri"/>
+              </a:rPr>
+              <a:t>Apple says agents that act across the Mac make that risk grow</a:t>
+            </a:r>
+            <a:endParaRPr sz="900">
+              <a:latin typeface="Calibri"/>
+              <a:ea typeface="Calibri"/>
+              <a:cs typeface="Calibri"/>
+              <a:sym typeface="Calibri"/>
+            </a:endParaRPr>
+          </a:p>
+          <a:p>
+            <a:pPr marL="171450" lvl="0" indent="-173736" algn="l" rtl="0">
+              <a:spcBef>
+                <a:spcPts val="0"/>
+              </a:spcBef>
+              <a:spcAft>
+                <a:spcPts val="0"/>
+              </a:spcAft>
+              <a:buSzPts val="900"/>
+              <a:buFont typeface="Calibri"/>
+              <a:buChar char="●"/>
+            </a:pPr>
+            <a:r>
+              <a:rPr lang="en" sz="900">
+                <a:latin typeface="Calibri"/>
+                <a:ea typeface="Calibri"/>
+                <a:cs typeface="Calibri"/>
+                <a:sym typeface="Calibri"/>
+              </a:rPr>
+              <a:t>Future macOS will grant it only with a </a:t>
+            </a:r>
+            <a:r>
+              <a:rPr lang="en" sz="900" b="1">
+                <a:latin typeface="Calibri"/>
+                <a:ea typeface="Calibri"/>
+                <a:cs typeface="Calibri"/>
+                <a:sym typeface="Calibri"/>
+              </a:rPr>
+              <a:t>very explicit user action</a:t>
+            </a:r>
+            <a:endParaRPr sz="900" b="1">
+              <a:latin typeface="Calibri"/>
+              <a:ea typeface="Calibri"/>
+              <a:cs typeface="Calibri"/>
+              <a:sym typeface="Calibri"/>
+            </a:endParaRPr>
+          </a:p>
+          <a:p>
+            <a:pPr marL="171450" lvl="0" indent="-173736" algn="l" rtl="0">
+              <a:spcBef>
+                <a:spcPts val="0"/>
+              </a:spcBef>
+              <a:spcAft>
+                <a:spcPts val="0"/>
+              </a:spcAft>
+              <a:buSzPts val="900"/>
+              <a:buFont typeface="Calibri"/>
+              <a:buChar char="●"/>
+            </a:pPr>
+            <a:r>
+              <a:rPr lang="en" sz="900">
+                <a:latin typeface="Calibri"/>
+                <a:ea typeface="Calibri"/>
+                <a:cs typeface="Calibri"/>
+                <a:sym typeface="Calibri"/>
+              </a:rPr>
+              <a:t>Some developers ask for it in ways users do not understand, Apple says</a:t>
+            </a:r>
+            <a:endParaRPr sz="900">
+              <a:latin typeface="Calibri"/>
+              <a:ea typeface="Calibri"/>
+              <a:cs typeface="Calibri"/>
+              <a:sym typeface="Calibri"/>
+            </a:endParaRPr>
+          </a:p>
+          <a:p>
+            <a:pPr marL="171450" lvl="0" indent="-173736" algn="l" rtl="0">
+              <a:spcBef>
+                <a:spcPts val="0"/>
+              </a:spcBef>
+              <a:spcAft>
+                <a:spcPts val="0"/>
+              </a:spcAft>
+              <a:buSzPts val="900"/>
+              <a:buFont typeface="Calibri"/>
+              <a:buChar char="●"/>
+            </a:pPr>
+            <a:r>
+              <a:rPr lang="en" sz="900">
+                <a:latin typeface="Calibri"/>
+                <a:ea typeface="Calibri"/>
+                <a:cs typeface="Calibri"/>
+                <a:sym typeface="Calibri"/>
+              </a:rPr>
+              <a:t>No release date yet</a:t>
+            </a:r>
+            <a:endParaRPr sz="900">
+              <a:latin typeface="Calibri"/>
+              <a:ea typeface="Calibri"/>
+              <a:cs typeface="Calibri"/>
+              <a:sym typeface="Calibri"/>
+            </a:endParaRPr>
+          </a:p>
+          <a:p>
+            <a:pPr marL="171450" lvl="0" indent="-173736" algn="l" rtl="0">
+              <a:spcBef>
+                <a:spcPts val="0"/>
+              </a:spcBef>
+              <a:spcAft>
+                <a:spcPts val="0"/>
+              </a:spcAft>
+              <a:buSzPts val="900"/>
+              <a:buFont typeface="Calibri"/>
+              <a:buChar char="●"/>
+            </a:pPr>
+            <a:r>
+              <a:rPr lang="en" sz="900" u="sng">
+                <a:solidFill>
+                  <a:srgbClr val="0563C1"/>
+                </a:solidFill>
+                <a:latin typeface="Calibri"/>
+                <a:ea typeface="Calibri"/>
+                <a:cs typeface="Calibri"/>
+                <a:sym typeface="Calibri"/>
+                <a:hlinkClick r:id="rId6">
+                  <a:extLst>
+                    <a:ext uri="{A12FA001-AC4F-418D-AE19-62706E023703}">
+                      <ahyp:hlinkClr xmlns:ahyp="http://schemas.microsoft.com/office/drawing/2018/hyperlinkcolor" val="tx"/>
+                    </a:ext>
+                  </a:extLst>
+                </a:hlinkClick>
+              </a:rPr>
+              <a:t>https://thehackernews.com/2026/10/apple-plans-tighter-macos-full-disk.html</a:t>
+            </a:r>
+            <a:endParaRPr sz="900">
+              <a:solidFill>
+                <a:srgbClr val="0563C1"/>
+              </a:solidFill>
+              <a:latin typeface="Calibri"/>
+              <a:ea typeface="Calibri"/>
+              <a:cs typeface="Calibri"/>
+              <a:sym typeface="Calibri"/>
+            </a:endParaRPr>
+          </a:p>
+        </p:txBody>
+      </p:sp>
+    </p:spTree>
+  </p:cSld>
+  <p:clrMapOvr>
+    <a:masterClrMapping/>
+  </p:clrMapOvr>
+</p:sld>
+</file>
+
+<file path=ppt/slides/slide31.xml><?xml version="1.0" encoding="utf-8"?>
+<p:sld xmlns:a="http://schemas.openxmlformats.org/drawingml/2006/main" xmlns:r="http://schemas.openxmlformats.org/officeDocument/2006/relationships" xmlns:p="http://schemas.openxmlformats.org/presentationml/2006/main">
+  <p:cSld>
+    <p:spTree>
+      <p:nvGrpSpPr>
+        <p:cNvPr id="1" name="Shape 306"/>
+        <p:cNvGrpSpPr/>
+        <p:nvPr/>
+      </p:nvGrpSpPr>
+      <p:grpSpPr>
+        <a:xfrm>
+          <a:off x="0" y="0"/>
+          <a:ext cx="0" cy="0"/>
+          <a:chOff x="0" y="0"/>
+          <a:chExt cx="0" cy="0"/>
+        </a:xfrm>
+      </p:grpSpPr>
+      <p:sp>
+        <p:nvSpPr>
+          <p:cNvPr id="307" name="Google Shape;307;p43"/>
+          <p:cNvSpPr txBox="1"/>
+          <p:nvPr/>
+        </p:nvSpPr>
+        <p:spPr>
+          <a:xfrm>
+            <a:off x="36576" y="-27432"/>
+            <a:ext cx="1859100" cy="384000"/>
+          </a:xfrm>
+          <a:prstGeom prst="rect">
+            <a:avLst/>
+          </a:prstGeom>
+          <a:noFill/>
+          <a:ln>
+            <a:noFill/>
+          </a:ln>
+        </p:spPr>
+        <p:txBody>
+          <a:bodyPr spcFirstLastPara="1" wrap="square" lIns="91425" tIns="91425" rIns="91425" bIns="91425" anchor="t" anchorCtr="0">
+            <a:noAutofit/>
+          </a:bodyPr>
+          <a:lstStyle/>
+          <a:p>
+            <a:pPr marL="0" lvl="0" indent="0" algn="l" rtl="0">
+              <a:spcBef>
+                <a:spcPts val="0"/>
+              </a:spcBef>
+              <a:spcAft>
+                <a:spcPts val="0"/>
+              </a:spcAft>
+              <a:buNone/>
+            </a:pPr>
+            <a:r>
+              <a:rPr lang="en" sz="2000" b="1">
+                <a:latin typeface="Calibri"/>
+                <a:ea typeface="Calibri"/>
+                <a:cs typeface="Calibri"/>
+                <a:sym typeface="Calibri"/>
+              </a:rPr>
+              <a:t>Parked topics</a:t>
+            </a:r>
+            <a:endParaRPr sz="2000" b="1">
+              <a:latin typeface="Calibri"/>
+              <a:ea typeface="Calibri"/>
+              <a:cs typeface="Calibri"/>
+              <a:sym typeface="Calibri"/>
+            </a:endParaRPr>
+          </a:p>
+        </p:txBody>
+      </p:sp>
+      <p:sp>
+        <p:nvSpPr>
+          <p:cNvPr id="308" name="Google Shape;308;p43"/>
           <p:cNvSpPr txBox="1"/>
           <p:nvPr/>
         </p:nvSpPr>
@@ -42079,7 +43154,7 @@
       </p:sp>
       <p:sp>
         <p:nvSpPr>
-          <p:cNvPr id="300" name="Google Shape;300;p42"/>
+          <p:cNvPr id="309" name="Google Shape;309;p43"/>
           <p:cNvSpPr txBox="1"/>
           <p:nvPr/>
         </p:nvSpPr>
@@ -42368,7 +43443,7 @@
       </p:sp>
       <p:sp>
         <p:nvSpPr>
-          <p:cNvPr id="301" name="Google Shape;301;p42"/>
+          <p:cNvPr id="310" name="Google Shape;310;p43"/>
           <p:cNvSpPr txBox="1"/>
           <p:nvPr/>
         </p:nvSpPr>
@@ -42657,6 +43732,1814 @@
                 <a:hlinkClick r:id="rId5"/>
               </a:rPr>
               <a:t>https://www.actuia.com/en/news/openai-will-watermark-chatgpt-in-the-eu-but-leaves-the-api-opt-in/</a:t>
+            </a:r>
+            <a:r>
+              <a:rPr lang="en" sz="900">
+                <a:solidFill>
+                  <a:srgbClr val="0563C1"/>
+                </a:solidFill>
+                <a:latin typeface="Calibri"/>
+                <a:ea typeface="Calibri"/>
+                <a:cs typeface="Calibri"/>
+                <a:sym typeface="Calibri"/>
+              </a:rPr>
+              <a:t> </a:t>
+            </a:r>
+            <a:endParaRPr sz="900">
+              <a:solidFill>
+                <a:srgbClr val="0563C1"/>
+              </a:solidFill>
+              <a:latin typeface="Calibri"/>
+              <a:ea typeface="Calibri"/>
+              <a:cs typeface="Calibri"/>
+              <a:sym typeface="Calibri"/>
+            </a:endParaRPr>
+          </a:p>
+        </p:txBody>
+      </p:sp>
+    </p:spTree>
+  </p:cSld>
+  <p:clrMapOvr>
+    <a:masterClrMapping/>
+  </p:clrMapOvr>
+</p:sld>
+</file>
+
+<file path=ppt/slides/slide32.xml><?xml version="1.0" encoding="utf-8"?>
+<p:sld xmlns:a="http://schemas.openxmlformats.org/drawingml/2006/main" xmlns:r="http://schemas.openxmlformats.org/officeDocument/2006/relationships" xmlns:p="http://schemas.openxmlformats.org/presentationml/2006/main">
+  <p:cSld>
+    <p:spTree>
+      <p:nvGrpSpPr>
+        <p:cNvPr id="1" name="Shape 314"/>
+        <p:cNvGrpSpPr/>
+        <p:nvPr/>
+      </p:nvGrpSpPr>
+      <p:grpSpPr>
+        <a:xfrm>
+          <a:off x="0" y="0"/>
+          <a:ext cx="0" cy="0"/>
+          <a:chOff x="0" y="0"/>
+          <a:chExt cx="0" cy="0"/>
+        </a:xfrm>
+      </p:grpSpPr>
+      <p:sp>
+        <p:nvSpPr>
+          <p:cNvPr id="315" name="Google Shape;315;p44"/>
+          <p:cNvSpPr txBox="1"/>
+          <p:nvPr/>
+        </p:nvSpPr>
+        <p:spPr>
+          <a:xfrm>
+            <a:off x="36576" y="-27432"/>
+            <a:ext cx="1859100" cy="384000"/>
+          </a:xfrm>
+          <a:prstGeom prst="rect">
+            <a:avLst/>
+          </a:prstGeom>
+          <a:noFill/>
+          <a:ln>
+            <a:noFill/>
+          </a:ln>
+        </p:spPr>
+        <p:txBody>
+          <a:bodyPr spcFirstLastPara="1" wrap="square" lIns="91425" tIns="91425" rIns="91425" bIns="91425" anchor="t" anchorCtr="0">
+            <a:noAutofit/>
+          </a:bodyPr>
+          <a:lstStyle/>
+          <a:p>
+            <a:pPr marL="0" lvl="0" indent="0" algn="l" rtl="0">
+              <a:spcBef>
+                <a:spcPts val="0"/>
+              </a:spcBef>
+              <a:spcAft>
+                <a:spcPts val="0"/>
+              </a:spcAft>
+              <a:buNone/>
+            </a:pPr>
+            <a:r>
+              <a:rPr lang="en" sz="2000" b="1">
+                <a:latin typeface="Calibri"/>
+                <a:ea typeface="Calibri"/>
+                <a:cs typeface="Calibri"/>
+                <a:sym typeface="Calibri"/>
+              </a:rPr>
+              <a:t>Parked topics</a:t>
+            </a:r>
+            <a:endParaRPr sz="2000" b="1">
+              <a:latin typeface="Calibri"/>
+              <a:ea typeface="Calibri"/>
+              <a:cs typeface="Calibri"/>
+              <a:sym typeface="Calibri"/>
+            </a:endParaRPr>
+          </a:p>
+        </p:txBody>
+      </p:sp>
+      <p:sp>
+        <p:nvSpPr>
+          <p:cNvPr id="316" name="Google Shape;316;p44"/>
+          <p:cNvSpPr txBox="1"/>
+          <p:nvPr/>
+        </p:nvSpPr>
+        <p:spPr>
+          <a:xfrm>
+            <a:off x="36575" y="385700"/>
+            <a:ext cx="4764000" cy="1265100"/>
+          </a:xfrm>
+          <a:prstGeom prst="rect">
+            <a:avLst/>
+          </a:prstGeom>
+          <a:noFill/>
+          <a:ln w="9525" cap="flat" cmpd="sng">
+            <a:solidFill>
+              <a:srgbClr val="FF0000"/>
+            </a:solidFill>
+            <a:prstDash val="solid"/>
+            <a:round/>
+            <a:headEnd type="none" w="sm" len="sm"/>
+            <a:tailEnd type="none" w="sm" len="sm"/>
+          </a:ln>
+        </p:spPr>
+        <p:txBody>
+          <a:bodyPr spcFirstLastPara="1" wrap="square" lIns="9125" tIns="9125" rIns="9125" bIns="9125" anchor="t" anchorCtr="0">
+            <a:spAutoFit/>
+          </a:bodyPr>
+          <a:lstStyle/>
+          <a:p>
+            <a:pPr marL="171450" lvl="0" indent="-114300" algn="l" rtl="0">
+              <a:spcBef>
+                <a:spcPts val="0"/>
+              </a:spcBef>
+              <a:spcAft>
+                <a:spcPts val="0"/>
+              </a:spcAft>
+              <a:buClr>
+                <a:srgbClr val="FF0000"/>
+              </a:buClr>
+              <a:buSzPts val="900"/>
+              <a:buFont typeface="Calibri"/>
+              <a:buChar char="●"/>
+            </a:pPr>
+            <a:r>
+              <a:rPr lang="en" sz="900" b="1">
+                <a:solidFill>
+                  <a:srgbClr val="FF0000"/>
+                </a:solidFill>
+                <a:latin typeface="Calibri"/>
+                <a:ea typeface="Calibri"/>
+                <a:cs typeface="Calibri"/>
+                <a:sym typeface="Calibri"/>
+              </a:rPr>
+              <a:t>Google Gemini 4 Argon: 1M output tokens, cyber defenders first</a:t>
+            </a:r>
+            <a:endParaRPr sz="900" b="1">
+              <a:solidFill>
+                <a:srgbClr val="FF0000"/>
+              </a:solidFill>
+              <a:latin typeface="Calibri"/>
+              <a:ea typeface="Calibri"/>
+              <a:cs typeface="Calibri"/>
+              <a:sym typeface="Calibri"/>
+            </a:endParaRPr>
+          </a:p>
+          <a:p>
+            <a:pPr marL="171450" lvl="0" indent="-114300" algn="l" rtl="0">
+              <a:spcBef>
+                <a:spcPts val="0"/>
+              </a:spcBef>
+              <a:spcAft>
+                <a:spcPts val="0"/>
+              </a:spcAft>
+              <a:buSzPts val="900"/>
+              <a:buFont typeface="Calibri"/>
+              <a:buChar char="●"/>
+            </a:pPr>
+            <a:r>
+              <a:rPr lang="en" sz="900">
+                <a:latin typeface="Calibri"/>
+                <a:ea typeface="Calibri"/>
+                <a:cs typeface="Calibri"/>
+                <a:sym typeface="Calibri"/>
+              </a:rPr>
+              <a:t>First Google frontier model since Gemini 3.1 Pro</a:t>
+            </a:r>
+            <a:endParaRPr sz="900">
+              <a:latin typeface="Calibri"/>
+              <a:ea typeface="Calibri"/>
+              <a:cs typeface="Calibri"/>
+              <a:sym typeface="Calibri"/>
+            </a:endParaRPr>
+          </a:p>
+          <a:p>
+            <a:pPr marL="171450" lvl="0" indent="-114300" algn="l" rtl="0">
+              <a:spcBef>
+                <a:spcPts val="0"/>
+              </a:spcBef>
+              <a:spcAft>
+                <a:spcPts val="0"/>
+              </a:spcAft>
+              <a:buSzPts val="900"/>
+              <a:buFont typeface="Calibri"/>
+              <a:buChar char="●"/>
+            </a:pPr>
+            <a:r>
+              <a:rPr lang="en" sz="900">
+                <a:latin typeface="Calibri"/>
+                <a:ea typeface="Calibri"/>
+                <a:cs typeface="Calibri"/>
+                <a:sym typeface="Calibri"/>
+              </a:rPr>
+              <a:t>Output up to 1M tokens per response, up from 64K</a:t>
+            </a:r>
+            <a:endParaRPr sz="900">
+              <a:latin typeface="Calibri"/>
+              <a:ea typeface="Calibri"/>
+              <a:cs typeface="Calibri"/>
+              <a:sym typeface="Calibri"/>
+            </a:endParaRPr>
+          </a:p>
+          <a:p>
+            <a:pPr marL="171450" lvl="0" indent="-114300" algn="l" rtl="0">
+              <a:spcBef>
+                <a:spcPts val="0"/>
+              </a:spcBef>
+              <a:spcAft>
+                <a:spcPts val="0"/>
+              </a:spcAft>
+              <a:buSzPts val="900"/>
+              <a:buFont typeface="Calibri"/>
+              <a:buChar char="●"/>
+            </a:pPr>
+            <a:r>
+              <a:rPr lang="en" sz="900">
+                <a:latin typeface="Calibri"/>
+                <a:ea typeface="Calibri"/>
+                <a:cs typeface="Calibri"/>
+                <a:sym typeface="Calibri"/>
+              </a:rPr>
+              <a:t>77.9% on DeepSWE v1.1; first on 13 of 19 benchmarks in Google's tests</a:t>
+            </a:r>
+            <a:endParaRPr sz="900">
+              <a:latin typeface="Calibri"/>
+              <a:ea typeface="Calibri"/>
+              <a:cs typeface="Calibri"/>
+              <a:sym typeface="Calibri"/>
+            </a:endParaRPr>
+          </a:p>
+          <a:p>
+            <a:pPr marL="171450" lvl="0" indent="-114300" algn="l" rtl="0">
+              <a:spcBef>
+                <a:spcPts val="0"/>
+              </a:spcBef>
+              <a:spcAft>
+                <a:spcPts val="0"/>
+              </a:spcAft>
+              <a:buSzPts val="900"/>
+              <a:buFont typeface="Calibri"/>
+              <a:buChar char="●"/>
+            </a:pPr>
+            <a:r>
+              <a:rPr lang="en" sz="900">
+                <a:latin typeface="Calibri"/>
+                <a:ea typeface="Calibri"/>
+                <a:cs typeface="Calibri"/>
+                <a:sym typeface="Calibri"/>
+              </a:rPr>
+              <a:t>Artificial Analysis Intelligence Index: 53, tied with GPT-6 Astra</a:t>
+            </a:r>
+            <a:endParaRPr sz="900">
+              <a:latin typeface="Calibri"/>
+              <a:ea typeface="Calibri"/>
+              <a:cs typeface="Calibri"/>
+              <a:sym typeface="Calibri"/>
+            </a:endParaRPr>
+          </a:p>
+          <a:p>
+            <a:pPr marL="171450" lvl="0" indent="-114300" algn="l" rtl="0">
+              <a:spcBef>
+                <a:spcPts val="0"/>
+              </a:spcBef>
+              <a:spcAft>
+                <a:spcPts val="0"/>
+              </a:spcAft>
+              <a:buSzPts val="900"/>
+              <a:buFont typeface="Calibri"/>
+              <a:buChar char="●"/>
+            </a:pPr>
+            <a:r>
+              <a:rPr lang="en" sz="900">
+                <a:latin typeface="Calibri"/>
+                <a:ea typeface="Calibri"/>
+                <a:cs typeface="Calibri"/>
+                <a:sym typeface="Calibri"/>
+              </a:rPr>
+              <a:t>Intro price $2 / $10 per 1M tokens, later $4 / $20</a:t>
+            </a:r>
+            <a:endParaRPr sz="900">
+              <a:latin typeface="Calibri"/>
+              <a:ea typeface="Calibri"/>
+              <a:cs typeface="Calibri"/>
+              <a:sym typeface="Calibri"/>
+            </a:endParaRPr>
+          </a:p>
+          <a:p>
+            <a:pPr marL="171450" lvl="0" indent="-114300" algn="l" rtl="0">
+              <a:spcBef>
+                <a:spcPts val="0"/>
+              </a:spcBef>
+              <a:spcAft>
+                <a:spcPts val="0"/>
+              </a:spcAft>
+              <a:buSzPts val="900"/>
+              <a:buFont typeface="Calibri"/>
+              <a:buChar char="●"/>
+            </a:pPr>
+            <a:r>
+              <a:rPr lang="en" sz="900">
+                <a:latin typeface="Calibri"/>
+                <a:ea typeface="Calibri"/>
+                <a:cs typeface="Calibri"/>
+                <a:sym typeface="Calibri"/>
+              </a:rPr>
+              <a:t>Only for vetted cyber defenders in the Fairwind Program; no public date</a:t>
+            </a:r>
+            <a:endParaRPr sz="900">
+              <a:latin typeface="Calibri"/>
+              <a:ea typeface="Calibri"/>
+              <a:cs typeface="Calibri"/>
+              <a:sym typeface="Calibri"/>
+            </a:endParaRPr>
+          </a:p>
+          <a:p>
+            <a:pPr marL="171450" lvl="0" indent="-114300" algn="l" rtl="0">
+              <a:spcBef>
+                <a:spcPts val="0"/>
+              </a:spcBef>
+              <a:spcAft>
+                <a:spcPts val="0"/>
+              </a:spcAft>
+              <a:buSzPts val="900"/>
+              <a:buFont typeface="Calibri"/>
+              <a:buChar char="●"/>
+            </a:pPr>
+            <a:r>
+              <a:rPr lang="en" sz="900">
+                <a:latin typeface="Calibri"/>
+                <a:ea typeface="Calibri"/>
+                <a:cs typeface="Calibri"/>
+                <a:sym typeface="Calibri"/>
+              </a:rPr>
+              <a:t>Bloomberg: some Google staff doubt its real-world coding; Google disagrees</a:t>
+            </a:r>
+            <a:endParaRPr sz="900">
+              <a:latin typeface="Calibri"/>
+              <a:ea typeface="Calibri"/>
+              <a:cs typeface="Calibri"/>
+              <a:sym typeface="Calibri"/>
+            </a:endParaRPr>
+          </a:p>
+          <a:p>
+            <a:pPr marL="171450" lvl="0" indent="-114300" algn="l" rtl="0">
+              <a:spcBef>
+                <a:spcPts val="0"/>
+              </a:spcBef>
+              <a:spcAft>
+                <a:spcPts val="0"/>
+              </a:spcAft>
+              <a:buSzPts val="900"/>
+              <a:buFont typeface="Calibri"/>
+              <a:buChar char="●"/>
+            </a:pPr>
+            <a:r>
+              <a:rPr lang="en" sz="900">
+                <a:latin typeface="Calibri"/>
+                <a:ea typeface="Calibri"/>
+                <a:cs typeface="Calibri"/>
+                <a:sym typeface="Calibri"/>
+              </a:rPr>
+              <a:t>https://blog.google/innovation-and-ai/models-and-research/gemini-models/gemini-4-argon/ </a:t>
+            </a:r>
+            <a:endParaRPr sz="900">
+              <a:latin typeface="Calibri"/>
+              <a:ea typeface="Calibri"/>
+              <a:cs typeface="Calibri"/>
+              <a:sym typeface="Calibri"/>
+            </a:endParaRPr>
+          </a:p>
+        </p:txBody>
+      </p:sp>
+      <p:sp>
+        <p:nvSpPr>
+          <p:cNvPr id="317" name="Google Shape;317;p44"/>
+          <p:cNvSpPr txBox="1"/>
+          <p:nvPr/>
+        </p:nvSpPr>
+        <p:spPr>
+          <a:xfrm>
+            <a:off x="36575" y="1692400"/>
+            <a:ext cx="3354300" cy="1265100"/>
+          </a:xfrm>
+          <a:prstGeom prst="rect">
+            <a:avLst/>
+          </a:prstGeom>
+          <a:noFill/>
+          <a:ln w="9525" cap="flat" cmpd="sng">
+            <a:solidFill>
+              <a:srgbClr val="FF0000"/>
+            </a:solidFill>
+            <a:prstDash val="solid"/>
+            <a:round/>
+            <a:headEnd type="none" w="sm" len="sm"/>
+            <a:tailEnd type="none" w="sm" len="sm"/>
+          </a:ln>
+        </p:spPr>
+        <p:txBody>
+          <a:bodyPr spcFirstLastPara="1" wrap="square" lIns="9125" tIns="9125" rIns="9125" bIns="9125" anchor="t" anchorCtr="0">
+            <a:spAutoFit/>
+          </a:bodyPr>
+          <a:lstStyle/>
+          <a:p>
+            <a:pPr marL="171450" lvl="0" indent="-114300" algn="l" rtl="0">
+              <a:spcBef>
+                <a:spcPts val="0"/>
+              </a:spcBef>
+              <a:spcAft>
+                <a:spcPts val="0"/>
+              </a:spcAft>
+              <a:buClr>
+                <a:srgbClr val="FF0000"/>
+              </a:buClr>
+              <a:buSzPts val="900"/>
+              <a:buFont typeface="Calibri"/>
+              <a:buChar char="●"/>
+            </a:pPr>
+            <a:r>
+              <a:rPr lang="en" sz="900" b="1">
+                <a:solidFill>
+                  <a:srgbClr val="FF0000"/>
+                </a:solidFill>
+                <a:latin typeface="Calibri"/>
+                <a:ea typeface="Calibri"/>
+                <a:cs typeface="Calibri"/>
+                <a:sym typeface="Calibri"/>
+              </a:rPr>
+              <a:t>OpenAI dots: always-on agents with their own cloud computer</a:t>
+            </a:r>
+            <a:endParaRPr sz="900" b="1">
+              <a:solidFill>
+                <a:srgbClr val="FF0000"/>
+              </a:solidFill>
+              <a:latin typeface="Calibri"/>
+              <a:ea typeface="Calibri"/>
+              <a:cs typeface="Calibri"/>
+              <a:sym typeface="Calibri"/>
+            </a:endParaRPr>
+          </a:p>
+          <a:p>
+            <a:pPr marL="171450" lvl="0" indent="-114300" algn="l" rtl="0">
+              <a:spcBef>
+                <a:spcPts val="0"/>
+              </a:spcBef>
+              <a:spcAft>
+                <a:spcPts val="0"/>
+              </a:spcAft>
+              <a:buSzPts val="900"/>
+              <a:buFont typeface="Calibri"/>
+              <a:buChar char="●"/>
+            </a:pPr>
+            <a:r>
+              <a:rPr lang="en" sz="900">
+                <a:latin typeface="Calibri"/>
+                <a:ea typeface="Calibri"/>
+                <a:cs typeface="Calibri"/>
+                <a:sym typeface="Calibri"/>
+              </a:rPr>
+              <a:t>Launched at DevDay, Sep 29, among 20+ announcements</a:t>
+            </a:r>
+            <a:endParaRPr sz="900">
+              <a:latin typeface="Calibri"/>
+              <a:ea typeface="Calibri"/>
+              <a:cs typeface="Calibri"/>
+              <a:sym typeface="Calibri"/>
+            </a:endParaRPr>
+          </a:p>
+          <a:p>
+            <a:pPr marL="171450" lvl="0" indent="-114300" algn="l" rtl="0">
+              <a:spcBef>
+                <a:spcPts val="0"/>
+              </a:spcBef>
+              <a:spcAft>
+                <a:spcPts val="0"/>
+              </a:spcAft>
+              <a:buSzPts val="900"/>
+              <a:buFont typeface="Calibri"/>
+              <a:buChar char="●"/>
+            </a:pPr>
+            <a:r>
+              <a:rPr lang="en" sz="900">
+                <a:latin typeface="Calibri"/>
+                <a:ea typeface="Calibri"/>
+                <a:cs typeface="Calibri"/>
+                <a:sym typeface="Calibri"/>
+              </a:rPr>
+              <a:t>Each dot runs </a:t>
+            </a:r>
+            <a:r>
+              <a:rPr lang="en" sz="900" b="1">
+                <a:latin typeface="Calibri"/>
+                <a:ea typeface="Calibri"/>
+                <a:cs typeface="Calibri"/>
+                <a:sym typeface="Calibri"/>
+              </a:rPr>
+              <a:t>GPT-6 Astra</a:t>
+            </a:r>
+            <a:r>
+              <a:rPr lang="en" sz="900">
+                <a:latin typeface="Calibri"/>
+                <a:ea typeface="Calibri"/>
+                <a:cs typeface="Calibri"/>
+                <a:sym typeface="Calibri"/>
+              </a:rPr>
+              <a:t> on its own cloud computer and browser</a:t>
+            </a:r>
+            <a:endParaRPr sz="900">
+              <a:latin typeface="Calibri"/>
+              <a:ea typeface="Calibri"/>
+              <a:cs typeface="Calibri"/>
+              <a:sym typeface="Calibri"/>
+            </a:endParaRPr>
+          </a:p>
+          <a:p>
+            <a:pPr marL="171450" lvl="0" indent="-114300" algn="l" rtl="0">
+              <a:spcBef>
+                <a:spcPts val="0"/>
+              </a:spcBef>
+              <a:spcAft>
+                <a:spcPts val="0"/>
+              </a:spcAft>
+              <a:buSzPts val="900"/>
+              <a:buFont typeface="Calibri"/>
+              <a:buChar char="●"/>
+            </a:pPr>
+            <a:r>
+              <a:rPr lang="en" sz="900">
+                <a:latin typeface="Calibri"/>
+                <a:ea typeface="Calibri"/>
+                <a:cs typeface="Calibri"/>
+                <a:sym typeface="Calibri"/>
+              </a:rPr>
+              <a:t>Keeps working after you disconnect; reaches 4,000+ apps</a:t>
+            </a:r>
+            <a:endParaRPr sz="900">
+              <a:latin typeface="Calibri"/>
+              <a:ea typeface="Calibri"/>
+              <a:cs typeface="Calibri"/>
+              <a:sym typeface="Calibri"/>
+            </a:endParaRPr>
+          </a:p>
+          <a:p>
+            <a:pPr marL="171450" lvl="0" indent="-114300" algn="l" rtl="0">
+              <a:spcBef>
+                <a:spcPts val="0"/>
+              </a:spcBef>
+              <a:spcAft>
+                <a:spcPts val="0"/>
+              </a:spcAft>
+              <a:buSzPts val="900"/>
+              <a:buFont typeface="Calibri"/>
+              <a:buChar char="●"/>
+            </a:pPr>
+            <a:r>
+              <a:rPr lang="en" sz="900">
+                <a:latin typeface="Calibri"/>
+                <a:ea typeface="Calibri"/>
+                <a:cs typeface="Calibri"/>
+                <a:sym typeface="Calibri"/>
+              </a:rPr>
+              <a:t>Custom Rules and auto-review gate risky actions</a:t>
+            </a:r>
+            <a:endParaRPr sz="900">
+              <a:latin typeface="Calibri"/>
+              <a:ea typeface="Calibri"/>
+              <a:cs typeface="Calibri"/>
+              <a:sym typeface="Calibri"/>
+            </a:endParaRPr>
+          </a:p>
+          <a:p>
+            <a:pPr marL="171450" lvl="0" indent="-114300" algn="l" rtl="0">
+              <a:spcBef>
+                <a:spcPts val="0"/>
+              </a:spcBef>
+              <a:spcAft>
+                <a:spcPts val="0"/>
+              </a:spcAft>
+              <a:buSzPts val="900"/>
+              <a:buFont typeface="Calibri"/>
+              <a:buChar char="●"/>
+            </a:pPr>
+            <a:r>
+              <a:rPr lang="en" sz="900">
+                <a:latin typeface="Calibri"/>
+                <a:ea typeface="Calibri"/>
+                <a:cs typeface="Calibri"/>
+                <a:sym typeface="Calibri"/>
+              </a:rPr>
+              <a:t>Astra: </a:t>
+            </a:r>
+            <a:r>
+              <a:rPr lang="en" sz="900">
+                <a:highlight>
+                  <a:srgbClr val="FFF2CC"/>
+                </a:highlight>
+                <a:latin typeface="Calibri"/>
+                <a:ea typeface="Calibri"/>
+                <a:cs typeface="Calibri"/>
+                <a:sym typeface="Calibri"/>
+              </a:rPr>
+              <a:t>72.6%</a:t>
+            </a:r>
+            <a:r>
+              <a:rPr lang="en" sz="900">
+                <a:latin typeface="Calibri"/>
+                <a:ea typeface="Calibri"/>
+                <a:cs typeface="Calibri"/>
+                <a:sym typeface="Calibri"/>
+              </a:rPr>
+              <a:t> on OSWorld 2.0, about 40 minutes per task</a:t>
+            </a:r>
+            <a:endParaRPr sz="900">
+              <a:latin typeface="Calibri"/>
+              <a:ea typeface="Calibri"/>
+              <a:cs typeface="Calibri"/>
+              <a:sym typeface="Calibri"/>
+            </a:endParaRPr>
+          </a:p>
+          <a:p>
+            <a:pPr marL="171450" lvl="0" indent="-114300" algn="l" rtl="0">
+              <a:spcBef>
+                <a:spcPts val="0"/>
+              </a:spcBef>
+              <a:spcAft>
+                <a:spcPts val="0"/>
+              </a:spcAft>
+              <a:buSzPts val="900"/>
+              <a:buFont typeface="Calibri"/>
+              <a:buChar char="●"/>
+            </a:pPr>
+            <a:r>
+              <a:rPr lang="en" sz="900">
+                <a:latin typeface="Calibri"/>
+                <a:ea typeface="Calibri"/>
+                <a:cs typeface="Calibri"/>
+                <a:sym typeface="Calibri"/>
+              </a:rPr>
+              <a:t>ChatGPT Pro and Business Premium, 1 primary dot per user</a:t>
+            </a:r>
+            <a:endParaRPr sz="900">
+              <a:latin typeface="Calibri"/>
+              <a:ea typeface="Calibri"/>
+              <a:cs typeface="Calibri"/>
+              <a:sym typeface="Calibri"/>
+            </a:endParaRPr>
+          </a:p>
+          <a:p>
+            <a:pPr marL="171450" lvl="0" indent="-114300" algn="l" rtl="0">
+              <a:spcBef>
+                <a:spcPts val="0"/>
+              </a:spcBef>
+              <a:spcAft>
+                <a:spcPts val="0"/>
+              </a:spcAft>
+              <a:buSzPts val="900"/>
+              <a:buFont typeface="Calibri"/>
+              <a:buChar char="●"/>
+            </a:pPr>
+            <a:r>
+              <a:rPr lang="en" sz="900">
+                <a:latin typeface="Calibri"/>
+                <a:ea typeface="Calibri"/>
+                <a:cs typeface="Calibri"/>
+                <a:sym typeface="Calibri"/>
+              </a:rPr>
+              <a:t>ChatGPT now has </a:t>
+            </a:r>
+            <a:r>
+              <a:rPr lang="en" sz="900">
+                <a:highlight>
+                  <a:srgbClr val="FFF2CC"/>
+                </a:highlight>
+                <a:latin typeface="Calibri"/>
+                <a:ea typeface="Calibri"/>
+                <a:cs typeface="Calibri"/>
+                <a:sym typeface="Calibri"/>
+              </a:rPr>
+              <a:t>1.2B</a:t>
+            </a:r>
+            <a:r>
+              <a:rPr lang="en" sz="900">
+                <a:latin typeface="Calibri"/>
+                <a:ea typeface="Calibri"/>
+                <a:cs typeface="Calibri"/>
+                <a:sym typeface="Calibri"/>
+              </a:rPr>
+              <a:t> weekly users</a:t>
+            </a:r>
+            <a:endParaRPr sz="900">
+              <a:latin typeface="Calibri"/>
+              <a:ea typeface="Calibri"/>
+              <a:cs typeface="Calibri"/>
+              <a:sym typeface="Calibri"/>
+            </a:endParaRPr>
+          </a:p>
+          <a:p>
+            <a:pPr marL="171450" lvl="0" indent="-114300" algn="l" rtl="0">
+              <a:spcBef>
+                <a:spcPts val="0"/>
+              </a:spcBef>
+              <a:spcAft>
+                <a:spcPts val="0"/>
+              </a:spcAft>
+              <a:buSzPts val="900"/>
+              <a:buFont typeface="Calibri"/>
+              <a:buChar char="●"/>
+            </a:pPr>
+            <a:r>
+              <a:rPr lang="en" sz="900" u="sng">
+                <a:solidFill>
+                  <a:schemeClr val="hlink"/>
+                </a:solidFill>
+                <a:latin typeface="Calibri"/>
+                <a:ea typeface="Calibri"/>
+                <a:cs typeface="Calibri"/>
+                <a:sym typeface="Calibri"/>
+                <a:hlinkClick r:id="rId3"/>
+              </a:rPr>
+              <a:t>https://www.latent.space/p/devday-2026</a:t>
+            </a:r>
+            <a:r>
+              <a:rPr lang="en" sz="900">
+                <a:solidFill>
+                  <a:srgbClr val="0563C1"/>
+                </a:solidFill>
+                <a:latin typeface="Calibri"/>
+                <a:ea typeface="Calibri"/>
+                <a:cs typeface="Calibri"/>
+                <a:sym typeface="Calibri"/>
+              </a:rPr>
+              <a:t> </a:t>
+            </a:r>
+            <a:endParaRPr sz="900">
+              <a:solidFill>
+                <a:srgbClr val="0563C1"/>
+              </a:solidFill>
+              <a:latin typeface="Calibri"/>
+              <a:ea typeface="Calibri"/>
+              <a:cs typeface="Calibri"/>
+              <a:sym typeface="Calibri"/>
+            </a:endParaRPr>
+          </a:p>
+        </p:txBody>
+      </p:sp>
+      <p:sp>
+        <p:nvSpPr>
+          <p:cNvPr id="318" name="Google Shape;318;p44"/>
+          <p:cNvSpPr txBox="1"/>
+          <p:nvPr/>
+        </p:nvSpPr>
+        <p:spPr>
+          <a:xfrm>
+            <a:off x="3465575" y="1692400"/>
+            <a:ext cx="3440100" cy="1265100"/>
+          </a:xfrm>
+          <a:prstGeom prst="rect">
+            <a:avLst/>
+          </a:prstGeom>
+          <a:noFill/>
+          <a:ln w="9525" cap="flat" cmpd="sng">
+            <a:solidFill>
+              <a:srgbClr val="FF0000"/>
+            </a:solidFill>
+            <a:prstDash val="solid"/>
+            <a:round/>
+            <a:headEnd type="none" w="sm" len="sm"/>
+            <a:tailEnd type="none" w="sm" len="sm"/>
+          </a:ln>
+        </p:spPr>
+        <p:txBody>
+          <a:bodyPr spcFirstLastPara="1" wrap="square" lIns="9125" tIns="9125" rIns="9125" bIns="9125" anchor="t" anchorCtr="0">
+            <a:spAutoFit/>
+          </a:bodyPr>
+          <a:lstStyle/>
+          <a:p>
+            <a:pPr marL="171450" lvl="0" indent="-114300" algn="l" rtl="0">
+              <a:spcBef>
+                <a:spcPts val="0"/>
+              </a:spcBef>
+              <a:spcAft>
+                <a:spcPts val="0"/>
+              </a:spcAft>
+              <a:buClr>
+                <a:srgbClr val="FF0000"/>
+              </a:buClr>
+              <a:buSzPts val="900"/>
+              <a:buFont typeface="Calibri"/>
+              <a:buChar char="●"/>
+            </a:pPr>
+            <a:r>
+              <a:rPr lang="en" sz="900" b="1">
+                <a:solidFill>
+                  <a:srgbClr val="FF0000"/>
+                </a:solidFill>
+                <a:latin typeface="Calibri"/>
+                <a:ea typeface="Calibri"/>
+                <a:cs typeface="Calibri"/>
+                <a:sym typeface="Calibri"/>
+              </a:rPr>
+              <a:t>GPT-6.1 Sol, Ultrafast tier and Decisions API</a:t>
+            </a:r>
+            <a:endParaRPr sz="900" b="1">
+              <a:solidFill>
+                <a:srgbClr val="FF0000"/>
+              </a:solidFill>
+              <a:latin typeface="Calibri"/>
+              <a:ea typeface="Calibri"/>
+              <a:cs typeface="Calibri"/>
+              <a:sym typeface="Calibri"/>
+            </a:endParaRPr>
+          </a:p>
+          <a:p>
+            <a:pPr marL="171450" lvl="0" indent="-114300" algn="l" rtl="0">
+              <a:spcBef>
+                <a:spcPts val="0"/>
+              </a:spcBef>
+              <a:spcAft>
+                <a:spcPts val="0"/>
+              </a:spcAft>
+              <a:buSzPts val="900"/>
+              <a:buChar char="●"/>
+            </a:pPr>
+            <a:r>
+              <a:rPr lang="en" sz="900">
+                <a:solidFill>
+                  <a:srgbClr val="3C78D8"/>
+                </a:solidFill>
+                <a:latin typeface="Calibri"/>
+                <a:ea typeface="Calibri"/>
+                <a:cs typeface="Calibri"/>
+                <a:sym typeface="Calibri"/>
+              </a:rPr>
+              <a:t>gpt-6.1-sol</a:t>
+            </a:r>
+            <a:r>
+              <a:rPr lang="en" sz="900">
+                <a:latin typeface="Calibri"/>
+                <a:ea typeface="Calibri"/>
+                <a:cs typeface="Calibri"/>
+                <a:sym typeface="Calibri"/>
+              </a:rPr>
+              <a:t>: near-Astra agentic coding at about </a:t>
+            </a:r>
+            <a:r>
+              <a:rPr lang="en" sz="900" b="1">
+                <a:latin typeface="Calibri"/>
+                <a:ea typeface="Calibri"/>
+                <a:cs typeface="Calibri"/>
+                <a:sym typeface="Calibri"/>
+              </a:rPr>
+              <a:t>one-fifth the price</a:t>
+            </a:r>
+            <a:endParaRPr sz="900" b="1">
+              <a:latin typeface="Calibri"/>
+              <a:ea typeface="Calibri"/>
+              <a:cs typeface="Calibri"/>
+              <a:sym typeface="Calibri"/>
+            </a:endParaRPr>
+          </a:p>
+          <a:p>
+            <a:pPr marL="171450" lvl="0" indent="-114300" algn="l" rtl="0">
+              <a:spcBef>
+                <a:spcPts val="0"/>
+              </a:spcBef>
+              <a:spcAft>
+                <a:spcPts val="0"/>
+              </a:spcAft>
+              <a:buSzPts val="900"/>
+              <a:buFont typeface="Calibri"/>
+              <a:buChar char="●"/>
+            </a:pPr>
+            <a:r>
+              <a:rPr lang="en" sz="900">
+                <a:highlight>
+                  <a:srgbClr val="FFF2CC"/>
+                </a:highlight>
+                <a:latin typeface="Calibri"/>
+                <a:ea typeface="Calibri"/>
+                <a:cs typeface="Calibri"/>
+                <a:sym typeface="Calibri"/>
+              </a:rPr>
+              <a:t>$2 / $10</a:t>
+            </a:r>
+            <a:r>
+              <a:rPr lang="en" sz="900">
+                <a:latin typeface="Calibri"/>
+                <a:ea typeface="Calibri"/>
+                <a:cs typeface="Calibri"/>
+                <a:sym typeface="Calibri"/>
+              </a:rPr>
+              <a:t> per 1M tokens, 1.05M context, 128K output</a:t>
+            </a:r>
+            <a:endParaRPr sz="900">
+              <a:latin typeface="Calibri"/>
+              <a:ea typeface="Calibri"/>
+              <a:cs typeface="Calibri"/>
+              <a:sym typeface="Calibri"/>
+            </a:endParaRPr>
+          </a:p>
+          <a:p>
+            <a:pPr marL="171450" lvl="0" indent="-114300" algn="l" rtl="0">
+              <a:spcBef>
+                <a:spcPts val="0"/>
+              </a:spcBef>
+              <a:spcAft>
+                <a:spcPts val="0"/>
+              </a:spcAft>
+              <a:buSzPts val="900"/>
+              <a:buFont typeface="Calibri"/>
+              <a:buChar char="●"/>
+            </a:pPr>
+            <a:r>
+              <a:rPr lang="en" sz="900">
+                <a:latin typeface="Calibri"/>
+                <a:ea typeface="Calibri"/>
+                <a:cs typeface="Calibri"/>
+                <a:sym typeface="Calibri"/>
+              </a:rPr>
+              <a:t>Artificial Analysis: </a:t>
+            </a:r>
+            <a:r>
+              <a:rPr lang="en" sz="900">
+                <a:highlight>
+                  <a:srgbClr val="FFF2CC"/>
+                </a:highlight>
+                <a:latin typeface="Calibri"/>
+                <a:ea typeface="Calibri"/>
+                <a:cs typeface="Calibri"/>
+                <a:sym typeface="Calibri"/>
+              </a:rPr>
+              <a:t>$0.72</a:t>
+            </a:r>
+            <a:r>
+              <a:rPr lang="en" sz="900">
+                <a:latin typeface="Calibri"/>
+                <a:ea typeface="Calibri"/>
+                <a:cs typeface="Calibri"/>
+                <a:sym typeface="Calibri"/>
+              </a:rPr>
+              <a:t> per index task vs $3.26 for Astra</a:t>
+            </a:r>
+            <a:endParaRPr sz="900">
+              <a:latin typeface="Calibri"/>
+              <a:ea typeface="Calibri"/>
+              <a:cs typeface="Calibri"/>
+              <a:sym typeface="Calibri"/>
+            </a:endParaRPr>
+          </a:p>
+          <a:p>
+            <a:pPr marL="171450" lvl="0" indent="-114300" algn="l" rtl="0">
+              <a:spcBef>
+                <a:spcPts val="0"/>
+              </a:spcBef>
+              <a:spcAft>
+                <a:spcPts val="0"/>
+              </a:spcAft>
+              <a:buSzPts val="900"/>
+              <a:buFont typeface="Calibri"/>
+              <a:buChar char="●"/>
+            </a:pPr>
+            <a:r>
+              <a:rPr lang="en" sz="900" b="1">
+                <a:latin typeface="Calibri"/>
+                <a:ea typeface="Calibri"/>
+                <a:cs typeface="Calibri"/>
+                <a:sym typeface="Calibri"/>
+              </a:rPr>
+              <a:t>Ultrafast</a:t>
+            </a:r>
+            <a:r>
+              <a:rPr lang="en" sz="900">
+                <a:latin typeface="Calibri"/>
+                <a:ea typeface="Calibri"/>
+                <a:cs typeface="Calibri"/>
+                <a:sym typeface="Calibri"/>
+              </a:rPr>
+              <a:t>: up to </a:t>
+            </a:r>
+            <a:r>
+              <a:rPr lang="en" sz="900">
+                <a:highlight>
+                  <a:srgbClr val="FFF2CC"/>
+                </a:highlight>
+                <a:latin typeface="Calibri"/>
+                <a:ea typeface="Calibri"/>
+                <a:cs typeface="Calibri"/>
+                <a:sym typeface="Calibri"/>
+              </a:rPr>
+              <a:t>300</a:t>
+            </a:r>
+            <a:r>
+              <a:rPr lang="en" sz="900">
+                <a:latin typeface="Calibri"/>
+                <a:ea typeface="Calibri"/>
+                <a:cs typeface="Calibri"/>
+                <a:sym typeface="Calibri"/>
+              </a:rPr>
+              <a:t> tokens/s, 8x faster in Codex</a:t>
+            </a:r>
+            <a:endParaRPr sz="900">
+              <a:latin typeface="Calibri"/>
+              <a:ea typeface="Calibri"/>
+              <a:cs typeface="Calibri"/>
+              <a:sym typeface="Calibri"/>
+            </a:endParaRPr>
+          </a:p>
+          <a:p>
+            <a:pPr marL="171450" lvl="0" indent="-114300" algn="l" rtl="0">
+              <a:spcBef>
+                <a:spcPts val="0"/>
+              </a:spcBef>
+              <a:spcAft>
+                <a:spcPts val="0"/>
+              </a:spcAft>
+              <a:buSzPts val="900"/>
+              <a:buFont typeface="Calibri"/>
+              <a:buChar char="●"/>
+            </a:pPr>
+            <a:r>
+              <a:rPr lang="en" sz="900">
+                <a:latin typeface="Calibri"/>
+                <a:ea typeface="Calibri"/>
+                <a:cs typeface="Calibri"/>
+                <a:sym typeface="Calibri"/>
+              </a:rPr>
+              <a:t>Ultrafast needs the new Pro 500 plan at $500 per month</a:t>
+            </a:r>
+            <a:endParaRPr sz="900">
+              <a:latin typeface="Calibri"/>
+              <a:ea typeface="Calibri"/>
+              <a:cs typeface="Calibri"/>
+              <a:sym typeface="Calibri"/>
+            </a:endParaRPr>
+          </a:p>
+          <a:p>
+            <a:pPr marL="171450" lvl="0" indent="-114300" algn="l" rtl="0">
+              <a:spcBef>
+                <a:spcPts val="0"/>
+              </a:spcBef>
+              <a:spcAft>
+                <a:spcPts val="0"/>
+              </a:spcAft>
+              <a:buSzPts val="900"/>
+              <a:buFont typeface="Calibri"/>
+              <a:buChar char="●"/>
+            </a:pPr>
+            <a:r>
+              <a:rPr lang="en" sz="900">
+                <a:latin typeface="Calibri"/>
+                <a:ea typeface="Calibri"/>
+                <a:cs typeface="Calibri"/>
+                <a:sym typeface="Calibri"/>
+              </a:rPr>
+              <a:t>Decisions API (yes/no, choice, score) in public beta since Oct 7</a:t>
+            </a:r>
+            <a:endParaRPr sz="900">
+              <a:latin typeface="Calibri"/>
+              <a:ea typeface="Calibri"/>
+              <a:cs typeface="Calibri"/>
+              <a:sym typeface="Calibri"/>
+            </a:endParaRPr>
+          </a:p>
+          <a:p>
+            <a:pPr marL="171450" lvl="0" indent="-114300" algn="l" rtl="0">
+              <a:spcBef>
+                <a:spcPts val="0"/>
+              </a:spcBef>
+              <a:spcAft>
+                <a:spcPts val="0"/>
+              </a:spcAft>
+              <a:buSzPts val="900"/>
+              <a:buFont typeface="Calibri"/>
+              <a:buChar char="●"/>
+            </a:pPr>
+            <a:r>
+              <a:rPr lang="en" sz="900">
+                <a:latin typeface="Calibri"/>
+                <a:ea typeface="Calibri"/>
+                <a:cs typeface="Calibri"/>
+                <a:sym typeface="Calibri"/>
+              </a:rPr>
+              <a:t>Decisions price: </a:t>
+            </a:r>
+            <a:r>
+              <a:rPr lang="en" sz="900">
+                <a:highlight>
+                  <a:srgbClr val="FFF2CC"/>
+                </a:highlight>
+                <a:latin typeface="Calibri"/>
+                <a:ea typeface="Calibri"/>
+                <a:cs typeface="Calibri"/>
+                <a:sym typeface="Calibri"/>
+              </a:rPr>
+              <a:t>$0.10</a:t>
+            </a:r>
+            <a:r>
+              <a:rPr lang="en" sz="900">
+                <a:latin typeface="Calibri"/>
+                <a:ea typeface="Calibri"/>
+                <a:cs typeface="Calibri"/>
+                <a:sym typeface="Calibri"/>
+              </a:rPr>
+              <a:t> per 1M input tokens, no output charge</a:t>
+            </a:r>
+            <a:endParaRPr sz="900">
+              <a:latin typeface="Calibri"/>
+              <a:ea typeface="Calibri"/>
+              <a:cs typeface="Calibri"/>
+              <a:sym typeface="Calibri"/>
+            </a:endParaRPr>
+          </a:p>
+          <a:p>
+            <a:pPr marL="171450" lvl="0" indent="-114300" algn="l" rtl="0">
+              <a:spcBef>
+                <a:spcPts val="0"/>
+              </a:spcBef>
+              <a:spcAft>
+                <a:spcPts val="0"/>
+              </a:spcAft>
+              <a:buSzPts val="900"/>
+              <a:buFont typeface="Calibri"/>
+              <a:buChar char="●"/>
+            </a:pPr>
+            <a:r>
+              <a:rPr lang="en" sz="900" u="sng">
+                <a:solidFill>
+                  <a:schemeClr val="hlink"/>
+                </a:solidFill>
+                <a:latin typeface="Calibri"/>
+                <a:ea typeface="Calibri"/>
+                <a:cs typeface="Calibri"/>
+                <a:sym typeface="Calibri"/>
+                <a:hlinkClick r:id="rId3"/>
+              </a:rPr>
+              <a:t>https://www.latent.space/p/devday-2026</a:t>
+            </a:r>
+            <a:r>
+              <a:rPr lang="en" sz="900">
+                <a:solidFill>
+                  <a:srgbClr val="0563C1"/>
+                </a:solidFill>
+                <a:latin typeface="Calibri"/>
+                <a:ea typeface="Calibri"/>
+                <a:cs typeface="Calibri"/>
+                <a:sym typeface="Calibri"/>
+              </a:rPr>
+              <a:t> </a:t>
+            </a:r>
+            <a:endParaRPr sz="900">
+              <a:solidFill>
+                <a:srgbClr val="0563C1"/>
+              </a:solidFill>
+              <a:latin typeface="Calibri"/>
+              <a:ea typeface="Calibri"/>
+              <a:cs typeface="Calibri"/>
+              <a:sym typeface="Calibri"/>
+            </a:endParaRPr>
+          </a:p>
+        </p:txBody>
+      </p:sp>
+      <p:sp>
+        <p:nvSpPr>
+          <p:cNvPr id="319" name="Google Shape;319;p44"/>
+          <p:cNvSpPr txBox="1"/>
+          <p:nvPr/>
+        </p:nvSpPr>
+        <p:spPr>
+          <a:xfrm>
+            <a:off x="36575" y="2999100"/>
+            <a:ext cx="4144800" cy="849600"/>
+          </a:xfrm>
+          <a:prstGeom prst="rect">
+            <a:avLst/>
+          </a:prstGeom>
+          <a:noFill/>
+          <a:ln w="9525" cap="flat" cmpd="sng">
+            <a:solidFill>
+              <a:srgbClr val="FF0000"/>
+            </a:solidFill>
+            <a:prstDash val="solid"/>
+            <a:round/>
+            <a:headEnd type="none" w="sm" len="sm"/>
+            <a:tailEnd type="none" w="sm" len="sm"/>
+          </a:ln>
+        </p:spPr>
+        <p:txBody>
+          <a:bodyPr spcFirstLastPara="1" wrap="square" lIns="9125" tIns="9125" rIns="9125" bIns="9125" anchor="t" anchorCtr="0">
+            <a:spAutoFit/>
+          </a:bodyPr>
+          <a:lstStyle/>
+          <a:p>
+            <a:pPr marL="171450" lvl="0" indent="-114300" algn="l" rtl="0">
+              <a:spcBef>
+                <a:spcPts val="0"/>
+              </a:spcBef>
+              <a:spcAft>
+                <a:spcPts val="0"/>
+              </a:spcAft>
+              <a:buClr>
+                <a:srgbClr val="FF0000"/>
+              </a:buClr>
+              <a:buSzPts val="900"/>
+              <a:buFont typeface="Calibri"/>
+              <a:buChar char="●"/>
+            </a:pPr>
+            <a:r>
+              <a:rPr lang="en" sz="900" b="1">
+                <a:solidFill>
+                  <a:srgbClr val="FF0000"/>
+                </a:solidFill>
+                <a:latin typeface="Calibri"/>
+                <a:ea typeface="Calibri"/>
+                <a:cs typeface="Calibri"/>
+                <a:sym typeface="Calibri"/>
+              </a:rPr>
+              <a:t>NVIDIA OpenShell: a policy-controlled runtime for agents</a:t>
+            </a:r>
+            <a:endParaRPr sz="900" b="1">
+              <a:solidFill>
+                <a:srgbClr val="FF0000"/>
+              </a:solidFill>
+              <a:latin typeface="Calibri"/>
+              <a:ea typeface="Calibri"/>
+              <a:cs typeface="Calibri"/>
+              <a:sym typeface="Calibri"/>
+            </a:endParaRPr>
+          </a:p>
+          <a:p>
+            <a:pPr marL="171450" lvl="0" indent="-114300" algn="l" rtl="0">
+              <a:spcBef>
+                <a:spcPts val="0"/>
+              </a:spcBef>
+              <a:spcAft>
+                <a:spcPts val="0"/>
+              </a:spcAft>
+              <a:buSzPts val="900"/>
+              <a:buFont typeface="Calibri"/>
+              <a:buChar char="●"/>
+            </a:pPr>
+            <a:r>
+              <a:rPr lang="en" sz="900">
+                <a:latin typeface="Calibri"/>
+                <a:ea typeface="Calibri"/>
+                <a:cs typeface="Calibri"/>
+                <a:sym typeface="Calibri"/>
+              </a:rPr>
+              <a:t>Open-source runtime for </a:t>
+            </a:r>
+            <a:r>
+              <a:rPr lang="en" sz="900" b="1">
+                <a:latin typeface="Calibri"/>
+                <a:ea typeface="Calibri"/>
+                <a:cs typeface="Calibri"/>
+                <a:sym typeface="Calibri"/>
+              </a:rPr>
+              <a:t>autonomous agents</a:t>
+            </a:r>
+            <a:endParaRPr sz="900" b="1">
+              <a:latin typeface="Calibri"/>
+              <a:ea typeface="Calibri"/>
+              <a:cs typeface="Calibri"/>
+              <a:sym typeface="Calibri"/>
+            </a:endParaRPr>
+          </a:p>
+          <a:p>
+            <a:pPr marL="171450" lvl="0" indent="-114300" algn="l" rtl="0">
+              <a:spcBef>
+                <a:spcPts val="0"/>
+              </a:spcBef>
+              <a:spcAft>
+                <a:spcPts val="0"/>
+              </a:spcAft>
+              <a:buSzPts val="900"/>
+              <a:buFont typeface="Calibri"/>
+              <a:buChar char="●"/>
+            </a:pPr>
+            <a:r>
+              <a:rPr lang="en" sz="900">
+                <a:latin typeface="Calibri"/>
+                <a:ea typeface="Calibri"/>
+                <a:cs typeface="Calibri"/>
+                <a:sym typeface="Calibri"/>
+              </a:rPr>
+              <a:t>Enforces file, system-call, network and credential access </a:t>
+            </a:r>
+            <a:r>
+              <a:rPr lang="en" sz="900" b="1">
+                <a:latin typeface="Calibri"/>
+                <a:ea typeface="Calibri"/>
+                <a:cs typeface="Calibri"/>
+                <a:sym typeface="Calibri"/>
+              </a:rPr>
+              <a:t>at the kernel level</a:t>
+            </a:r>
+            <a:endParaRPr sz="900" b="1">
+              <a:latin typeface="Calibri"/>
+              <a:ea typeface="Calibri"/>
+              <a:cs typeface="Calibri"/>
+              <a:sym typeface="Calibri"/>
+            </a:endParaRPr>
+          </a:p>
+          <a:p>
+            <a:pPr marL="171450" lvl="0" indent="-114300" algn="l" rtl="0">
+              <a:spcBef>
+                <a:spcPts val="0"/>
+              </a:spcBef>
+              <a:spcAft>
+                <a:spcPts val="0"/>
+              </a:spcAft>
+              <a:buSzPts val="900"/>
+              <a:buFont typeface="Calibri"/>
+              <a:buChar char="●"/>
+            </a:pPr>
+            <a:r>
+              <a:rPr lang="en" sz="900">
+                <a:latin typeface="Calibri"/>
+                <a:ea typeface="Calibri"/>
+                <a:cs typeface="Calibri"/>
+                <a:sym typeface="Calibri"/>
+              </a:rPr>
+              <a:t>Uses formal verification to find risky permissions before a policy change</a:t>
+            </a:r>
+            <a:endParaRPr sz="900">
+              <a:latin typeface="Calibri"/>
+              <a:ea typeface="Calibri"/>
+              <a:cs typeface="Calibri"/>
+              <a:sym typeface="Calibri"/>
+            </a:endParaRPr>
+          </a:p>
+          <a:p>
+            <a:pPr marL="171450" lvl="0" indent="-114300" algn="l" rtl="0">
+              <a:spcBef>
+                <a:spcPts val="0"/>
+              </a:spcBef>
+              <a:spcAft>
+                <a:spcPts val="0"/>
+              </a:spcAft>
+              <a:buSzPts val="900"/>
+              <a:buFont typeface="Calibri"/>
+              <a:buChar char="●"/>
+            </a:pPr>
+            <a:r>
+              <a:rPr lang="en" sz="900">
+                <a:latin typeface="Calibri"/>
+                <a:ea typeface="Calibri"/>
+                <a:cs typeface="Calibri"/>
+                <a:sym typeface="Calibri"/>
+              </a:rPr>
+              <a:t>Comes the same week OpenAI said its agents may have reached </a:t>
+            </a:r>
+            <a:r>
+              <a:rPr lang="en" sz="900">
+                <a:highlight>
+                  <a:srgbClr val="FFF2CC"/>
+                </a:highlight>
+                <a:latin typeface="Calibri"/>
+                <a:ea typeface="Calibri"/>
+                <a:cs typeface="Calibri"/>
+                <a:sym typeface="Calibri"/>
+              </a:rPr>
+              <a:t>100+</a:t>
+            </a:r>
+            <a:r>
+              <a:rPr lang="en" sz="900">
+                <a:latin typeface="Calibri"/>
+                <a:ea typeface="Calibri"/>
+                <a:cs typeface="Calibri"/>
+                <a:sym typeface="Calibri"/>
+              </a:rPr>
+              <a:t> organizations</a:t>
+            </a:r>
+            <a:endParaRPr sz="900">
+              <a:latin typeface="Calibri"/>
+              <a:ea typeface="Calibri"/>
+              <a:cs typeface="Calibri"/>
+              <a:sym typeface="Calibri"/>
+            </a:endParaRPr>
+          </a:p>
+          <a:p>
+            <a:pPr marL="171450" lvl="0" indent="-114300" algn="l" rtl="0">
+              <a:spcBef>
+                <a:spcPts val="0"/>
+              </a:spcBef>
+              <a:spcAft>
+                <a:spcPts val="0"/>
+              </a:spcAft>
+              <a:buSzPts val="900"/>
+              <a:buFont typeface="Calibri"/>
+              <a:buChar char="●"/>
+            </a:pPr>
+            <a:r>
+              <a:rPr lang="en" sz="900" u="sng">
+                <a:solidFill>
+                  <a:schemeClr val="hlink"/>
+                </a:solidFill>
+                <a:latin typeface="Calibri"/>
+                <a:ea typeface="Calibri"/>
+                <a:cs typeface="Calibri"/>
+                <a:sym typeface="Calibri"/>
+                <a:hlinkClick r:id="rId4"/>
+              </a:rPr>
+              <a:t>https://github.com/NVIDIA/OpenShell</a:t>
+            </a:r>
+            <a:r>
+              <a:rPr lang="en" sz="900">
+                <a:solidFill>
+                  <a:srgbClr val="0563C1"/>
+                </a:solidFill>
+                <a:latin typeface="Calibri"/>
+                <a:ea typeface="Calibri"/>
+                <a:cs typeface="Calibri"/>
+                <a:sym typeface="Calibri"/>
+              </a:rPr>
+              <a:t> </a:t>
+            </a:r>
+            <a:endParaRPr sz="900">
+              <a:solidFill>
+                <a:srgbClr val="0563C1"/>
+              </a:solidFill>
+              <a:latin typeface="Calibri"/>
+              <a:ea typeface="Calibri"/>
+              <a:cs typeface="Calibri"/>
+              <a:sym typeface="Calibri"/>
+            </a:endParaRPr>
+          </a:p>
+        </p:txBody>
+      </p:sp>
+      <p:sp>
+        <p:nvSpPr>
+          <p:cNvPr id="320" name="Google Shape;320;p44"/>
+          <p:cNvSpPr txBox="1"/>
+          <p:nvPr/>
+        </p:nvSpPr>
+        <p:spPr>
+          <a:xfrm>
+            <a:off x="36575" y="3891275"/>
+            <a:ext cx="3621000" cy="1126800"/>
+          </a:xfrm>
+          <a:prstGeom prst="rect">
+            <a:avLst/>
+          </a:prstGeom>
+          <a:noFill/>
+          <a:ln w="9525" cap="flat" cmpd="sng">
+            <a:solidFill>
+              <a:srgbClr val="FF0000"/>
+            </a:solidFill>
+            <a:prstDash val="solid"/>
+            <a:round/>
+            <a:headEnd type="none" w="sm" len="sm"/>
+            <a:tailEnd type="none" w="sm" len="sm"/>
+          </a:ln>
+        </p:spPr>
+        <p:txBody>
+          <a:bodyPr spcFirstLastPara="1" wrap="square" lIns="9125" tIns="9125" rIns="9125" bIns="9125" anchor="t" anchorCtr="0">
+            <a:spAutoFit/>
+          </a:bodyPr>
+          <a:lstStyle/>
+          <a:p>
+            <a:pPr marL="171450" lvl="0" indent="-114300" algn="l" rtl="0">
+              <a:spcBef>
+                <a:spcPts val="0"/>
+              </a:spcBef>
+              <a:spcAft>
+                <a:spcPts val="0"/>
+              </a:spcAft>
+              <a:buClr>
+                <a:srgbClr val="FF0000"/>
+              </a:buClr>
+              <a:buSzPts val="900"/>
+              <a:buFont typeface="Calibri"/>
+              <a:buChar char="●"/>
+            </a:pPr>
+            <a:r>
+              <a:rPr lang="en" sz="900" b="1">
+                <a:solidFill>
+                  <a:srgbClr val="FF0000"/>
+                </a:solidFill>
+                <a:latin typeface="Calibri"/>
+                <a:ea typeface="Calibri"/>
+                <a:cs typeface="Calibri"/>
+                <a:sym typeface="Calibri"/>
+              </a:rPr>
+              <a:t>Open decision models: Cloudflare Clef, AWS Strands Decider, Liquid d1</a:t>
+            </a:r>
+            <a:endParaRPr sz="900" b="1">
+              <a:solidFill>
+                <a:srgbClr val="FF0000"/>
+              </a:solidFill>
+              <a:latin typeface="Calibri"/>
+              <a:ea typeface="Calibri"/>
+              <a:cs typeface="Calibri"/>
+              <a:sym typeface="Calibri"/>
+            </a:endParaRPr>
+          </a:p>
+          <a:p>
+            <a:pPr marL="171450" lvl="0" indent="-114300" algn="l" rtl="0">
+              <a:spcBef>
+                <a:spcPts val="0"/>
+              </a:spcBef>
+              <a:spcAft>
+                <a:spcPts val="0"/>
+              </a:spcAft>
+              <a:buSzPts val="900"/>
+              <a:buFont typeface="Calibri"/>
+              <a:buChar char="●"/>
+            </a:pPr>
+            <a:r>
+              <a:rPr lang="en" sz="900">
+                <a:latin typeface="Calibri"/>
+                <a:ea typeface="Calibri"/>
+                <a:cs typeface="Calibri"/>
+                <a:sym typeface="Calibri"/>
+              </a:rPr>
+              <a:t>Return </a:t>
+            </a:r>
+            <a:r>
+              <a:rPr lang="en" sz="900" b="1">
+                <a:latin typeface="Calibri"/>
+                <a:ea typeface="Calibri"/>
+                <a:cs typeface="Calibri"/>
+                <a:sym typeface="Calibri"/>
+              </a:rPr>
+              <a:t>typed probabilities</a:t>
+            </a:r>
+            <a:r>
+              <a:rPr lang="en" sz="900">
+                <a:latin typeface="Calibri"/>
+                <a:ea typeface="Calibri"/>
+                <a:cs typeface="Calibri"/>
+                <a:sym typeface="Calibri"/>
+              </a:rPr>
+              <a:t>, not text: yes/no, choice, score</a:t>
+            </a:r>
+            <a:endParaRPr sz="900">
+              <a:latin typeface="Calibri"/>
+              <a:ea typeface="Calibri"/>
+              <a:cs typeface="Calibri"/>
+              <a:sym typeface="Calibri"/>
+            </a:endParaRPr>
+          </a:p>
+          <a:p>
+            <a:pPr marL="171450" lvl="0" indent="-114300" algn="l" rtl="0">
+              <a:spcBef>
+                <a:spcPts val="0"/>
+              </a:spcBef>
+              <a:spcAft>
+                <a:spcPts val="0"/>
+              </a:spcAft>
+              <a:buSzPts val="900"/>
+              <a:buFont typeface="Calibri"/>
+              <a:buChar char="●"/>
+            </a:pPr>
+            <a:r>
+              <a:rPr lang="en" sz="900">
+                <a:latin typeface="Calibri"/>
+                <a:ea typeface="Calibri"/>
+                <a:cs typeface="Calibri"/>
+                <a:sym typeface="Calibri"/>
+              </a:rPr>
+              <a:t>Cloudflare </a:t>
+            </a:r>
+            <a:r>
+              <a:rPr lang="en" sz="900" b="1">
+                <a:latin typeface="Calibri"/>
+                <a:ea typeface="Calibri"/>
+                <a:cs typeface="Calibri"/>
+                <a:sym typeface="Calibri"/>
+              </a:rPr>
+              <a:t>Clef</a:t>
+            </a:r>
+            <a:r>
+              <a:rPr lang="en" sz="900">
+                <a:latin typeface="Calibri"/>
+                <a:ea typeface="Calibri"/>
+                <a:cs typeface="Calibri"/>
+                <a:sym typeface="Calibri"/>
+              </a:rPr>
+              <a:t> 27B and Clef-flash 9B, Apache 2.0, Jev-API compatible</a:t>
+            </a:r>
+            <a:endParaRPr sz="900">
+              <a:latin typeface="Calibri"/>
+              <a:ea typeface="Calibri"/>
+              <a:cs typeface="Calibri"/>
+              <a:sym typeface="Calibri"/>
+            </a:endParaRPr>
+          </a:p>
+          <a:p>
+            <a:pPr marL="171450" lvl="0" indent="-114300" algn="l" rtl="0">
+              <a:spcBef>
+                <a:spcPts val="0"/>
+              </a:spcBef>
+              <a:spcAft>
+                <a:spcPts val="0"/>
+              </a:spcAft>
+              <a:buSzPts val="900"/>
+              <a:buFont typeface="Calibri"/>
+              <a:buChar char="●"/>
+            </a:pPr>
+            <a:r>
+              <a:rPr lang="en" sz="900">
+                <a:latin typeface="Calibri"/>
+                <a:ea typeface="Calibri"/>
+                <a:cs typeface="Calibri"/>
+                <a:sym typeface="Calibri"/>
+              </a:rPr>
+              <a:t>Median latency </a:t>
+            </a:r>
+            <a:r>
+              <a:rPr lang="en" sz="900">
+                <a:highlight>
+                  <a:srgbClr val="FFF2CC"/>
+                </a:highlight>
+                <a:latin typeface="Calibri"/>
+                <a:ea typeface="Calibri"/>
+                <a:cs typeface="Calibri"/>
+                <a:sym typeface="Calibri"/>
+              </a:rPr>
+              <a:t>209 ms</a:t>
+            </a:r>
+            <a:r>
+              <a:rPr lang="en" sz="900">
+                <a:latin typeface="Calibri"/>
+                <a:ea typeface="Calibri"/>
+                <a:cs typeface="Calibri"/>
+                <a:sym typeface="Calibri"/>
+              </a:rPr>
+              <a:t> and </a:t>
+            </a:r>
+            <a:r>
+              <a:rPr lang="en" sz="900">
+                <a:highlight>
+                  <a:srgbClr val="FFF2CC"/>
+                </a:highlight>
+                <a:latin typeface="Calibri"/>
+                <a:ea typeface="Calibri"/>
+                <a:cs typeface="Calibri"/>
+                <a:sym typeface="Calibri"/>
+              </a:rPr>
+              <a:t>39 ms</a:t>
+            </a:r>
+            <a:r>
+              <a:rPr lang="en" sz="900">
+                <a:latin typeface="Calibri"/>
+                <a:ea typeface="Calibri"/>
+                <a:cs typeface="Calibri"/>
+                <a:sym typeface="Calibri"/>
+              </a:rPr>
+              <a:t> vs 524 ms for TypeSafe Jev</a:t>
+            </a:r>
+            <a:endParaRPr sz="900">
+              <a:latin typeface="Calibri"/>
+              <a:ea typeface="Calibri"/>
+              <a:cs typeface="Calibri"/>
+              <a:sym typeface="Calibri"/>
+            </a:endParaRPr>
+          </a:p>
+          <a:p>
+            <a:pPr marL="171450" lvl="0" indent="-114300" algn="l" rtl="0">
+              <a:spcBef>
+                <a:spcPts val="0"/>
+              </a:spcBef>
+              <a:spcAft>
+                <a:spcPts val="0"/>
+              </a:spcAft>
+              <a:buSzPts val="900"/>
+              <a:buFont typeface="Calibri"/>
+              <a:buChar char="●"/>
+            </a:pPr>
+            <a:r>
+              <a:rPr lang="en" sz="900">
+                <a:latin typeface="Calibri"/>
+                <a:ea typeface="Calibri"/>
+                <a:cs typeface="Calibri"/>
+                <a:sym typeface="Calibri"/>
+              </a:rPr>
+              <a:t>Clef leads Jev on 7 of 10 benchmarks, by Cloudflare's count</a:t>
+            </a:r>
+            <a:endParaRPr sz="900">
+              <a:latin typeface="Calibri"/>
+              <a:ea typeface="Calibri"/>
+              <a:cs typeface="Calibri"/>
+              <a:sym typeface="Calibri"/>
+            </a:endParaRPr>
+          </a:p>
+          <a:p>
+            <a:pPr marL="171450" lvl="0" indent="-114300" algn="l" rtl="0">
+              <a:spcBef>
+                <a:spcPts val="0"/>
+              </a:spcBef>
+              <a:spcAft>
+                <a:spcPts val="0"/>
+              </a:spcAft>
+              <a:buSzPts val="900"/>
+              <a:buFont typeface="Calibri"/>
+              <a:buChar char="●"/>
+            </a:pPr>
+            <a:r>
+              <a:rPr lang="en" sz="900">
+                <a:latin typeface="Calibri"/>
+                <a:ea typeface="Calibri"/>
+                <a:cs typeface="Calibri"/>
+                <a:sym typeface="Calibri"/>
+              </a:rPr>
+              <a:t>Workers AI price </a:t>
+            </a:r>
+            <a:r>
+              <a:rPr lang="en" sz="900">
+                <a:highlight>
+                  <a:srgbClr val="FFF2CC"/>
+                </a:highlight>
+                <a:latin typeface="Calibri"/>
+                <a:ea typeface="Calibri"/>
+                <a:cs typeface="Calibri"/>
+                <a:sym typeface="Calibri"/>
+              </a:rPr>
+              <a:t>$0.24</a:t>
+            </a:r>
+            <a:r>
+              <a:rPr lang="en" sz="900">
+                <a:latin typeface="Calibri"/>
+                <a:ea typeface="Calibri"/>
+                <a:cs typeface="Calibri"/>
+                <a:sym typeface="Calibri"/>
+              </a:rPr>
+              <a:t> and $0.09 per 1M tokens; also on Ollama</a:t>
+            </a:r>
+            <a:endParaRPr sz="900">
+              <a:latin typeface="Calibri"/>
+              <a:ea typeface="Calibri"/>
+              <a:cs typeface="Calibri"/>
+              <a:sym typeface="Calibri"/>
+            </a:endParaRPr>
+          </a:p>
+          <a:p>
+            <a:pPr marL="171450" lvl="0" indent="-114300" algn="l" rtl="0">
+              <a:spcBef>
+                <a:spcPts val="0"/>
+              </a:spcBef>
+              <a:spcAft>
+                <a:spcPts val="0"/>
+              </a:spcAft>
+              <a:buSzPts val="900"/>
+              <a:buFont typeface="Calibri"/>
+              <a:buChar char="●"/>
+            </a:pPr>
+            <a:r>
+              <a:rPr lang="en" sz="900">
+                <a:latin typeface="Calibri"/>
+                <a:ea typeface="Calibri"/>
+                <a:cs typeface="Calibri"/>
+                <a:sym typeface="Calibri"/>
+              </a:rPr>
+              <a:t>AWS Strands Decider 2B runs on CPU; Liquid d1 now takes images</a:t>
+            </a:r>
+            <a:endParaRPr sz="900">
+              <a:latin typeface="Calibri"/>
+              <a:ea typeface="Calibri"/>
+              <a:cs typeface="Calibri"/>
+              <a:sym typeface="Calibri"/>
+            </a:endParaRPr>
+          </a:p>
+          <a:p>
+            <a:pPr marL="171450" lvl="0" indent="-114300" algn="l" rtl="0">
+              <a:spcBef>
+                <a:spcPts val="0"/>
+              </a:spcBef>
+              <a:spcAft>
+                <a:spcPts val="0"/>
+              </a:spcAft>
+              <a:buSzPts val="900"/>
+              <a:buFont typeface="Calibri"/>
+              <a:buChar char="●"/>
+            </a:pPr>
+            <a:r>
+              <a:rPr lang="en" sz="900" u="sng">
+                <a:solidFill>
+                  <a:schemeClr val="hlink"/>
+                </a:solidFill>
+                <a:latin typeface="Calibri"/>
+                <a:ea typeface="Calibri"/>
+                <a:cs typeface="Calibri"/>
+                <a:sym typeface="Calibri"/>
+                <a:hlinkClick r:id="rId5"/>
+              </a:rPr>
+              <a:t>https://blog.cloudflare.com/clef-decision-models/</a:t>
             </a:r>
             <a:r>
               <a:rPr lang="en" sz="900">
@@ -42767,7 +45650,7 @@
         </p:nvSpPr>
         <p:spPr>
           <a:xfrm>
-            <a:off x="93725" y="616075"/>
+            <a:off x="131700" y="358900"/>
             <a:ext cx="4440300" cy="2419500"/>
           </a:xfrm>
           <a:prstGeom prst="rect">
@@ -43135,8 +46018,342 @@
         </p:blipFill>
         <p:spPr>
           <a:xfrm>
-            <a:off x="4734050" y="516613"/>
+            <a:off x="4715000" y="208913"/>
             <a:ext cx="3425982" cy="2569487"/>
+          </a:xfrm>
+          <a:prstGeom prst="rect">
+            <a:avLst/>
+          </a:prstGeom>
+          <a:noFill/>
+          <a:ln w="9525" cap="flat" cmpd="sng">
+            <a:solidFill>
+              <a:srgbClr val="FF0000"/>
+            </a:solidFill>
+            <a:prstDash val="solid"/>
+            <a:round/>
+            <a:headEnd type="none" w="sm" len="sm"/>
+            <a:tailEnd type="none" w="sm" len="sm"/>
+          </a:ln>
+        </p:spPr>
+      </p:pic>
+      <p:sp>
+        <p:nvSpPr>
+          <p:cNvPr id="89" name="Google Shape;89;p16"/>
+          <p:cNvSpPr txBox="1"/>
+          <p:nvPr/>
+        </p:nvSpPr>
+        <p:spPr>
+          <a:xfrm>
+            <a:off x="131700" y="3216400"/>
+            <a:ext cx="3830700" cy="1449900"/>
+          </a:xfrm>
+          <a:prstGeom prst="rect">
+            <a:avLst/>
+          </a:prstGeom>
+          <a:solidFill>
+            <a:srgbClr val="FFF2CC"/>
+          </a:solidFill>
+          <a:ln w="9525" cap="flat" cmpd="sng">
+            <a:solidFill>
+              <a:srgbClr val="FF0000"/>
+            </a:solidFill>
+            <a:prstDash val="solid"/>
+            <a:round/>
+            <a:headEnd type="none" w="sm" len="sm"/>
+            <a:tailEnd type="none" w="sm" len="sm"/>
+          </a:ln>
+        </p:spPr>
+        <p:txBody>
+          <a:bodyPr spcFirstLastPara="1" wrap="square" lIns="9125" tIns="9125" rIns="9125" bIns="9125" anchor="t" anchorCtr="0">
+            <a:spAutoFit/>
+          </a:bodyPr>
+          <a:lstStyle/>
+          <a:p>
+            <a:pPr marL="171450" lvl="0" indent="-133350" algn="l" rtl="0">
+              <a:spcBef>
+                <a:spcPts val="0"/>
+              </a:spcBef>
+              <a:spcAft>
+                <a:spcPts val="0"/>
+              </a:spcAft>
+              <a:buClr>
+                <a:srgbClr val="FF0000"/>
+              </a:buClr>
+              <a:buSzPts val="1200"/>
+              <a:buFont typeface="Calibri"/>
+              <a:buChar char="●"/>
+            </a:pPr>
+            <a:r>
+              <a:rPr lang="en" sz="1200" b="1">
+                <a:solidFill>
+                  <a:srgbClr val="FF0000"/>
+                </a:solidFill>
+                <a:latin typeface="Calibri"/>
+                <a:ea typeface="Calibri"/>
+                <a:cs typeface="Calibri"/>
+                <a:sym typeface="Calibri"/>
+              </a:rPr>
+              <a:t>Mistral Large 4 "Le Chonk"</a:t>
+            </a:r>
+            <a:endParaRPr sz="1200" b="1">
+              <a:solidFill>
+                <a:srgbClr val="FF0000"/>
+              </a:solidFill>
+              <a:latin typeface="Calibri"/>
+              <a:ea typeface="Calibri"/>
+              <a:cs typeface="Calibri"/>
+              <a:sym typeface="Calibri"/>
+            </a:endParaRPr>
+          </a:p>
+          <a:p>
+            <a:pPr marL="171450" lvl="0" indent="-133350" algn="l" rtl="0">
+              <a:spcBef>
+                <a:spcPts val="0"/>
+              </a:spcBef>
+              <a:spcAft>
+                <a:spcPts val="0"/>
+              </a:spcAft>
+              <a:buSzPts val="1200"/>
+              <a:buFont typeface="Calibri"/>
+              <a:buChar char="●"/>
+            </a:pPr>
+            <a:r>
+              <a:rPr lang="en" sz="1200" b="1">
+                <a:latin typeface="Calibri"/>
+                <a:ea typeface="Calibri"/>
+                <a:cs typeface="Calibri"/>
+                <a:sym typeface="Calibri"/>
+              </a:rPr>
+              <a:t>1.05T</a:t>
+            </a:r>
+            <a:r>
+              <a:rPr lang="en" sz="1200">
+                <a:latin typeface="Calibri"/>
+                <a:ea typeface="Calibri"/>
+                <a:cs typeface="Calibri"/>
+                <a:sym typeface="Calibri"/>
+              </a:rPr>
+              <a:t> params, 49B active per token, natively multimodal</a:t>
+            </a:r>
+            <a:endParaRPr sz="1200">
+              <a:latin typeface="Calibri"/>
+              <a:ea typeface="Calibri"/>
+              <a:cs typeface="Calibri"/>
+              <a:sym typeface="Calibri"/>
+            </a:endParaRPr>
+          </a:p>
+          <a:p>
+            <a:pPr marL="171450" lvl="0" indent="-133350" algn="l" rtl="0">
+              <a:spcBef>
+                <a:spcPts val="0"/>
+              </a:spcBef>
+              <a:spcAft>
+                <a:spcPts val="0"/>
+              </a:spcAft>
+              <a:buSzPts val="1200"/>
+              <a:buFont typeface="Calibri"/>
+              <a:buChar char="●"/>
+            </a:pPr>
+            <a:r>
+              <a:rPr lang="en" sz="1200">
+                <a:latin typeface="Calibri"/>
+                <a:ea typeface="Calibri"/>
+                <a:cs typeface="Calibri"/>
+                <a:sym typeface="Calibri"/>
+              </a:rPr>
+              <a:t>1M context, 160+ languages</a:t>
+            </a:r>
+            <a:endParaRPr sz="1200">
+              <a:latin typeface="Calibri"/>
+              <a:ea typeface="Calibri"/>
+              <a:cs typeface="Calibri"/>
+              <a:sym typeface="Calibri"/>
+            </a:endParaRPr>
+          </a:p>
+          <a:p>
+            <a:pPr marL="171450" lvl="0" indent="-133350" algn="l" rtl="0">
+              <a:spcBef>
+                <a:spcPts val="0"/>
+              </a:spcBef>
+              <a:spcAft>
+                <a:spcPts val="0"/>
+              </a:spcAft>
+              <a:buSzPts val="1200"/>
+              <a:buFont typeface="Calibri"/>
+              <a:buChar char="●"/>
+            </a:pPr>
+            <a:r>
+              <a:rPr lang="en" sz="1200">
+                <a:latin typeface="Calibri"/>
+                <a:ea typeface="Calibri"/>
+                <a:cs typeface="Calibri"/>
+                <a:sym typeface="Calibri"/>
+              </a:rPr>
+              <a:t>Trained from scratch on 3,800 Grace Blackwell GPUs</a:t>
+            </a:r>
+            <a:endParaRPr sz="1200">
+              <a:latin typeface="Calibri"/>
+              <a:ea typeface="Calibri"/>
+              <a:cs typeface="Calibri"/>
+              <a:sym typeface="Calibri"/>
+            </a:endParaRPr>
+          </a:p>
+          <a:p>
+            <a:pPr marL="171450" lvl="0" indent="-133350" algn="l" rtl="0">
+              <a:spcBef>
+                <a:spcPts val="0"/>
+              </a:spcBef>
+              <a:spcAft>
+                <a:spcPts val="0"/>
+              </a:spcAft>
+              <a:buSzPts val="1200"/>
+              <a:buFont typeface="Calibri"/>
+              <a:buChar char="●"/>
+            </a:pPr>
+            <a:r>
+              <a:rPr lang="en" sz="1200">
+                <a:latin typeface="Calibri"/>
+                <a:ea typeface="Calibri"/>
+                <a:cs typeface="Calibri"/>
+                <a:sym typeface="Calibri"/>
+              </a:rPr>
+              <a:t>Cybench 93%; DeepSWE v1.1 61.7%</a:t>
+            </a:r>
+            <a:endParaRPr sz="1200">
+              <a:latin typeface="Calibri"/>
+              <a:ea typeface="Calibri"/>
+              <a:cs typeface="Calibri"/>
+              <a:sym typeface="Calibri"/>
+            </a:endParaRPr>
+          </a:p>
+          <a:p>
+            <a:pPr marL="171450" lvl="0" indent="-133350" algn="l" rtl="0">
+              <a:spcBef>
+                <a:spcPts val="0"/>
+              </a:spcBef>
+              <a:spcAft>
+                <a:spcPts val="0"/>
+              </a:spcAft>
+              <a:buSzPts val="1200"/>
+              <a:buFont typeface="Calibri"/>
+              <a:buChar char="●"/>
+            </a:pPr>
+            <a:r>
+              <a:rPr lang="en" sz="1200">
+                <a:latin typeface="Calibri"/>
+                <a:ea typeface="Calibri"/>
+                <a:cs typeface="Calibri"/>
+                <a:sym typeface="Calibri"/>
+              </a:rPr>
+              <a:t>API: $1.36 / $4.18 per 1M tokens</a:t>
+            </a:r>
+            <a:endParaRPr sz="1200">
+              <a:latin typeface="Calibri"/>
+              <a:ea typeface="Calibri"/>
+              <a:cs typeface="Calibri"/>
+              <a:sym typeface="Calibri"/>
+            </a:endParaRPr>
+          </a:p>
+          <a:p>
+            <a:pPr marL="171450" lvl="0" indent="-133350" algn="l" rtl="0">
+              <a:spcBef>
+                <a:spcPts val="0"/>
+              </a:spcBef>
+              <a:spcAft>
+                <a:spcPts val="0"/>
+              </a:spcAft>
+              <a:buSzPts val="1200"/>
+              <a:buFont typeface="Calibri"/>
+              <a:buChar char="●"/>
+            </a:pPr>
+            <a:r>
+              <a:rPr lang="en" sz="1200">
+                <a:latin typeface="Calibri"/>
+                <a:ea typeface="Calibri"/>
+                <a:cs typeface="Calibri"/>
+                <a:sym typeface="Calibri"/>
+              </a:rPr>
+              <a:t>Open weights promised in October</a:t>
+            </a:r>
+            <a:endParaRPr sz="1200" b="1">
+              <a:latin typeface="Calibri"/>
+              <a:ea typeface="Calibri"/>
+              <a:cs typeface="Calibri"/>
+              <a:sym typeface="Calibri"/>
+            </a:endParaRPr>
+          </a:p>
+          <a:p>
+            <a:pPr marL="171450" lvl="0" indent="-114300" algn="l" rtl="0">
+              <a:spcBef>
+                <a:spcPts val="0"/>
+              </a:spcBef>
+              <a:spcAft>
+                <a:spcPts val="0"/>
+              </a:spcAft>
+              <a:buSzPts val="900"/>
+              <a:buFont typeface="Calibri"/>
+              <a:buChar char="●"/>
+            </a:pPr>
+            <a:r>
+              <a:rPr lang="en" sz="900" u="sng">
+                <a:solidFill>
+                  <a:schemeClr val="hlink"/>
+                </a:solidFill>
+                <a:latin typeface="Calibri"/>
+                <a:ea typeface="Calibri"/>
+                <a:cs typeface="Calibri"/>
+                <a:sym typeface="Calibri"/>
+                <a:hlinkClick r:id="rId4"/>
+              </a:rPr>
+              <a:t>https://mistral.ai/news/mistral-large-4/</a:t>
+            </a:r>
+            <a:r>
+              <a:rPr lang="en" sz="900">
+                <a:solidFill>
+                  <a:srgbClr val="0563C1"/>
+                </a:solidFill>
+                <a:latin typeface="Calibri"/>
+                <a:ea typeface="Calibri"/>
+                <a:cs typeface="Calibri"/>
+                <a:sym typeface="Calibri"/>
+              </a:rPr>
+              <a:t> </a:t>
+            </a:r>
+            <a:endParaRPr sz="900">
+              <a:solidFill>
+                <a:srgbClr val="0563C1"/>
+              </a:solidFill>
+              <a:latin typeface="Calibri"/>
+              <a:ea typeface="Calibri"/>
+              <a:cs typeface="Calibri"/>
+              <a:sym typeface="Calibri"/>
+            </a:endParaRPr>
+          </a:p>
+        </p:txBody>
+      </p:sp>
+      <p:pic>
+        <p:nvPicPr>
+          <p:cNvPr id="90" name="Google Shape;90;p16"/>
+          <p:cNvPicPr preferRelativeResize="0"/>
+          <p:nvPr/>
+        </p:nvPicPr>
+        <p:blipFill>
+          <a:blip r:embed="rId5" cstate="email">
+            <a:alphaModFix/>
+            <a:extLst>
+              <a:ext uri="{28A0092B-C50C-407E-A947-70E740481C1C}">
+                <a14:useLocalDpi xmlns:a14="http://schemas.microsoft.com/office/drawing/2010/main"/>
+              </a:ext>
+            </a:extLst>
+          </a:blip>
+          <a:stretch>
+            <a:fillRect/>
+          </a:stretch>
+        </p:blipFill>
+        <p:spPr>
+          <a:xfrm>
+            <a:off x="4086225" y="2955300"/>
+            <a:ext cx="1476375" cy="1972100"/>
           </a:xfrm>
           <a:prstGeom prst="rect">
             <a:avLst/>
@@ -43166,7 +46383,7 @@
   <p:cSld>
     <p:spTree>
       <p:nvGrpSpPr>
-        <p:cNvPr id="1" name="Shape 92"/>
+        <p:cNvPr id="1" name="Shape 94"/>
         <p:cNvGrpSpPr/>
         <p:nvPr/>
       </p:nvGrpSpPr>
@@ -43180,7 +46397,7 @@
       </p:grpSpPr>
       <p:sp>
         <p:nvSpPr>
-          <p:cNvPr id="93" name="Google Shape;93;p17"/>
+          <p:cNvPr id="95" name="Google Shape;95;p17"/>
           <p:cNvSpPr txBox="1"/>
           <p:nvPr/>
         </p:nvSpPr>
@@ -43232,7 +46449,7 @@
       </p:sp>
       <p:sp>
         <p:nvSpPr>
-          <p:cNvPr id="94" name="Google Shape;94;p17"/>
+          <p:cNvPr id="96" name="Google Shape;96;p17"/>
           <p:cNvSpPr txBox="1"/>
           <p:nvPr/>
         </p:nvSpPr>
@@ -43834,7 +47051,7 @@
       </p:sp>
       <p:pic>
         <p:nvPicPr>
-          <p:cNvPr id="95" name="Google Shape;95;p17"/>
+          <p:cNvPr id="97" name="Google Shape;97;p17"/>
           <p:cNvPicPr preferRelativeResize="0"/>
           <p:nvPr/>
         </p:nvPicPr>
@@ -43884,7 +47101,7 @@
   <p:cSld>
     <p:spTree>
       <p:nvGrpSpPr>
-        <p:cNvPr id="1" name="Shape 99"/>
+        <p:cNvPr id="1" name="Shape 101"/>
         <p:cNvGrpSpPr/>
         <p:nvPr/>
       </p:nvGrpSpPr>
@@ -43898,7 +47115,7 @@
       </p:grpSpPr>
       <p:sp>
         <p:nvSpPr>
-          <p:cNvPr id="100" name="Google Shape;100;p18"/>
+          <p:cNvPr id="102" name="Google Shape;102;p18"/>
           <p:cNvSpPr txBox="1"/>
           <p:nvPr/>
         </p:nvSpPr>
@@ -43950,7 +47167,7 @@
       </p:sp>
       <p:sp>
         <p:nvSpPr>
-          <p:cNvPr id="101" name="Google Shape;101;p18"/>
+          <p:cNvPr id="103" name="Google Shape;103;p18"/>
           <p:cNvSpPr txBox="1"/>
           <p:nvPr/>
         </p:nvSpPr>
@@ -44429,7 +47646,7 @@
       </p:sp>
       <p:pic>
         <p:nvPicPr>
-          <p:cNvPr id="102" name="Google Shape;102;p18"/>
+          <p:cNvPr id="104" name="Google Shape;104;p18"/>
           <p:cNvPicPr preferRelativeResize="0"/>
           <p:nvPr/>
         </p:nvPicPr>
@@ -44479,7 +47696,7 @@
   <p:cSld>
     <p:spTree>
       <p:nvGrpSpPr>
-        <p:cNvPr id="1" name="Shape 106"/>
+        <p:cNvPr id="1" name="Shape 108"/>
         <p:cNvGrpSpPr/>
         <p:nvPr/>
       </p:nvGrpSpPr>
@@ -44493,7 +47710,7 @@
       </p:grpSpPr>
       <p:sp>
         <p:nvSpPr>
-          <p:cNvPr id="107" name="Google Shape;107;p19"/>
+          <p:cNvPr id="109" name="Google Shape;109;p19"/>
           <p:cNvSpPr txBox="1"/>
           <p:nvPr/>
         </p:nvSpPr>
@@ -44545,7 +47762,7 @@
       </p:sp>
       <p:sp>
         <p:nvSpPr>
-          <p:cNvPr id="108" name="Google Shape;108;p19"/>
+          <p:cNvPr id="110" name="Google Shape;110;p19"/>
           <p:cNvSpPr txBox="1"/>
           <p:nvPr/>
         </p:nvSpPr>
@@ -45186,7 +48403,7 @@
       </p:sp>
       <p:pic>
         <p:nvPicPr>
-          <p:cNvPr id="109" name="Google Shape;109;p19"/>
+          <p:cNvPr id="111" name="Google Shape;111;p19"/>
           <p:cNvPicPr preferRelativeResize="0"/>
           <p:nvPr/>
         </p:nvPicPr>
@@ -45236,7 +48453,7 @@
   <p:cSld>
     <p:spTree>
       <p:nvGrpSpPr>
-        <p:cNvPr id="1" name="Shape 113"/>
+        <p:cNvPr id="1" name="Shape 115"/>
         <p:cNvGrpSpPr/>
         <p:nvPr/>
       </p:nvGrpSpPr>
@@ -45250,7 +48467,7 @@
       </p:grpSpPr>
       <p:sp>
         <p:nvSpPr>
-          <p:cNvPr id="114" name="Google Shape;114;p20"/>
+          <p:cNvPr id="116" name="Google Shape;116;p20"/>
           <p:cNvSpPr txBox="1"/>
           <p:nvPr/>
         </p:nvSpPr>
@@ -45302,7 +48519,7 @@
       </p:sp>
       <p:sp>
         <p:nvSpPr>
-          <p:cNvPr id="115" name="Google Shape;115;p20"/>
+          <p:cNvPr id="117" name="Google Shape;117;p20"/>
           <p:cNvSpPr txBox="1"/>
           <p:nvPr/>
         </p:nvSpPr>
@@ -45684,7 +48901,7 @@
       </p:sp>
       <p:pic>
         <p:nvPicPr>
-          <p:cNvPr id="116" name="Google Shape;116;p20"/>
+          <p:cNvPr id="118" name="Google Shape;118;p20"/>
           <p:cNvPicPr preferRelativeResize="0"/>
           <p:nvPr/>
         </p:nvPicPr>
@@ -45728,7 +48945,7 @@
   <p:cSld>
     <p:spTree>
       <p:nvGrpSpPr>
-        <p:cNvPr id="1" name="Shape 120"/>
+        <p:cNvPr id="1" name="Shape 122"/>
         <p:cNvGrpSpPr/>
         <p:nvPr/>
       </p:nvGrpSpPr>
@@ -45742,7 +48959,7 @@
       </p:grpSpPr>
       <p:sp>
         <p:nvSpPr>
-          <p:cNvPr id="121" name="Google Shape;121;p21"/>
+          <p:cNvPr id="123" name="Google Shape;123;p21"/>
           <p:cNvSpPr txBox="1"/>
           <p:nvPr/>
         </p:nvSpPr>
@@ -45794,7 +49011,7 @@
       </p:sp>
       <p:pic>
         <p:nvPicPr>
-          <p:cNvPr id="122" name="Google Shape;122;p21" descr="auto: youtube-videos"/>
+          <p:cNvPr id="124" name="Google Shape;124;p21" descr="auto: youtube-videos"/>
           <p:cNvPicPr preferRelativeResize="0"/>
           <p:nvPr/>
         </p:nvPicPr>
@@ -45833,7 +49050,7 @@
       </p:pic>
       <p:pic>
         <p:nvPicPr>
-          <p:cNvPr id="123" name="Google Shape;123;p21" descr="auto: youtube-shorts"/>
+          <p:cNvPr id="125" name="Google Shape;125;p21" descr="auto: youtube-shorts"/>
           <p:cNvPicPr preferRelativeResize="0"/>
           <p:nvPr/>
         </p:nvPicPr>
@@ -45872,7 +49089,7 @@
       </p:pic>
       <p:sp>
         <p:nvSpPr>
-          <p:cNvPr id="124" name="Google Shape;124;p21"/>
+          <p:cNvPr id="126" name="Google Shape;126;p21"/>
           <p:cNvSpPr txBox="1"/>
           <p:nvPr/>
         </p:nvSpPr>
